--- a/AI_Viewers_Hackathon_Presentation_v2.pptx
+++ b/AI_Viewers_Hackathon_Presentation_v2.pptx
@@ -117,7 +117,18 @@
   </p:defaultTextStyle>
   <p:extLst>
     <p:ext uri="{EFAFB233-063F-42B5-8137-9DF3F51BA10A}">
-      <p15:sldGuideLst xmlns:p15="http://schemas.microsoft.com/office/powerpoint/2012/main" xmlns=""/>
+      <p15:sldGuideLst xmlns:p15="http://schemas.microsoft.com/office/powerpoint/2012/main">
+        <p15:guide id="1" orient="horz" pos="2160">
+          <p15:clr>
+            <a:srgbClr val="A4A3A4"/>
+          </p15:clr>
+        </p15:guide>
+        <p15:guide id="2" pos="3840">
+          <p15:clr>
+            <a:srgbClr val="A4A3A4"/>
+          </p15:clr>
+        </p15:guide>
+      </p15:sldGuideLst>
     </p:ext>
   </p:extLst>
 </p:presentation>
@@ -205,7 +216,7 @@
           <a:p>
             <a:fld id="{FD8B9730-C9F6-4FF6-8B50-FCF72AE02E3F}" type="datetimeFigureOut">
               <a:rPr lang="en-IN" smtClean="0"/>
-              <a:t>13-03-2026</a:t>
+              <a:t>15-03-2026</a:t>
             </a:fld>
             <a:endParaRPr lang="en-IN"/>
           </a:p>
@@ -495,7 +506,7 @@
           <p:cNvPr id="2" name="Title 1">
             <a:extLst>
               <a:ext uri="{FF2B5EF4-FFF2-40B4-BE49-F238E27FC236}">
-                <a16:creationId xmlns:a16="http://schemas.microsoft.com/office/drawing/2014/main" xmlns="" id="{3B7C93CC-52ED-48C6-B4FB-A900E7E71E1A}"/>
+                <a16:creationId xmlns:a16="http://schemas.microsoft.com/office/drawing/2014/main" id="{3B7C93CC-52ED-48C6-B4FB-A900E7E71E1A}"/>
               </a:ext>
             </a:extLst>
           </p:cNvPr>
@@ -533,7 +544,7 @@
           <p:cNvPr id="3" name="Subtitle 2">
             <a:extLst>
               <a:ext uri="{FF2B5EF4-FFF2-40B4-BE49-F238E27FC236}">
-                <a16:creationId xmlns:a16="http://schemas.microsoft.com/office/drawing/2014/main" xmlns="" id="{711B921D-333D-50CF-2B5F-50703EA2761C}"/>
+                <a16:creationId xmlns:a16="http://schemas.microsoft.com/office/drawing/2014/main" id="{711B921D-333D-50CF-2B5F-50703EA2761C}"/>
               </a:ext>
             </a:extLst>
           </p:cNvPr>
@@ -604,7 +615,7 @@
           <p:cNvPr id="4" name="Date Placeholder 3">
             <a:extLst>
               <a:ext uri="{FF2B5EF4-FFF2-40B4-BE49-F238E27FC236}">
-                <a16:creationId xmlns:a16="http://schemas.microsoft.com/office/drawing/2014/main" xmlns="" id="{447B6255-C732-731A-6D5D-524C8FAC2472}"/>
+                <a16:creationId xmlns:a16="http://schemas.microsoft.com/office/drawing/2014/main" id="{447B6255-C732-731A-6D5D-524C8FAC2472}"/>
               </a:ext>
             </a:extLst>
           </p:cNvPr>
@@ -622,7 +633,7 @@
           <a:p>
             <a:fld id="{B0EBE5CA-C56E-4B79-B345-6747DECA69D6}" type="datetime1">
               <a:rPr lang="en-IN" smtClean="0"/>
-              <a:t>13-03-2026</a:t>
+              <a:t>15-03-2026</a:t>
             </a:fld>
             <a:endParaRPr lang="en-IN"/>
           </a:p>
@@ -633,7 +644,7 @@
           <p:cNvPr id="5" name="Footer Placeholder 4">
             <a:extLst>
               <a:ext uri="{FF2B5EF4-FFF2-40B4-BE49-F238E27FC236}">
-                <a16:creationId xmlns:a16="http://schemas.microsoft.com/office/drawing/2014/main" xmlns="" id="{A5E70FFB-9FFF-C54D-CB92-DD7C76B1543A}"/>
+                <a16:creationId xmlns:a16="http://schemas.microsoft.com/office/drawing/2014/main" id="{A5E70FFB-9FFF-C54D-CB92-DD7C76B1543A}"/>
               </a:ext>
             </a:extLst>
           </p:cNvPr>
@@ -658,7 +669,7 @@
           <p:cNvPr id="6" name="Slide Number Placeholder 5">
             <a:extLst>
               <a:ext uri="{FF2B5EF4-FFF2-40B4-BE49-F238E27FC236}">
-                <a16:creationId xmlns:a16="http://schemas.microsoft.com/office/drawing/2014/main" xmlns="" id="{803BF83A-EEAB-290E-1520-6AC01A1D3460}"/>
+                <a16:creationId xmlns:a16="http://schemas.microsoft.com/office/drawing/2014/main" id="{803BF83A-EEAB-290E-1520-6AC01A1D3460}"/>
               </a:ext>
             </a:extLst>
           </p:cNvPr>
@@ -717,7 +728,7 @@
           <p:cNvPr id="2" name="Title 1">
             <a:extLst>
               <a:ext uri="{FF2B5EF4-FFF2-40B4-BE49-F238E27FC236}">
-                <a16:creationId xmlns:a16="http://schemas.microsoft.com/office/drawing/2014/main" xmlns="" id="{BB0E930B-7FC8-2C11-E7AC-DE70426314D7}"/>
+                <a16:creationId xmlns:a16="http://schemas.microsoft.com/office/drawing/2014/main" id="{BB0E930B-7FC8-2C11-E7AC-DE70426314D7}"/>
               </a:ext>
             </a:extLst>
           </p:cNvPr>
@@ -746,7 +757,7 @@
           <p:cNvPr id="3" name="Vertical Text Placeholder 2">
             <a:extLst>
               <a:ext uri="{FF2B5EF4-FFF2-40B4-BE49-F238E27FC236}">
-                <a16:creationId xmlns:a16="http://schemas.microsoft.com/office/drawing/2014/main" xmlns="" id="{EEFF5B1D-0F8B-9CDD-59CF-F7ADA2CE28D9}"/>
+                <a16:creationId xmlns:a16="http://schemas.microsoft.com/office/drawing/2014/main" id="{EEFF5B1D-0F8B-9CDD-59CF-F7ADA2CE28D9}"/>
               </a:ext>
             </a:extLst>
           </p:cNvPr>
@@ -804,7 +815,7 @@
           <p:cNvPr id="4" name="Date Placeholder 3">
             <a:extLst>
               <a:ext uri="{FF2B5EF4-FFF2-40B4-BE49-F238E27FC236}">
-                <a16:creationId xmlns:a16="http://schemas.microsoft.com/office/drawing/2014/main" xmlns="" id="{3AF2378D-FF98-B657-2A71-2A5ADFD303EB}"/>
+                <a16:creationId xmlns:a16="http://schemas.microsoft.com/office/drawing/2014/main" id="{3AF2378D-FF98-B657-2A71-2A5ADFD303EB}"/>
               </a:ext>
             </a:extLst>
           </p:cNvPr>
@@ -822,7 +833,7 @@
           <a:p>
             <a:fld id="{989B3E3C-862D-4834-9AEC-9FAE86CCA9D4}" type="datetime1">
               <a:rPr lang="en-IN" smtClean="0"/>
-              <a:t>13-03-2026</a:t>
+              <a:t>15-03-2026</a:t>
             </a:fld>
             <a:endParaRPr lang="en-IN"/>
           </a:p>
@@ -833,7 +844,7 @@
           <p:cNvPr id="5" name="Footer Placeholder 4">
             <a:extLst>
               <a:ext uri="{FF2B5EF4-FFF2-40B4-BE49-F238E27FC236}">
-                <a16:creationId xmlns:a16="http://schemas.microsoft.com/office/drawing/2014/main" xmlns="" id="{F3CD4ECC-19A9-49D1-E9E2-0C3CBFD76C66}"/>
+                <a16:creationId xmlns:a16="http://schemas.microsoft.com/office/drawing/2014/main" id="{F3CD4ECC-19A9-49D1-E9E2-0C3CBFD76C66}"/>
               </a:ext>
             </a:extLst>
           </p:cNvPr>
@@ -858,7 +869,7 @@
           <p:cNvPr id="6" name="Slide Number Placeholder 5">
             <a:extLst>
               <a:ext uri="{FF2B5EF4-FFF2-40B4-BE49-F238E27FC236}">
-                <a16:creationId xmlns:a16="http://schemas.microsoft.com/office/drawing/2014/main" xmlns="" id="{328E46F1-6445-82E9-D8EA-08312C82FEAD}"/>
+                <a16:creationId xmlns:a16="http://schemas.microsoft.com/office/drawing/2014/main" id="{328E46F1-6445-82E9-D8EA-08312C82FEAD}"/>
               </a:ext>
             </a:extLst>
           </p:cNvPr>
@@ -917,7 +928,7 @@
           <p:cNvPr id="2" name="Vertical Title 1">
             <a:extLst>
               <a:ext uri="{FF2B5EF4-FFF2-40B4-BE49-F238E27FC236}">
-                <a16:creationId xmlns:a16="http://schemas.microsoft.com/office/drawing/2014/main" xmlns="" id="{AEAA7C89-8CE2-5D35-3495-047CA3FC5B4A}"/>
+                <a16:creationId xmlns:a16="http://schemas.microsoft.com/office/drawing/2014/main" id="{AEAA7C89-8CE2-5D35-3495-047CA3FC5B4A}"/>
               </a:ext>
             </a:extLst>
           </p:cNvPr>
@@ -951,7 +962,7 @@
           <p:cNvPr id="3" name="Vertical Text Placeholder 2">
             <a:extLst>
               <a:ext uri="{FF2B5EF4-FFF2-40B4-BE49-F238E27FC236}">
-                <a16:creationId xmlns:a16="http://schemas.microsoft.com/office/drawing/2014/main" xmlns="" id="{89B9D066-3587-2D12-A5F5-A7C3F68C4E19}"/>
+                <a16:creationId xmlns:a16="http://schemas.microsoft.com/office/drawing/2014/main" id="{89B9D066-3587-2D12-A5F5-A7C3F68C4E19}"/>
               </a:ext>
             </a:extLst>
           </p:cNvPr>
@@ -1014,7 +1025,7 @@
           <p:cNvPr id="4" name="Date Placeholder 3">
             <a:extLst>
               <a:ext uri="{FF2B5EF4-FFF2-40B4-BE49-F238E27FC236}">
-                <a16:creationId xmlns:a16="http://schemas.microsoft.com/office/drawing/2014/main" xmlns="" id="{AB58E5C5-6769-9126-2E0F-3FB933002B34}"/>
+                <a16:creationId xmlns:a16="http://schemas.microsoft.com/office/drawing/2014/main" id="{AB58E5C5-6769-9126-2E0F-3FB933002B34}"/>
               </a:ext>
             </a:extLst>
           </p:cNvPr>
@@ -1032,7 +1043,7 @@
           <a:p>
             <a:fld id="{762A694A-4CD2-435A-9C19-498AACE9B7CE}" type="datetime1">
               <a:rPr lang="en-IN" smtClean="0"/>
-              <a:t>13-03-2026</a:t>
+              <a:t>15-03-2026</a:t>
             </a:fld>
             <a:endParaRPr lang="en-IN"/>
           </a:p>
@@ -1043,7 +1054,7 @@
           <p:cNvPr id="5" name="Footer Placeholder 4">
             <a:extLst>
               <a:ext uri="{FF2B5EF4-FFF2-40B4-BE49-F238E27FC236}">
-                <a16:creationId xmlns:a16="http://schemas.microsoft.com/office/drawing/2014/main" xmlns="" id="{F5F6B0E7-5DF9-11F1-3B40-72CF29CE2079}"/>
+                <a16:creationId xmlns:a16="http://schemas.microsoft.com/office/drawing/2014/main" id="{F5F6B0E7-5DF9-11F1-3B40-72CF29CE2079}"/>
               </a:ext>
             </a:extLst>
           </p:cNvPr>
@@ -1068,7 +1079,7 @@
           <p:cNvPr id="6" name="Slide Number Placeholder 5">
             <a:extLst>
               <a:ext uri="{FF2B5EF4-FFF2-40B4-BE49-F238E27FC236}">
-                <a16:creationId xmlns:a16="http://schemas.microsoft.com/office/drawing/2014/main" xmlns="" id="{ECBAC463-1A33-4D06-A923-EEF0DFFDA055}"/>
+                <a16:creationId xmlns:a16="http://schemas.microsoft.com/office/drawing/2014/main" id="{ECBAC463-1A33-4D06-A923-EEF0DFFDA055}"/>
               </a:ext>
             </a:extLst>
           </p:cNvPr>
@@ -1127,7 +1138,7 @@
           <p:cNvPr id="2" name="Title 1">
             <a:extLst>
               <a:ext uri="{FF2B5EF4-FFF2-40B4-BE49-F238E27FC236}">
-                <a16:creationId xmlns:a16="http://schemas.microsoft.com/office/drawing/2014/main" xmlns="" id="{6A87F3DE-B59B-D468-9D80-18B684922A3F}"/>
+                <a16:creationId xmlns:a16="http://schemas.microsoft.com/office/drawing/2014/main" id="{6A87F3DE-B59B-D468-9D80-18B684922A3F}"/>
               </a:ext>
             </a:extLst>
           </p:cNvPr>
@@ -1156,7 +1167,7 @@
           <p:cNvPr id="3" name="Content Placeholder 2">
             <a:extLst>
               <a:ext uri="{FF2B5EF4-FFF2-40B4-BE49-F238E27FC236}">
-                <a16:creationId xmlns:a16="http://schemas.microsoft.com/office/drawing/2014/main" xmlns="" id="{2536FB1B-46A5-EF58-62EF-4EE19809C55E}"/>
+                <a16:creationId xmlns:a16="http://schemas.microsoft.com/office/drawing/2014/main" id="{2536FB1B-46A5-EF58-62EF-4EE19809C55E}"/>
               </a:ext>
             </a:extLst>
           </p:cNvPr>
@@ -1214,7 +1225,7 @@
           <p:cNvPr id="4" name="Date Placeholder 3">
             <a:extLst>
               <a:ext uri="{FF2B5EF4-FFF2-40B4-BE49-F238E27FC236}">
-                <a16:creationId xmlns:a16="http://schemas.microsoft.com/office/drawing/2014/main" xmlns="" id="{781DC524-2CC0-2C3B-468E-C00BAB0B496B}"/>
+                <a16:creationId xmlns:a16="http://schemas.microsoft.com/office/drawing/2014/main" id="{781DC524-2CC0-2C3B-468E-C00BAB0B496B}"/>
               </a:ext>
             </a:extLst>
           </p:cNvPr>
@@ -1232,7 +1243,7 @@
           <a:p>
             <a:fld id="{D38B752C-4AF0-4EE9-85A1-B21DBD4BB89D}" type="datetime1">
               <a:rPr lang="en-IN" smtClean="0"/>
-              <a:t>13-03-2026</a:t>
+              <a:t>15-03-2026</a:t>
             </a:fld>
             <a:endParaRPr lang="en-IN"/>
           </a:p>
@@ -1243,7 +1254,7 @@
           <p:cNvPr id="5" name="Footer Placeholder 4">
             <a:extLst>
               <a:ext uri="{FF2B5EF4-FFF2-40B4-BE49-F238E27FC236}">
-                <a16:creationId xmlns:a16="http://schemas.microsoft.com/office/drawing/2014/main" xmlns="" id="{62948345-456C-AA05-A515-6BBBE7073043}"/>
+                <a16:creationId xmlns:a16="http://schemas.microsoft.com/office/drawing/2014/main" id="{62948345-456C-AA05-A515-6BBBE7073043}"/>
               </a:ext>
             </a:extLst>
           </p:cNvPr>
@@ -1268,7 +1279,7 @@
           <p:cNvPr id="6" name="Slide Number Placeholder 5">
             <a:extLst>
               <a:ext uri="{FF2B5EF4-FFF2-40B4-BE49-F238E27FC236}">
-                <a16:creationId xmlns:a16="http://schemas.microsoft.com/office/drawing/2014/main" xmlns="" id="{FF710BAF-1C8D-4F88-EE18-B453A45BAF14}"/>
+                <a16:creationId xmlns:a16="http://schemas.microsoft.com/office/drawing/2014/main" id="{FF710BAF-1C8D-4F88-EE18-B453A45BAF14}"/>
               </a:ext>
             </a:extLst>
           </p:cNvPr>
@@ -1327,7 +1338,7 @@
           <p:cNvPr id="2" name="Title 1">
             <a:extLst>
               <a:ext uri="{FF2B5EF4-FFF2-40B4-BE49-F238E27FC236}">
-                <a16:creationId xmlns:a16="http://schemas.microsoft.com/office/drawing/2014/main" xmlns="" id="{36575C42-DE78-53DD-136F-59150D2C653A}"/>
+                <a16:creationId xmlns:a16="http://schemas.microsoft.com/office/drawing/2014/main" id="{36575C42-DE78-53DD-136F-59150D2C653A}"/>
               </a:ext>
             </a:extLst>
           </p:cNvPr>
@@ -1365,7 +1376,7 @@
           <p:cNvPr id="3" name="Text Placeholder 2">
             <a:extLst>
               <a:ext uri="{FF2B5EF4-FFF2-40B4-BE49-F238E27FC236}">
-                <a16:creationId xmlns:a16="http://schemas.microsoft.com/office/drawing/2014/main" xmlns="" id="{2AC87743-2B36-0276-8A03-14CA76D61EEE}"/>
+                <a16:creationId xmlns:a16="http://schemas.microsoft.com/office/drawing/2014/main" id="{2AC87743-2B36-0276-8A03-14CA76D61EEE}"/>
               </a:ext>
             </a:extLst>
           </p:cNvPr>
@@ -1490,7 +1501,7 @@
           <p:cNvPr id="4" name="Date Placeholder 3">
             <a:extLst>
               <a:ext uri="{FF2B5EF4-FFF2-40B4-BE49-F238E27FC236}">
-                <a16:creationId xmlns:a16="http://schemas.microsoft.com/office/drawing/2014/main" xmlns="" id="{49A978D6-BCCB-1D2C-1000-2F87416356E2}"/>
+                <a16:creationId xmlns:a16="http://schemas.microsoft.com/office/drawing/2014/main" id="{49A978D6-BCCB-1D2C-1000-2F87416356E2}"/>
               </a:ext>
             </a:extLst>
           </p:cNvPr>
@@ -1508,7 +1519,7 @@
           <a:p>
             <a:fld id="{C154764F-6140-477F-A454-3F3D34240203}" type="datetime1">
               <a:rPr lang="en-IN" smtClean="0"/>
-              <a:t>13-03-2026</a:t>
+              <a:t>15-03-2026</a:t>
             </a:fld>
             <a:endParaRPr lang="en-IN"/>
           </a:p>
@@ -1519,7 +1530,7 @@
           <p:cNvPr id="5" name="Footer Placeholder 4">
             <a:extLst>
               <a:ext uri="{FF2B5EF4-FFF2-40B4-BE49-F238E27FC236}">
-                <a16:creationId xmlns:a16="http://schemas.microsoft.com/office/drawing/2014/main" xmlns="" id="{6543F681-E556-307C-D6ED-CAF356FC097A}"/>
+                <a16:creationId xmlns:a16="http://schemas.microsoft.com/office/drawing/2014/main" id="{6543F681-E556-307C-D6ED-CAF356FC097A}"/>
               </a:ext>
             </a:extLst>
           </p:cNvPr>
@@ -1544,7 +1555,7 @@
           <p:cNvPr id="6" name="Slide Number Placeholder 5">
             <a:extLst>
               <a:ext uri="{FF2B5EF4-FFF2-40B4-BE49-F238E27FC236}">
-                <a16:creationId xmlns:a16="http://schemas.microsoft.com/office/drawing/2014/main" xmlns="" id="{07A273AE-B717-C02D-3B1E-4E52D9152A76}"/>
+                <a16:creationId xmlns:a16="http://schemas.microsoft.com/office/drawing/2014/main" id="{07A273AE-B717-C02D-3B1E-4E52D9152A76}"/>
               </a:ext>
             </a:extLst>
           </p:cNvPr>
@@ -1603,7 +1614,7 @@
           <p:cNvPr id="2" name="Title 1">
             <a:extLst>
               <a:ext uri="{FF2B5EF4-FFF2-40B4-BE49-F238E27FC236}">
-                <a16:creationId xmlns:a16="http://schemas.microsoft.com/office/drawing/2014/main" xmlns="" id="{E6474996-C289-389A-E1BF-593A9F9A2CE3}"/>
+                <a16:creationId xmlns:a16="http://schemas.microsoft.com/office/drawing/2014/main" id="{E6474996-C289-389A-E1BF-593A9F9A2CE3}"/>
               </a:ext>
             </a:extLst>
           </p:cNvPr>
@@ -1632,7 +1643,7 @@
           <p:cNvPr id="3" name="Content Placeholder 2">
             <a:extLst>
               <a:ext uri="{FF2B5EF4-FFF2-40B4-BE49-F238E27FC236}">
-                <a16:creationId xmlns:a16="http://schemas.microsoft.com/office/drawing/2014/main" xmlns="" id="{864F42F4-E278-4791-D11E-FFDB59BAC3FD}"/>
+                <a16:creationId xmlns:a16="http://schemas.microsoft.com/office/drawing/2014/main" id="{864F42F4-E278-4791-D11E-FFDB59BAC3FD}"/>
               </a:ext>
             </a:extLst>
           </p:cNvPr>
@@ -1695,7 +1706,7 @@
           <p:cNvPr id="4" name="Content Placeholder 3">
             <a:extLst>
               <a:ext uri="{FF2B5EF4-FFF2-40B4-BE49-F238E27FC236}">
-                <a16:creationId xmlns:a16="http://schemas.microsoft.com/office/drawing/2014/main" xmlns="" id="{0C602B1C-B5A0-2501-9653-E3C494067CC0}"/>
+                <a16:creationId xmlns:a16="http://schemas.microsoft.com/office/drawing/2014/main" id="{0C602B1C-B5A0-2501-9653-E3C494067CC0}"/>
               </a:ext>
             </a:extLst>
           </p:cNvPr>
@@ -1758,7 +1769,7 @@
           <p:cNvPr id="5" name="Date Placeholder 4">
             <a:extLst>
               <a:ext uri="{FF2B5EF4-FFF2-40B4-BE49-F238E27FC236}">
-                <a16:creationId xmlns:a16="http://schemas.microsoft.com/office/drawing/2014/main" xmlns="" id="{37280B07-51FA-8E42-5C99-789AAE472F8B}"/>
+                <a16:creationId xmlns:a16="http://schemas.microsoft.com/office/drawing/2014/main" id="{37280B07-51FA-8E42-5C99-789AAE472F8B}"/>
               </a:ext>
             </a:extLst>
           </p:cNvPr>
@@ -1776,7 +1787,7 @@
           <a:p>
             <a:fld id="{F7603EA9-0FE1-428E-9BF1-E73FB25868B8}" type="datetime1">
               <a:rPr lang="en-IN" smtClean="0"/>
-              <a:t>13-03-2026</a:t>
+              <a:t>15-03-2026</a:t>
             </a:fld>
             <a:endParaRPr lang="en-IN"/>
           </a:p>
@@ -1787,7 +1798,7 @@
           <p:cNvPr id="6" name="Footer Placeholder 5">
             <a:extLst>
               <a:ext uri="{FF2B5EF4-FFF2-40B4-BE49-F238E27FC236}">
-                <a16:creationId xmlns:a16="http://schemas.microsoft.com/office/drawing/2014/main" xmlns="" id="{56160E67-BCB4-0616-FF48-767B266E384F}"/>
+                <a16:creationId xmlns:a16="http://schemas.microsoft.com/office/drawing/2014/main" id="{56160E67-BCB4-0616-FF48-767B266E384F}"/>
               </a:ext>
             </a:extLst>
           </p:cNvPr>
@@ -1812,7 +1823,7 @@
           <p:cNvPr id="7" name="Slide Number Placeholder 6">
             <a:extLst>
               <a:ext uri="{FF2B5EF4-FFF2-40B4-BE49-F238E27FC236}">
-                <a16:creationId xmlns:a16="http://schemas.microsoft.com/office/drawing/2014/main" xmlns="" id="{F1C220C6-19D8-2B09-1A2C-5F9BBEDB2474}"/>
+                <a16:creationId xmlns:a16="http://schemas.microsoft.com/office/drawing/2014/main" id="{F1C220C6-19D8-2B09-1A2C-5F9BBEDB2474}"/>
               </a:ext>
             </a:extLst>
           </p:cNvPr>
@@ -1871,7 +1882,7 @@
           <p:cNvPr id="2" name="Title 1">
             <a:extLst>
               <a:ext uri="{FF2B5EF4-FFF2-40B4-BE49-F238E27FC236}">
-                <a16:creationId xmlns:a16="http://schemas.microsoft.com/office/drawing/2014/main" xmlns="" id="{8A993533-9A0C-90D5-9AE1-7255BA0CADC7}"/>
+                <a16:creationId xmlns:a16="http://schemas.microsoft.com/office/drawing/2014/main" id="{8A993533-9A0C-90D5-9AE1-7255BA0CADC7}"/>
               </a:ext>
             </a:extLst>
           </p:cNvPr>
@@ -1905,7 +1916,7 @@
           <p:cNvPr id="3" name="Text Placeholder 2">
             <a:extLst>
               <a:ext uri="{FF2B5EF4-FFF2-40B4-BE49-F238E27FC236}">
-                <a16:creationId xmlns:a16="http://schemas.microsoft.com/office/drawing/2014/main" xmlns="" id="{28867A3E-DC49-CC48-9A4E-8117B9F7A9B9}"/>
+                <a16:creationId xmlns:a16="http://schemas.microsoft.com/office/drawing/2014/main" id="{28867A3E-DC49-CC48-9A4E-8117B9F7A9B9}"/>
               </a:ext>
             </a:extLst>
           </p:cNvPr>
@@ -1976,7 +1987,7 @@
           <p:cNvPr id="4" name="Content Placeholder 3">
             <a:extLst>
               <a:ext uri="{FF2B5EF4-FFF2-40B4-BE49-F238E27FC236}">
-                <a16:creationId xmlns:a16="http://schemas.microsoft.com/office/drawing/2014/main" xmlns="" id="{D31AB0ED-88D6-23A0-B987-115360EAB7C7}"/>
+                <a16:creationId xmlns:a16="http://schemas.microsoft.com/office/drawing/2014/main" id="{D31AB0ED-88D6-23A0-B987-115360EAB7C7}"/>
               </a:ext>
             </a:extLst>
           </p:cNvPr>
@@ -2039,7 +2050,7 @@
           <p:cNvPr id="5" name="Text Placeholder 4">
             <a:extLst>
               <a:ext uri="{FF2B5EF4-FFF2-40B4-BE49-F238E27FC236}">
-                <a16:creationId xmlns:a16="http://schemas.microsoft.com/office/drawing/2014/main" xmlns="" id="{EB3FF49D-ED16-AD66-B8C0-AFE8F7F50CB7}"/>
+                <a16:creationId xmlns:a16="http://schemas.microsoft.com/office/drawing/2014/main" id="{EB3FF49D-ED16-AD66-B8C0-AFE8F7F50CB7}"/>
               </a:ext>
             </a:extLst>
           </p:cNvPr>
@@ -2110,7 +2121,7 @@
           <p:cNvPr id="6" name="Content Placeholder 5">
             <a:extLst>
               <a:ext uri="{FF2B5EF4-FFF2-40B4-BE49-F238E27FC236}">
-                <a16:creationId xmlns:a16="http://schemas.microsoft.com/office/drawing/2014/main" xmlns="" id="{A98457AC-A7E4-0AE6-ED14-69450663685A}"/>
+                <a16:creationId xmlns:a16="http://schemas.microsoft.com/office/drawing/2014/main" id="{A98457AC-A7E4-0AE6-ED14-69450663685A}"/>
               </a:ext>
             </a:extLst>
           </p:cNvPr>
@@ -2173,7 +2184,7 @@
           <p:cNvPr id="7" name="Date Placeholder 6">
             <a:extLst>
               <a:ext uri="{FF2B5EF4-FFF2-40B4-BE49-F238E27FC236}">
-                <a16:creationId xmlns:a16="http://schemas.microsoft.com/office/drawing/2014/main" xmlns="" id="{91E65680-DD8E-F4B6-48D6-6204F84B0507}"/>
+                <a16:creationId xmlns:a16="http://schemas.microsoft.com/office/drawing/2014/main" id="{91E65680-DD8E-F4B6-48D6-6204F84B0507}"/>
               </a:ext>
             </a:extLst>
           </p:cNvPr>
@@ -2191,7 +2202,7 @@
           <a:p>
             <a:fld id="{9A7254DA-81CA-4C34-B4B9-ADBF13CF9A2F}" type="datetime1">
               <a:rPr lang="en-IN" smtClean="0"/>
-              <a:t>13-03-2026</a:t>
+              <a:t>15-03-2026</a:t>
             </a:fld>
             <a:endParaRPr lang="en-IN"/>
           </a:p>
@@ -2202,7 +2213,7 @@
           <p:cNvPr id="8" name="Footer Placeholder 7">
             <a:extLst>
               <a:ext uri="{FF2B5EF4-FFF2-40B4-BE49-F238E27FC236}">
-                <a16:creationId xmlns:a16="http://schemas.microsoft.com/office/drawing/2014/main" xmlns="" id="{8E29BC8F-3B36-BE43-ECE4-CB51B9A4ABCE}"/>
+                <a16:creationId xmlns:a16="http://schemas.microsoft.com/office/drawing/2014/main" id="{8E29BC8F-3B36-BE43-ECE4-CB51B9A4ABCE}"/>
               </a:ext>
             </a:extLst>
           </p:cNvPr>
@@ -2227,7 +2238,7 @@
           <p:cNvPr id="9" name="Slide Number Placeholder 8">
             <a:extLst>
               <a:ext uri="{FF2B5EF4-FFF2-40B4-BE49-F238E27FC236}">
-                <a16:creationId xmlns:a16="http://schemas.microsoft.com/office/drawing/2014/main" xmlns="" id="{FE0264F5-9736-4798-3017-0475404DD73C}"/>
+                <a16:creationId xmlns:a16="http://schemas.microsoft.com/office/drawing/2014/main" id="{FE0264F5-9736-4798-3017-0475404DD73C}"/>
               </a:ext>
             </a:extLst>
           </p:cNvPr>
@@ -2286,7 +2297,7 @@
           <p:cNvPr id="2" name="Title 1">
             <a:extLst>
               <a:ext uri="{FF2B5EF4-FFF2-40B4-BE49-F238E27FC236}">
-                <a16:creationId xmlns:a16="http://schemas.microsoft.com/office/drawing/2014/main" xmlns="" id="{1A36B4C6-CB9C-7951-EC6A-6DAAFA4EF98E}"/>
+                <a16:creationId xmlns:a16="http://schemas.microsoft.com/office/drawing/2014/main" id="{1A36B4C6-CB9C-7951-EC6A-6DAAFA4EF98E}"/>
               </a:ext>
             </a:extLst>
           </p:cNvPr>
@@ -2315,7 +2326,7 @@
           <p:cNvPr id="3" name="Date Placeholder 2">
             <a:extLst>
               <a:ext uri="{FF2B5EF4-FFF2-40B4-BE49-F238E27FC236}">
-                <a16:creationId xmlns:a16="http://schemas.microsoft.com/office/drawing/2014/main" xmlns="" id="{949F9303-4DB1-4B53-A9FC-C5CD38CA04F8}"/>
+                <a16:creationId xmlns:a16="http://schemas.microsoft.com/office/drawing/2014/main" id="{949F9303-4DB1-4B53-A9FC-C5CD38CA04F8}"/>
               </a:ext>
             </a:extLst>
           </p:cNvPr>
@@ -2333,7 +2344,7 @@
           <a:p>
             <a:fld id="{F89FEAE5-D506-44E3-BB60-DF7895F20BA2}" type="datetime1">
               <a:rPr lang="en-IN" smtClean="0"/>
-              <a:t>13-03-2026</a:t>
+              <a:t>15-03-2026</a:t>
             </a:fld>
             <a:endParaRPr lang="en-IN"/>
           </a:p>
@@ -2344,7 +2355,7 @@
           <p:cNvPr id="4" name="Footer Placeholder 3">
             <a:extLst>
               <a:ext uri="{FF2B5EF4-FFF2-40B4-BE49-F238E27FC236}">
-                <a16:creationId xmlns:a16="http://schemas.microsoft.com/office/drawing/2014/main" xmlns="" id="{FB5F2362-664B-0C06-E5D4-75987F639EF8}"/>
+                <a16:creationId xmlns:a16="http://schemas.microsoft.com/office/drawing/2014/main" id="{FB5F2362-664B-0C06-E5D4-75987F639EF8}"/>
               </a:ext>
             </a:extLst>
           </p:cNvPr>
@@ -2369,7 +2380,7 @@
           <p:cNvPr id="5" name="Slide Number Placeholder 4">
             <a:extLst>
               <a:ext uri="{FF2B5EF4-FFF2-40B4-BE49-F238E27FC236}">
-                <a16:creationId xmlns:a16="http://schemas.microsoft.com/office/drawing/2014/main" xmlns="" id="{E5F88BF8-5054-9233-20DB-F8BEDF491033}"/>
+                <a16:creationId xmlns:a16="http://schemas.microsoft.com/office/drawing/2014/main" id="{E5F88BF8-5054-9233-20DB-F8BEDF491033}"/>
               </a:ext>
             </a:extLst>
           </p:cNvPr>
@@ -2428,7 +2439,7 @@
           <p:cNvPr id="2" name="Date Placeholder 1">
             <a:extLst>
               <a:ext uri="{FF2B5EF4-FFF2-40B4-BE49-F238E27FC236}">
-                <a16:creationId xmlns:a16="http://schemas.microsoft.com/office/drawing/2014/main" xmlns="" id="{924FC4A0-0668-BC43-F708-FAFB42E4E30E}"/>
+                <a16:creationId xmlns:a16="http://schemas.microsoft.com/office/drawing/2014/main" id="{924FC4A0-0668-BC43-F708-FAFB42E4E30E}"/>
               </a:ext>
             </a:extLst>
           </p:cNvPr>
@@ -2446,7 +2457,7 @@
           <a:p>
             <a:fld id="{23560259-960B-47C1-AF74-DCE1C1EA7164}" type="datetime1">
               <a:rPr lang="en-IN" smtClean="0"/>
-              <a:t>13-03-2026</a:t>
+              <a:t>15-03-2026</a:t>
             </a:fld>
             <a:endParaRPr lang="en-IN"/>
           </a:p>
@@ -2457,7 +2468,7 @@
           <p:cNvPr id="3" name="Footer Placeholder 2">
             <a:extLst>
               <a:ext uri="{FF2B5EF4-FFF2-40B4-BE49-F238E27FC236}">
-                <a16:creationId xmlns:a16="http://schemas.microsoft.com/office/drawing/2014/main" xmlns="" id="{1EDA49F3-5429-910B-6CFD-64AADCD6CAE8}"/>
+                <a16:creationId xmlns:a16="http://schemas.microsoft.com/office/drawing/2014/main" id="{1EDA49F3-5429-910B-6CFD-64AADCD6CAE8}"/>
               </a:ext>
             </a:extLst>
           </p:cNvPr>
@@ -2482,7 +2493,7 @@
           <p:cNvPr id="4" name="Slide Number Placeholder 3">
             <a:extLst>
               <a:ext uri="{FF2B5EF4-FFF2-40B4-BE49-F238E27FC236}">
-                <a16:creationId xmlns:a16="http://schemas.microsoft.com/office/drawing/2014/main" xmlns="" id="{608F0B88-2976-620B-D8A7-6DE3CEB23C14}"/>
+                <a16:creationId xmlns:a16="http://schemas.microsoft.com/office/drawing/2014/main" id="{608F0B88-2976-620B-D8A7-6DE3CEB23C14}"/>
               </a:ext>
             </a:extLst>
           </p:cNvPr>
@@ -2541,7 +2552,7 @@
           <p:cNvPr id="2" name="Title 1">
             <a:extLst>
               <a:ext uri="{FF2B5EF4-FFF2-40B4-BE49-F238E27FC236}">
-                <a16:creationId xmlns:a16="http://schemas.microsoft.com/office/drawing/2014/main" xmlns="" id="{0E756615-122C-071B-9D07-CB565257AAFD}"/>
+                <a16:creationId xmlns:a16="http://schemas.microsoft.com/office/drawing/2014/main" id="{0E756615-122C-071B-9D07-CB565257AAFD}"/>
               </a:ext>
             </a:extLst>
           </p:cNvPr>
@@ -2579,7 +2590,7 @@
           <p:cNvPr id="3" name="Content Placeholder 2">
             <a:extLst>
               <a:ext uri="{FF2B5EF4-FFF2-40B4-BE49-F238E27FC236}">
-                <a16:creationId xmlns:a16="http://schemas.microsoft.com/office/drawing/2014/main" xmlns="" id="{43DD6A46-61CB-D8FA-5931-66EA08FF0624}"/>
+                <a16:creationId xmlns:a16="http://schemas.microsoft.com/office/drawing/2014/main" id="{43DD6A46-61CB-D8FA-5931-66EA08FF0624}"/>
               </a:ext>
             </a:extLst>
           </p:cNvPr>
@@ -2670,7 +2681,7 @@
           <p:cNvPr id="4" name="Text Placeholder 3">
             <a:extLst>
               <a:ext uri="{FF2B5EF4-FFF2-40B4-BE49-F238E27FC236}">
-                <a16:creationId xmlns:a16="http://schemas.microsoft.com/office/drawing/2014/main" xmlns="" id="{7014B0D0-3954-D9F2-C44D-74CEF4DD6B62}"/>
+                <a16:creationId xmlns:a16="http://schemas.microsoft.com/office/drawing/2014/main" id="{7014B0D0-3954-D9F2-C44D-74CEF4DD6B62}"/>
               </a:ext>
             </a:extLst>
           </p:cNvPr>
@@ -2741,7 +2752,7 @@
           <p:cNvPr id="5" name="Date Placeholder 4">
             <a:extLst>
               <a:ext uri="{FF2B5EF4-FFF2-40B4-BE49-F238E27FC236}">
-                <a16:creationId xmlns:a16="http://schemas.microsoft.com/office/drawing/2014/main" xmlns="" id="{FA3C5148-B824-70C1-8C2E-8D3374593BA8}"/>
+                <a16:creationId xmlns:a16="http://schemas.microsoft.com/office/drawing/2014/main" id="{FA3C5148-B824-70C1-8C2E-8D3374593BA8}"/>
               </a:ext>
             </a:extLst>
           </p:cNvPr>
@@ -2759,7 +2770,7 @@
           <a:p>
             <a:fld id="{AE49A713-0448-4F63-9C33-ED8C7BB35085}" type="datetime1">
               <a:rPr lang="en-IN" smtClean="0"/>
-              <a:t>13-03-2026</a:t>
+              <a:t>15-03-2026</a:t>
             </a:fld>
             <a:endParaRPr lang="en-IN"/>
           </a:p>
@@ -2770,7 +2781,7 @@
           <p:cNvPr id="6" name="Footer Placeholder 5">
             <a:extLst>
               <a:ext uri="{FF2B5EF4-FFF2-40B4-BE49-F238E27FC236}">
-                <a16:creationId xmlns:a16="http://schemas.microsoft.com/office/drawing/2014/main" xmlns="" id="{E9286C04-AE0C-1178-E2BF-1CB118617F1F}"/>
+                <a16:creationId xmlns:a16="http://schemas.microsoft.com/office/drawing/2014/main" id="{E9286C04-AE0C-1178-E2BF-1CB118617F1F}"/>
               </a:ext>
             </a:extLst>
           </p:cNvPr>
@@ -2795,7 +2806,7 @@
           <p:cNvPr id="7" name="Slide Number Placeholder 6">
             <a:extLst>
               <a:ext uri="{FF2B5EF4-FFF2-40B4-BE49-F238E27FC236}">
-                <a16:creationId xmlns:a16="http://schemas.microsoft.com/office/drawing/2014/main" xmlns="" id="{DBEE7EE5-815C-5D97-9429-D127432BF7EA}"/>
+                <a16:creationId xmlns:a16="http://schemas.microsoft.com/office/drawing/2014/main" id="{DBEE7EE5-815C-5D97-9429-D127432BF7EA}"/>
               </a:ext>
             </a:extLst>
           </p:cNvPr>
@@ -2854,7 +2865,7 @@
           <p:cNvPr id="2" name="Title 1">
             <a:extLst>
               <a:ext uri="{FF2B5EF4-FFF2-40B4-BE49-F238E27FC236}">
-                <a16:creationId xmlns:a16="http://schemas.microsoft.com/office/drawing/2014/main" xmlns="" id="{E8CC379A-7620-BB0F-FDFF-5F9F916F495E}"/>
+                <a16:creationId xmlns:a16="http://schemas.microsoft.com/office/drawing/2014/main" id="{E8CC379A-7620-BB0F-FDFF-5F9F916F495E}"/>
               </a:ext>
             </a:extLst>
           </p:cNvPr>
@@ -2892,7 +2903,7 @@
           <p:cNvPr id="3" name="Picture Placeholder 2">
             <a:extLst>
               <a:ext uri="{FF2B5EF4-FFF2-40B4-BE49-F238E27FC236}">
-                <a16:creationId xmlns:a16="http://schemas.microsoft.com/office/drawing/2014/main" xmlns="" id="{0A2450FC-E7A1-427A-25DD-8CFD6E6BA301}"/>
+                <a16:creationId xmlns:a16="http://schemas.microsoft.com/office/drawing/2014/main" id="{0A2450FC-E7A1-427A-25DD-8CFD6E6BA301}"/>
               </a:ext>
             </a:extLst>
           </p:cNvPr>
@@ -2959,7 +2970,7 @@
           <p:cNvPr id="4" name="Text Placeholder 3">
             <a:extLst>
               <a:ext uri="{FF2B5EF4-FFF2-40B4-BE49-F238E27FC236}">
-                <a16:creationId xmlns:a16="http://schemas.microsoft.com/office/drawing/2014/main" xmlns="" id="{555C33BA-FB99-F801-ECB9-00DD7F2F5C10}"/>
+                <a16:creationId xmlns:a16="http://schemas.microsoft.com/office/drawing/2014/main" id="{555C33BA-FB99-F801-ECB9-00DD7F2F5C10}"/>
               </a:ext>
             </a:extLst>
           </p:cNvPr>
@@ -3030,7 +3041,7 @@
           <p:cNvPr id="5" name="Date Placeholder 4">
             <a:extLst>
               <a:ext uri="{FF2B5EF4-FFF2-40B4-BE49-F238E27FC236}">
-                <a16:creationId xmlns:a16="http://schemas.microsoft.com/office/drawing/2014/main" xmlns="" id="{78179DE2-603C-C4A3-DCDE-95501EBCAB1C}"/>
+                <a16:creationId xmlns:a16="http://schemas.microsoft.com/office/drawing/2014/main" id="{78179DE2-603C-C4A3-DCDE-95501EBCAB1C}"/>
               </a:ext>
             </a:extLst>
           </p:cNvPr>
@@ -3048,7 +3059,7 @@
           <a:p>
             <a:fld id="{2B27E8E8-5B35-4CF3-A0F2-3702D3D28B0C}" type="datetime1">
               <a:rPr lang="en-IN" smtClean="0"/>
-              <a:t>13-03-2026</a:t>
+              <a:t>15-03-2026</a:t>
             </a:fld>
             <a:endParaRPr lang="en-IN"/>
           </a:p>
@@ -3059,7 +3070,7 @@
           <p:cNvPr id="6" name="Footer Placeholder 5">
             <a:extLst>
               <a:ext uri="{FF2B5EF4-FFF2-40B4-BE49-F238E27FC236}">
-                <a16:creationId xmlns:a16="http://schemas.microsoft.com/office/drawing/2014/main" xmlns="" id="{10793BAF-054D-5120-C069-204453823E54}"/>
+                <a16:creationId xmlns:a16="http://schemas.microsoft.com/office/drawing/2014/main" id="{10793BAF-054D-5120-C069-204453823E54}"/>
               </a:ext>
             </a:extLst>
           </p:cNvPr>
@@ -3084,7 +3095,7 @@
           <p:cNvPr id="7" name="Slide Number Placeholder 6">
             <a:extLst>
               <a:ext uri="{FF2B5EF4-FFF2-40B4-BE49-F238E27FC236}">
-                <a16:creationId xmlns:a16="http://schemas.microsoft.com/office/drawing/2014/main" xmlns="" id="{662A7752-D2C5-1C0F-0B4C-0B60089A91B7}"/>
+                <a16:creationId xmlns:a16="http://schemas.microsoft.com/office/drawing/2014/main" id="{662A7752-D2C5-1C0F-0B4C-0B60089A91B7}"/>
               </a:ext>
             </a:extLst>
           </p:cNvPr>
@@ -3148,7 +3159,7 @@
           <p:cNvPr id="2" name="Title Placeholder 1">
             <a:extLst>
               <a:ext uri="{FF2B5EF4-FFF2-40B4-BE49-F238E27FC236}">
-                <a16:creationId xmlns:a16="http://schemas.microsoft.com/office/drawing/2014/main" xmlns="" id="{DB9A1504-9D04-CA0B-0E4B-102DECCD9527}"/>
+                <a16:creationId xmlns:a16="http://schemas.microsoft.com/office/drawing/2014/main" id="{DB9A1504-9D04-CA0B-0E4B-102DECCD9527}"/>
               </a:ext>
             </a:extLst>
           </p:cNvPr>
@@ -3187,7 +3198,7 @@
           <p:cNvPr id="3" name="Text Placeholder 2">
             <a:extLst>
               <a:ext uri="{FF2B5EF4-FFF2-40B4-BE49-F238E27FC236}">
-                <a16:creationId xmlns:a16="http://schemas.microsoft.com/office/drawing/2014/main" xmlns="" id="{C93E0B7B-794B-93E1-8EA3-9BAD670487F1}"/>
+                <a16:creationId xmlns:a16="http://schemas.microsoft.com/office/drawing/2014/main" id="{C93E0B7B-794B-93E1-8EA3-9BAD670487F1}"/>
               </a:ext>
             </a:extLst>
           </p:cNvPr>
@@ -3255,7 +3266,7 @@
           <p:cNvPr id="4" name="Date Placeholder 3">
             <a:extLst>
               <a:ext uri="{FF2B5EF4-FFF2-40B4-BE49-F238E27FC236}">
-                <a16:creationId xmlns:a16="http://schemas.microsoft.com/office/drawing/2014/main" xmlns="" id="{FF12337F-45D4-4479-7099-024B6F16E4E9}"/>
+                <a16:creationId xmlns:a16="http://schemas.microsoft.com/office/drawing/2014/main" id="{FF12337F-45D4-4479-7099-024B6F16E4E9}"/>
               </a:ext>
             </a:extLst>
           </p:cNvPr>
@@ -3291,7 +3302,7 @@
           <a:p>
             <a:fld id="{CCDA840D-BDC6-494C-91E1-A142606BF42F}" type="datetime1">
               <a:rPr lang="en-IN" smtClean="0"/>
-              <a:t>13-03-2026</a:t>
+              <a:t>15-03-2026</a:t>
             </a:fld>
             <a:endParaRPr lang="en-IN"/>
           </a:p>
@@ -3302,7 +3313,7 @@
           <p:cNvPr id="5" name="Footer Placeholder 4">
             <a:extLst>
               <a:ext uri="{FF2B5EF4-FFF2-40B4-BE49-F238E27FC236}">
-                <a16:creationId xmlns:a16="http://schemas.microsoft.com/office/drawing/2014/main" xmlns="" id="{06DBFC6F-C109-61BA-DCDD-A4026C5E7CD5}"/>
+                <a16:creationId xmlns:a16="http://schemas.microsoft.com/office/drawing/2014/main" id="{06DBFC6F-C109-61BA-DCDD-A4026C5E7CD5}"/>
               </a:ext>
             </a:extLst>
           </p:cNvPr>
@@ -3345,7 +3356,7 @@
           <p:cNvPr id="6" name="Slide Number Placeholder 5">
             <a:extLst>
               <a:ext uri="{FF2B5EF4-FFF2-40B4-BE49-F238E27FC236}">
-                <a16:creationId xmlns:a16="http://schemas.microsoft.com/office/drawing/2014/main" xmlns="" id="{4BE14C3E-C350-8990-463F-4B808583741B}"/>
+                <a16:creationId xmlns:a16="http://schemas.microsoft.com/office/drawing/2014/main" id="{4BE14C3E-C350-8990-463F-4B808583741B}"/>
               </a:ext>
             </a:extLst>
           </p:cNvPr>
@@ -3722,10 +3733,10 @@
           <p:cNvPr id="16" name="Rectangle 15">
             <a:extLst>
               <a:ext uri="{FF2B5EF4-FFF2-40B4-BE49-F238E27FC236}">
-                <a16:creationId xmlns:a16="http://schemas.microsoft.com/office/drawing/2014/main" xmlns="" id="{D1942232-83D0-49E2-AF9B-1F97E3C1EF8E}"/>
+                <a16:creationId xmlns:a16="http://schemas.microsoft.com/office/drawing/2014/main" id="{D1942232-83D0-49E2-AF9B-1F97E3C1EF8E}"/>
               </a:ext>
               <a:ext uri="{C183D7F6-B498-43B3-948B-1728B52AA6E4}">
-                <adec:decorative xmlns:adec="http://schemas.microsoft.com/office/drawing/2017/decorative" xmlns="" val="1"/>
+                <adec:decorative xmlns:adec="http://schemas.microsoft.com/office/drawing/2017/decorative" val="1"/>
               </a:ext>
             </a:extLst>
           </p:cNvPr>
@@ -3735,7 +3746,7 @@
           <p:nvPr>
             <p:extLst>
               <p:ext uri="{386F3935-93C4-4BCD-93E2-E3B085C9AB24}">
-                <p16:designElem xmlns:p16="http://schemas.microsoft.com/office/powerpoint/2015/main" xmlns="" val="1"/>
+                <p16:designElem xmlns:p16="http://schemas.microsoft.com/office/powerpoint/2015/main" val="1"/>
               </p:ext>
             </p:extLst>
           </p:nvPr>
@@ -3782,10 +3793,10 @@
           <p:cNvPr id="18" name="Rectangle 17">
             <a:extLst>
               <a:ext uri="{FF2B5EF4-FFF2-40B4-BE49-F238E27FC236}">
-                <a16:creationId xmlns:a16="http://schemas.microsoft.com/office/drawing/2014/main" xmlns="" id="{E9E70D72-6E23-4015-A4A6-85C120C19167}"/>
+                <a16:creationId xmlns:a16="http://schemas.microsoft.com/office/drawing/2014/main" id="{E9E70D72-6E23-4015-A4A6-85C120C19167}"/>
               </a:ext>
               <a:ext uri="{C183D7F6-B498-43B3-948B-1728B52AA6E4}">
-                <adec:decorative xmlns:adec="http://schemas.microsoft.com/office/drawing/2017/decorative" xmlns="" val="1"/>
+                <adec:decorative xmlns:adec="http://schemas.microsoft.com/office/drawing/2017/decorative" val="1"/>
               </a:ext>
             </a:extLst>
           </p:cNvPr>
@@ -3795,7 +3806,7 @@
           <p:nvPr>
             <p:extLst>
               <p:ext uri="{386F3935-93C4-4BCD-93E2-E3B085C9AB24}">
-                <p16:designElem xmlns:p16="http://schemas.microsoft.com/office/powerpoint/2015/main" xmlns="" val="1"/>
+                <p16:designElem xmlns:p16="http://schemas.microsoft.com/office/powerpoint/2015/main" val="1"/>
               </p:ext>
             </p:extLst>
           </p:nvPr>
@@ -3845,7 +3856,7 @@
           <p:cNvPr id="3" name="TextBox 2">
             <a:extLst>
               <a:ext uri="{FF2B5EF4-FFF2-40B4-BE49-F238E27FC236}">
-                <a16:creationId xmlns:a16="http://schemas.microsoft.com/office/drawing/2014/main" xmlns="" id="{31AE5121-AEBF-F1E8-8A0C-1B576693E7BA}"/>
+                <a16:creationId xmlns:a16="http://schemas.microsoft.com/office/drawing/2014/main" id="{31AE5121-AEBF-F1E8-8A0C-1B576693E7BA}"/>
               </a:ext>
             </a:extLst>
           </p:cNvPr>
@@ -3897,10 +3908,10 @@
           <p:cNvPr id="20" name="Group 19">
             <a:extLst>
               <a:ext uri="{FF2B5EF4-FFF2-40B4-BE49-F238E27FC236}">
-                <a16:creationId xmlns:a16="http://schemas.microsoft.com/office/drawing/2014/main" xmlns="" id="{C28A977F-B603-4D81-B0FC-C8DE048A7931}"/>
+                <a16:creationId xmlns:a16="http://schemas.microsoft.com/office/drawing/2014/main" id="{C28A977F-B603-4D81-B0FC-C8DE048A7931}"/>
               </a:ext>
               <a:ext uri="{C183D7F6-B498-43B3-948B-1728B52AA6E4}">
-                <adec:decorative xmlns:adec="http://schemas.microsoft.com/office/drawing/2017/decorative" xmlns="" val="1"/>
+                <adec:decorative xmlns:adec="http://schemas.microsoft.com/office/drawing/2017/decorative" val="1"/>
               </a:ext>
             </a:extLst>
           </p:cNvPr>
@@ -3910,7 +3921,7 @@
           <p:nvPr>
             <p:extLst>
               <p:ext uri="{386F3935-93C4-4BCD-93E2-E3B085C9AB24}">
-                <p16:designElem xmlns:p16="http://schemas.microsoft.com/office/powerpoint/2015/main" xmlns="" val="1"/>
+                <p16:designElem xmlns:p16="http://schemas.microsoft.com/office/powerpoint/2015/main" val="1"/>
               </p:ext>
             </p:extLst>
           </p:nvPr>
@@ -3928,10 +3939,10 @@
             <p:cNvPr id="21" name="Freeform: Shape 20">
               <a:extLst>
                 <a:ext uri="{FF2B5EF4-FFF2-40B4-BE49-F238E27FC236}">
-                  <a16:creationId xmlns:a16="http://schemas.microsoft.com/office/drawing/2014/main" xmlns="" id="{0183CE8C-E039-4B2F-A36E-5FD5CD5DE190}"/>
+                  <a16:creationId xmlns:a16="http://schemas.microsoft.com/office/drawing/2014/main" id="{0183CE8C-E039-4B2F-A36E-5FD5CD5DE190}"/>
                 </a:ext>
                 <a:ext uri="{C183D7F6-B498-43B3-948B-1728B52AA6E4}">
-                  <adec:decorative xmlns:adec="http://schemas.microsoft.com/office/drawing/2017/decorative" xmlns="" val="1"/>
+                  <adec:decorative xmlns:adec="http://schemas.microsoft.com/office/drawing/2017/decorative" val="1"/>
                 </a:ext>
               </a:extLst>
             </p:cNvPr>
@@ -3939,7 +3950,7 @@
             <p:nvPr>
               <p:extLst>
                 <p:ext uri="{386F3935-93C4-4BCD-93E2-E3B085C9AB24}">
-                  <p16:designElem xmlns:p16="http://schemas.microsoft.com/office/powerpoint/2015/main" xmlns="" val="1"/>
+                  <p16:designElem xmlns:p16="http://schemas.microsoft.com/office/powerpoint/2015/main" val="1"/>
                 </p:ext>
               </p:extLst>
             </p:nvPr>
@@ -4140,10 +4151,10 @@
             <p:cNvPr id="22" name="Freeform: Shape 21">
               <a:extLst>
                 <a:ext uri="{FF2B5EF4-FFF2-40B4-BE49-F238E27FC236}">
-                  <a16:creationId xmlns:a16="http://schemas.microsoft.com/office/drawing/2014/main" xmlns="" id="{3EB77281-FAB4-40D0-B3F3-264EC4AB202F}"/>
+                  <a16:creationId xmlns:a16="http://schemas.microsoft.com/office/drawing/2014/main" id="{3EB77281-FAB4-40D0-B3F3-264EC4AB202F}"/>
                 </a:ext>
                 <a:ext uri="{C183D7F6-B498-43B3-948B-1728B52AA6E4}">
-                  <adec:decorative xmlns:adec="http://schemas.microsoft.com/office/drawing/2017/decorative" xmlns="" val="1"/>
+                  <adec:decorative xmlns:adec="http://schemas.microsoft.com/office/drawing/2017/decorative" val="1"/>
                 </a:ext>
               </a:extLst>
             </p:cNvPr>
@@ -4151,7 +4162,7 @@
             <p:nvPr>
               <p:extLst>
                 <p:ext uri="{386F3935-93C4-4BCD-93E2-E3B085C9AB24}">
-                  <p16:designElem xmlns:p16="http://schemas.microsoft.com/office/powerpoint/2015/main" xmlns="" val="1"/>
+                  <p16:designElem xmlns:p16="http://schemas.microsoft.com/office/powerpoint/2015/main" val="1"/>
                 </p:ext>
               </p:extLst>
             </p:nvPr>
@@ -4352,10 +4363,10 @@
             <p:cNvPr id="23" name="Freeform: Shape 22">
               <a:extLst>
                 <a:ext uri="{FF2B5EF4-FFF2-40B4-BE49-F238E27FC236}">
-                  <a16:creationId xmlns:a16="http://schemas.microsoft.com/office/drawing/2014/main" xmlns="" id="{815E59F3-75FC-494F-8737-5F00A4964FE1}"/>
+                  <a16:creationId xmlns:a16="http://schemas.microsoft.com/office/drawing/2014/main" id="{815E59F3-75FC-494F-8737-5F00A4964FE1}"/>
                 </a:ext>
                 <a:ext uri="{C183D7F6-B498-43B3-948B-1728B52AA6E4}">
-                  <adec:decorative xmlns:adec="http://schemas.microsoft.com/office/drawing/2017/decorative" xmlns="" val="1"/>
+                  <adec:decorative xmlns:adec="http://schemas.microsoft.com/office/drawing/2017/decorative" val="1"/>
                 </a:ext>
               </a:extLst>
             </p:cNvPr>
@@ -4363,7 +4374,7 @@
             <p:nvPr>
               <p:extLst>
                 <p:ext uri="{386F3935-93C4-4BCD-93E2-E3B085C9AB24}">
-                  <p16:designElem xmlns:p16="http://schemas.microsoft.com/office/powerpoint/2015/main" xmlns="" val="1"/>
+                  <p16:designElem xmlns:p16="http://schemas.microsoft.com/office/powerpoint/2015/main" val="1"/>
                 </p:ext>
               </p:extLst>
             </p:nvPr>
@@ -4674,10 +4685,10 @@
             <p:cNvPr id="24" name="Freeform: Shape 23">
               <a:extLst>
                 <a:ext uri="{FF2B5EF4-FFF2-40B4-BE49-F238E27FC236}">
-                  <a16:creationId xmlns:a16="http://schemas.microsoft.com/office/drawing/2014/main" xmlns="" id="{43ADDCFA-B066-4D79-AB71-062E66E58FEE}"/>
+                  <a16:creationId xmlns:a16="http://schemas.microsoft.com/office/drawing/2014/main" id="{43ADDCFA-B066-4D79-AB71-062E66E58FEE}"/>
                 </a:ext>
                 <a:ext uri="{C183D7F6-B498-43B3-948B-1728B52AA6E4}">
-                  <adec:decorative xmlns:adec="http://schemas.microsoft.com/office/drawing/2017/decorative" xmlns="" val="1"/>
+                  <adec:decorative xmlns:adec="http://schemas.microsoft.com/office/drawing/2017/decorative" val="1"/>
                 </a:ext>
               </a:extLst>
             </p:cNvPr>
@@ -4685,7 +4696,7 @@
             <p:nvPr>
               <p:extLst>
                 <p:ext uri="{386F3935-93C4-4BCD-93E2-E3B085C9AB24}">
-                  <p16:designElem xmlns:p16="http://schemas.microsoft.com/office/powerpoint/2015/main" xmlns="" val="1"/>
+                  <p16:designElem xmlns:p16="http://schemas.microsoft.com/office/powerpoint/2015/main" val="1"/>
                 </p:ext>
               </p:extLst>
             </p:nvPr>
@@ -5153,7 +5164,7 @@
           <p:cNvPr id="11" name="Picture 10" descr="A close-up of a logo&#10;&#10;AI-generated content may be incorrect.">
             <a:extLst>
               <a:ext uri="{FF2B5EF4-FFF2-40B4-BE49-F238E27FC236}">
-                <a16:creationId xmlns:a16="http://schemas.microsoft.com/office/drawing/2014/main" xmlns="" id="{02F6A545-7889-EE7D-B819-8344E089B4A1}"/>
+                <a16:creationId xmlns:a16="http://schemas.microsoft.com/office/drawing/2014/main" id="{02F6A545-7889-EE7D-B819-8344E089B4A1}"/>
               </a:ext>
             </a:extLst>
           </p:cNvPr>
@@ -5189,7 +5200,7 @@
           <p:cNvPr id="8" name="TextBox 7">
             <a:extLst>
               <a:ext uri="{FF2B5EF4-FFF2-40B4-BE49-F238E27FC236}">
-                <a16:creationId xmlns:a16="http://schemas.microsoft.com/office/drawing/2014/main" xmlns="" id="{A6B5146A-EBD6-B1B2-C76F-054DAC334AA2}"/>
+                <a16:creationId xmlns:a16="http://schemas.microsoft.com/office/drawing/2014/main" id="{A6B5146A-EBD6-B1B2-C76F-054DAC334AA2}"/>
               </a:ext>
             </a:extLst>
           </p:cNvPr>
@@ -5355,7 +5366,7 @@
           <p:cNvPr id="4" name="Slide Number Placeholder 3">
             <a:extLst>
               <a:ext uri="{FF2B5EF4-FFF2-40B4-BE49-F238E27FC236}">
-                <a16:creationId xmlns:a16="http://schemas.microsoft.com/office/drawing/2014/main" xmlns="" id="{F7AEED24-D842-C3E8-2E3F-564DB8F6E8D2}"/>
+                <a16:creationId xmlns:a16="http://schemas.microsoft.com/office/drawing/2014/main" id="{F7AEED24-D842-C3E8-2E3F-564DB8F6E8D2}"/>
               </a:ext>
             </a:extLst>
           </p:cNvPr>
@@ -5401,10 +5412,10 @@
           <p:cNvPr id="26" name="Group 25">
             <a:extLst>
               <a:ext uri="{FF2B5EF4-FFF2-40B4-BE49-F238E27FC236}">
-                <a16:creationId xmlns:a16="http://schemas.microsoft.com/office/drawing/2014/main" xmlns="" id="{C78D9229-E61D-4FEE-8321-2F8B64A8CADF}"/>
+                <a16:creationId xmlns:a16="http://schemas.microsoft.com/office/drawing/2014/main" id="{C78D9229-E61D-4FEE-8321-2F8B64A8CADF}"/>
               </a:ext>
               <a:ext uri="{C183D7F6-B498-43B3-948B-1728B52AA6E4}">
-                <adec:decorative xmlns:adec="http://schemas.microsoft.com/office/drawing/2017/decorative" xmlns="" val="1"/>
+                <adec:decorative xmlns:adec="http://schemas.microsoft.com/office/drawing/2017/decorative" val="1"/>
               </a:ext>
             </a:extLst>
           </p:cNvPr>
@@ -5414,7 +5425,7 @@
           <p:nvPr>
             <p:extLst>
               <p:ext uri="{386F3935-93C4-4BCD-93E2-E3B085C9AB24}">
-                <p16:designElem xmlns:p16="http://schemas.microsoft.com/office/powerpoint/2015/main" xmlns="" val="1"/>
+                <p16:designElem xmlns:p16="http://schemas.microsoft.com/office/powerpoint/2015/main" val="1"/>
               </p:ext>
             </p:extLst>
           </p:nvPr>
@@ -5432,10 +5443,10 @@
             <p:cNvPr id="27" name="Freeform: Shape 26">
               <a:extLst>
                 <a:ext uri="{FF2B5EF4-FFF2-40B4-BE49-F238E27FC236}">
-                  <a16:creationId xmlns:a16="http://schemas.microsoft.com/office/drawing/2014/main" xmlns="" id="{1FDD3CCB-26A3-4D79-AEB6-7A60CF980DC2}"/>
+                  <a16:creationId xmlns:a16="http://schemas.microsoft.com/office/drawing/2014/main" id="{1FDD3CCB-26A3-4D79-AEB6-7A60CF980DC2}"/>
                 </a:ext>
                 <a:ext uri="{C183D7F6-B498-43B3-948B-1728B52AA6E4}">
-                  <adec:decorative xmlns:adec="http://schemas.microsoft.com/office/drawing/2017/decorative" xmlns="" val="1"/>
+                  <adec:decorative xmlns:adec="http://schemas.microsoft.com/office/drawing/2017/decorative" val="1"/>
                 </a:ext>
               </a:extLst>
             </p:cNvPr>
@@ -5443,7 +5454,7 @@
             <p:nvPr>
               <p:extLst>
                 <p:ext uri="{386F3935-93C4-4BCD-93E2-E3B085C9AB24}">
-                  <p16:designElem xmlns:p16="http://schemas.microsoft.com/office/powerpoint/2015/main" xmlns="" val="1"/>
+                  <p16:designElem xmlns:p16="http://schemas.microsoft.com/office/powerpoint/2015/main" val="1"/>
                 </p:ext>
               </p:extLst>
             </p:nvPr>
@@ -5830,10 +5841,10 @@
             <p:cNvPr id="28" name="Freeform: Shape 27">
               <a:extLst>
                 <a:ext uri="{FF2B5EF4-FFF2-40B4-BE49-F238E27FC236}">
-                  <a16:creationId xmlns:a16="http://schemas.microsoft.com/office/drawing/2014/main" xmlns="" id="{E9AC4470-5113-4709-B29F-CDB937F2545C}"/>
+                  <a16:creationId xmlns:a16="http://schemas.microsoft.com/office/drawing/2014/main" id="{E9AC4470-5113-4709-B29F-CDB937F2545C}"/>
                 </a:ext>
                 <a:ext uri="{C183D7F6-B498-43B3-948B-1728B52AA6E4}">
-                  <adec:decorative xmlns:adec="http://schemas.microsoft.com/office/drawing/2017/decorative" xmlns="" val="1"/>
+                  <adec:decorative xmlns:adec="http://schemas.microsoft.com/office/drawing/2017/decorative" val="1"/>
                 </a:ext>
               </a:extLst>
             </p:cNvPr>
@@ -5841,7 +5852,7 @@
             <p:nvPr>
               <p:extLst>
                 <p:ext uri="{386F3935-93C4-4BCD-93E2-E3B085C9AB24}">
-                  <p16:designElem xmlns:p16="http://schemas.microsoft.com/office/powerpoint/2015/main" xmlns="" val="1"/>
+                  <p16:designElem xmlns:p16="http://schemas.microsoft.com/office/powerpoint/2015/main" val="1"/>
                 </p:ext>
               </p:extLst>
             </p:nvPr>
@@ -6022,10 +6033,10 @@
             <p:cNvPr id="29" name="Freeform: Shape 28">
               <a:extLst>
                 <a:ext uri="{FF2B5EF4-FFF2-40B4-BE49-F238E27FC236}">
-                  <a16:creationId xmlns:a16="http://schemas.microsoft.com/office/drawing/2014/main" xmlns="" id="{3E0D146C-9DAB-421E-AE88-5F854BF3F7E5}"/>
+                  <a16:creationId xmlns:a16="http://schemas.microsoft.com/office/drawing/2014/main" id="{3E0D146C-9DAB-421E-AE88-5F854BF3F7E5}"/>
                 </a:ext>
                 <a:ext uri="{C183D7F6-B498-43B3-948B-1728B52AA6E4}">
-                  <adec:decorative xmlns:adec="http://schemas.microsoft.com/office/drawing/2017/decorative" xmlns="" val="1"/>
+                  <adec:decorative xmlns:adec="http://schemas.microsoft.com/office/drawing/2017/decorative" val="1"/>
                 </a:ext>
               </a:extLst>
             </p:cNvPr>
@@ -6033,7 +6044,7 @@
             <p:nvPr>
               <p:extLst>
                 <p:ext uri="{386F3935-93C4-4BCD-93E2-E3B085C9AB24}">
-                  <p16:designElem xmlns:p16="http://schemas.microsoft.com/office/powerpoint/2015/main" xmlns="" val="1"/>
+                  <p16:designElem xmlns:p16="http://schemas.microsoft.com/office/powerpoint/2015/main" val="1"/>
                 </p:ext>
               </p:extLst>
             </p:nvPr>
@@ -6276,10 +6287,10 @@
             <p:cNvPr id="30" name="Freeform: Shape 29">
               <a:extLst>
                 <a:ext uri="{FF2B5EF4-FFF2-40B4-BE49-F238E27FC236}">
-                  <a16:creationId xmlns:a16="http://schemas.microsoft.com/office/drawing/2014/main" xmlns="" id="{12EB32A5-4408-4F6C-84B2-F9A908237A6D}"/>
+                  <a16:creationId xmlns:a16="http://schemas.microsoft.com/office/drawing/2014/main" id="{12EB32A5-4408-4F6C-84B2-F9A908237A6D}"/>
                 </a:ext>
                 <a:ext uri="{C183D7F6-B498-43B3-948B-1728B52AA6E4}">
-                  <adec:decorative xmlns:adec="http://schemas.microsoft.com/office/drawing/2017/decorative" xmlns="" val="1"/>
+                  <adec:decorative xmlns:adec="http://schemas.microsoft.com/office/drawing/2017/decorative" val="1"/>
                 </a:ext>
               </a:extLst>
             </p:cNvPr>
@@ -6287,7 +6298,7 @@
             <p:nvPr>
               <p:extLst>
                 <p:ext uri="{386F3935-93C4-4BCD-93E2-E3B085C9AB24}">
-                  <p16:designElem xmlns:p16="http://schemas.microsoft.com/office/powerpoint/2015/main" xmlns="" val="1"/>
+                  <p16:designElem xmlns:p16="http://schemas.microsoft.com/office/powerpoint/2015/main" val="1"/>
                 </p:ext>
               </p:extLst>
             </p:nvPr>
@@ -6469,7 +6480,7 @@
           <p:cNvPr id="6" name="Picture 5" descr="A hands holding a light bulb&#10;&#10;AI-generated content may be incorrect.">
             <a:extLst>
               <a:ext uri="{FF2B5EF4-FFF2-40B4-BE49-F238E27FC236}">
-                <a16:creationId xmlns:a16="http://schemas.microsoft.com/office/drawing/2014/main" xmlns="" id="{9F52A71C-44A3-2F37-D0DE-AAB637FE9CCD}"/>
+                <a16:creationId xmlns:a16="http://schemas.microsoft.com/office/drawing/2014/main" id="{9F52A71C-44A3-2F37-D0DE-AAB637FE9CCD}"/>
               </a:ext>
             </a:extLst>
           </p:cNvPr>
@@ -6529,7 +6540,7 @@
         <p:cNvPr id="1" name="">
           <a:extLst>
             <a:ext uri="{FF2B5EF4-FFF2-40B4-BE49-F238E27FC236}">
-              <a16:creationId xmlns:a16="http://schemas.microsoft.com/office/drawing/2014/main" xmlns="" id="{A80BB20B-F698-9029-3C89-1809ECA981B4}"/>
+              <a16:creationId xmlns:a16="http://schemas.microsoft.com/office/drawing/2014/main" id="{A80BB20B-F698-9029-3C89-1809ECA981B4}"/>
             </a:ext>
           </a:extLst>
         </p:cNvPr>
@@ -6549,10 +6560,10 @@
           <p:cNvPr id="16" name="Rectangle 15">
             <a:extLst>
               <a:ext uri="{FF2B5EF4-FFF2-40B4-BE49-F238E27FC236}">
-                <a16:creationId xmlns:a16="http://schemas.microsoft.com/office/drawing/2014/main" xmlns="" id="{3C78AD1F-4F7B-81CC-FEBE-4670D5A43ACE}"/>
+                <a16:creationId xmlns:a16="http://schemas.microsoft.com/office/drawing/2014/main" id="{3C78AD1F-4F7B-81CC-FEBE-4670D5A43ACE}"/>
               </a:ext>
               <a:ext uri="{C183D7F6-B498-43B3-948B-1728B52AA6E4}">
-                <adec:decorative xmlns:adec="http://schemas.microsoft.com/office/drawing/2017/decorative" xmlns="" val="1"/>
+                <adec:decorative xmlns:adec="http://schemas.microsoft.com/office/drawing/2017/decorative" val="1"/>
               </a:ext>
             </a:extLst>
           </p:cNvPr>
@@ -6562,7 +6573,7 @@
           <p:nvPr>
             <p:extLst>
               <p:ext uri="{386F3935-93C4-4BCD-93E2-E3B085C9AB24}">
-                <p16:designElem xmlns:p16="http://schemas.microsoft.com/office/powerpoint/2015/main" xmlns="" val="1"/>
+                <p16:designElem xmlns:p16="http://schemas.microsoft.com/office/powerpoint/2015/main" val="1"/>
               </p:ext>
             </p:extLst>
           </p:nvPr>
@@ -6609,10 +6620,10 @@
           <p:cNvPr id="18" name="Rectangle 17">
             <a:extLst>
               <a:ext uri="{FF2B5EF4-FFF2-40B4-BE49-F238E27FC236}">
-                <a16:creationId xmlns:a16="http://schemas.microsoft.com/office/drawing/2014/main" xmlns="" id="{D6C05ADC-EBCA-9F88-FC1E-077C36C3E6BA}"/>
+                <a16:creationId xmlns:a16="http://schemas.microsoft.com/office/drawing/2014/main" id="{D6C05ADC-EBCA-9F88-FC1E-077C36C3E6BA}"/>
               </a:ext>
               <a:ext uri="{C183D7F6-B498-43B3-948B-1728B52AA6E4}">
-                <adec:decorative xmlns:adec="http://schemas.microsoft.com/office/drawing/2017/decorative" xmlns="" val="1"/>
+                <adec:decorative xmlns:adec="http://schemas.microsoft.com/office/drawing/2017/decorative" val="1"/>
               </a:ext>
             </a:extLst>
           </p:cNvPr>
@@ -6622,7 +6633,7 @@
           <p:nvPr>
             <p:extLst>
               <p:ext uri="{386F3935-93C4-4BCD-93E2-E3B085C9AB24}">
-                <p16:designElem xmlns:p16="http://schemas.microsoft.com/office/powerpoint/2015/main" xmlns="" val="1"/>
+                <p16:designElem xmlns:p16="http://schemas.microsoft.com/office/powerpoint/2015/main" val="1"/>
               </p:ext>
             </p:extLst>
           </p:nvPr>
@@ -6672,7 +6683,7 @@
           <p:cNvPr id="3" name="TextBox 2">
             <a:extLst>
               <a:ext uri="{FF2B5EF4-FFF2-40B4-BE49-F238E27FC236}">
-                <a16:creationId xmlns:a16="http://schemas.microsoft.com/office/drawing/2014/main" xmlns="" id="{7F2E365C-4DAD-96E1-BD5C-0EE3EAD6BF1B}"/>
+                <a16:creationId xmlns:a16="http://schemas.microsoft.com/office/drawing/2014/main" id="{7F2E365C-4DAD-96E1-BD5C-0EE3EAD6BF1B}"/>
               </a:ext>
             </a:extLst>
           </p:cNvPr>
@@ -6705,10 +6716,10 @@
           <p:cNvPr id="20" name="Group 19">
             <a:extLst>
               <a:ext uri="{FF2B5EF4-FFF2-40B4-BE49-F238E27FC236}">
-                <a16:creationId xmlns:a16="http://schemas.microsoft.com/office/drawing/2014/main" xmlns="" id="{CCB70DC0-DEF5-82D2-84D3-5090BDF0D29A}"/>
+                <a16:creationId xmlns:a16="http://schemas.microsoft.com/office/drawing/2014/main" id="{CCB70DC0-DEF5-82D2-84D3-5090BDF0D29A}"/>
               </a:ext>
               <a:ext uri="{C183D7F6-B498-43B3-948B-1728B52AA6E4}">
-                <adec:decorative xmlns:adec="http://schemas.microsoft.com/office/drawing/2017/decorative" xmlns="" val="1"/>
+                <adec:decorative xmlns:adec="http://schemas.microsoft.com/office/drawing/2017/decorative" val="1"/>
               </a:ext>
             </a:extLst>
           </p:cNvPr>
@@ -6718,7 +6729,7 @@
           <p:nvPr>
             <p:extLst>
               <p:ext uri="{386F3935-93C4-4BCD-93E2-E3B085C9AB24}">
-                <p16:designElem xmlns:p16="http://schemas.microsoft.com/office/powerpoint/2015/main" xmlns="" val="1"/>
+                <p16:designElem xmlns:p16="http://schemas.microsoft.com/office/powerpoint/2015/main" val="1"/>
               </p:ext>
             </p:extLst>
           </p:nvPr>
@@ -6736,10 +6747,10 @@
             <p:cNvPr id="21" name="Freeform: Shape 20">
               <a:extLst>
                 <a:ext uri="{FF2B5EF4-FFF2-40B4-BE49-F238E27FC236}">
-                  <a16:creationId xmlns:a16="http://schemas.microsoft.com/office/drawing/2014/main" xmlns="" id="{70B99616-C896-F10A-6A37-6619B94F8B55}"/>
+                  <a16:creationId xmlns:a16="http://schemas.microsoft.com/office/drawing/2014/main" id="{70B99616-C896-F10A-6A37-6619B94F8B55}"/>
                 </a:ext>
                 <a:ext uri="{C183D7F6-B498-43B3-948B-1728B52AA6E4}">
-                  <adec:decorative xmlns:adec="http://schemas.microsoft.com/office/drawing/2017/decorative" xmlns="" val="1"/>
+                  <adec:decorative xmlns:adec="http://schemas.microsoft.com/office/drawing/2017/decorative" val="1"/>
                 </a:ext>
               </a:extLst>
             </p:cNvPr>
@@ -6747,7 +6758,7 @@
             <p:nvPr>
               <p:extLst>
                 <p:ext uri="{386F3935-93C4-4BCD-93E2-E3B085C9AB24}">
-                  <p16:designElem xmlns:p16="http://schemas.microsoft.com/office/powerpoint/2015/main" xmlns="" val="1"/>
+                  <p16:designElem xmlns:p16="http://schemas.microsoft.com/office/powerpoint/2015/main" val="1"/>
                 </p:ext>
               </p:extLst>
             </p:nvPr>
@@ -6948,10 +6959,10 @@
             <p:cNvPr id="22" name="Freeform: Shape 21">
               <a:extLst>
                 <a:ext uri="{FF2B5EF4-FFF2-40B4-BE49-F238E27FC236}">
-                  <a16:creationId xmlns:a16="http://schemas.microsoft.com/office/drawing/2014/main" xmlns="" id="{91DB4322-2DFB-A6A7-E968-ECB11ECE405E}"/>
+                  <a16:creationId xmlns:a16="http://schemas.microsoft.com/office/drawing/2014/main" id="{91DB4322-2DFB-A6A7-E968-ECB11ECE405E}"/>
                 </a:ext>
                 <a:ext uri="{C183D7F6-B498-43B3-948B-1728B52AA6E4}">
-                  <adec:decorative xmlns:adec="http://schemas.microsoft.com/office/drawing/2017/decorative" xmlns="" val="1"/>
+                  <adec:decorative xmlns:adec="http://schemas.microsoft.com/office/drawing/2017/decorative" val="1"/>
                 </a:ext>
               </a:extLst>
             </p:cNvPr>
@@ -6959,7 +6970,7 @@
             <p:nvPr>
               <p:extLst>
                 <p:ext uri="{386F3935-93C4-4BCD-93E2-E3B085C9AB24}">
-                  <p16:designElem xmlns:p16="http://schemas.microsoft.com/office/powerpoint/2015/main" xmlns="" val="1"/>
+                  <p16:designElem xmlns:p16="http://schemas.microsoft.com/office/powerpoint/2015/main" val="1"/>
                 </p:ext>
               </p:extLst>
             </p:nvPr>
@@ -7160,10 +7171,10 @@
             <p:cNvPr id="23" name="Freeform: Shape 22">
               <a:extLst>
                 <a:ext uri="{FF2B5EF4-FFF2-40B4-BE49-F238E27FC236}">
-                  <a16:creationId xmlns:a16="http://schemas.microsoft.com/office/drawing/2014/main" xmlns="" id="{BB5A62EA-7B6B-AB02-6DA3-10823E7C5C6E}"/>
+                  <a16:creationId xmlns:a16="http://schemas.microsoft.com/office/drawing/2014/main" id="{BB5A62EA-7B6B-AB02-6DA3-10823E7C5C6E}"/>
                 </a:ext>
                 <a:ext uri="{C183D7F6-B498-43B3-948B-1728B52AA6E4}">
-                  <adec:decorative xmlns:adec="http://schemas.microsoft.com/office/drawing/2017/decorative" xmlns="" val="1"/>
+                  <adec:decorative xmlns:adec="http://schemas.microsoft.com/office/drawing/2017/decorative" val="1"/>
                 </a:ext>
               </a:extLst>
             </p:cNvPr>
@@ -7171,7 +7182,7 @@
             <p:nvPr>
               <p:extLst>
                 <p:ext uri="{386F3935-93C4-4BCD-93E2-E3B085C9AB24}">
-                  <p16:designElem xmlns:p16="http://schemas.microsoft.com/office/powerpoint/2015/main" xmlns="" val="1"/>
+                  <p16:designElem xmlns:p16="http://schemas.microsoft.com/office/powerpoint/2015/main" val="1"/>
                 </p:ext>
               </p:extLst>
             </p:nvPr>
@@ -7482,10 +7493,10 @@
             <p:cNvPr id="24" name="Freeform: Shape 23">
               <a:extLst>
                 <a:ext uri="{FF2B5EF4-FFF2-40B4-BE49-F238E27FC236}">
-                  <a16:creationId xmlns:a16="http://schemas.microsoft.com/office/drawing/2014/main" xmlns="" id="{29BCEA99-BAB3-D646-3C26-C6E0E5428185}"/>
+                  <a16:creationId xmlns:a16="http://schemas.microsoft.com/office/drawing/2014/main" id="{29BCEA99-BAB3-D646-3C26-C6E0E5428185}"/>
                 </a:ext>
                 <a:ext uri="{C183D7F6-B498-43B3-948B-1728B52AA6E4}">
-                  <adec:decorative xmlns:adec="http://schemas.microsoft.com/office/drawing/2017/decorative" xmlns="" val="1"/>
+                  <adec:decorative xmlns:adec="http://schemas.microsoft.com/office/drawing/2017/decorative" val="1"/>
                 </a:ext>
               </a:extLst>
             </p:cNvPr>
@@ -7493,7 +7504,7 @@
             <p:nvPr>
               <p:extLst>
                 <p:ext uri="{386F3935-93C4-4BCD-93E2-E3B085C9AB24}">
-                  <p16:designElem xmlns:p16="http://schemas.microsoft.com/office/powerpoint/2015/main" xmlns="" val="1"/>
+                  <p16:designElem xmlns:p16="http://schemas.microsoft.com/office/powerpoint/2015/main" val="1"/>
                 </p:ext>
               </p:extLst>
             </p:nvPr>
@@ -7961,7 +7972,7 @@
           <p:cNvPr id="11" name="Picture 10" descr="A close-up of a logo&#10;&#10;AI-generated content may be incorrect.">
             <a:extLst>
               <a:ext uri="{FF2B5EF4-FFF2-40B4-BE49-F238E27FC236}">
-                <a16:creationId xmlns:a16="http://schemas.microsoft.com/office/drawing/2014/main" xmlns="" id="{472C507D-9272-1AE0-5DF9-F12A9CB20E88}"/>
+                <a16:creationId xmlns:a16="http://schemas.microsoft.com/office/drawing/2014/main" id="{472C507D-9272-1AE0-5DF9-F12A9CB20E88}"/>
               </a:ext>
             </a:extLst>
           </p:cNvPr>
@@ -7997,7 +8008,7 @@
           <p:cNvPr id="8" name="TextBox 7">
             <a:extLst>
               <a:ext uri="{FF2B5EF4-FFF2-40B4-BE49-F238E27FC236}">
-                <a16:creationId xmlns:a16="http://schemas.microsoft.com/office/drawing/2014/main" xmlns="" id="{00C8108A-C924-47FE-071A-B6C1E0E3B382}"/>
+                <a16:creationId xmlns:a16="http://schemas.microsoft.com/office/drawing/2014/main" id="{00C8108A-C924-47FE-071A-B6C1E0E3B382}"/>
               </a:ext>
             </a:extLst>
           </p:cNvPr>
@@ -8030,7 +8041,7 @@
           <p:cNvPr id="4" name="Slide Number Placeholder 3">
             <a:extLst>
               <a:ext uri="{FF2B5EF4-FFF2-40B4-BE49-F238E27FC236}">
-                <a16:creationId xmlns:a16="http://schemas.microsoft.com/office/drawing/2014/main" xmlns="" id="{23857BA8-6A88-2C40-6D15-F60E248A9E5A}"/>
+                <a16:creationId xmlns:a16="http://schemas.microsoft.com/office/drawing/2014/main" id="{23857BA8-6A88-2C40-6D15-F60E248A9E5A}"/>
               </a:ext>
             </a:extLst>
           </p:cNvPr>
@@ -8076,10 +8087,10 @@
           <p:cNvPr id="26" name="Group 25">
             <a:extLst>
               <a:ext uri="{FF2B5EF4-FFF2-40B4-BE49-F238E27FC236}">
-                <a16:creationId xmlns:a16="http://schemas.microsoft.com/office/drawing/2014/main" xmlns="" id="{F0173917-5C1C-82AB-6142-EB886DC6EEA0}"/>
+                <a16:creationId xmlns:a16="http://schemas.microsoft.com/office/drawing/2014/main" id="{F0173917-5C1C-82AB-6142-EB886DC6EEA0}"/>
               </a:ext>
               <a:ext uri="{C183D7F6-B498-43B3-948B-1728B52AA6E4}">
-                <adec:decorative xmlns:adec="http://schemas.microsoft.com/office/drawing/2017/decorative" xmlns="" val="1"/>
+                <adec:decorative xmlns:adec="http://schemas.microsoft.com/office/drawing/2017/decorative" val="1"/>
               </a:ext>
             </a:extLst>
           </p:cNvPr>
@@ -8089,7 +8100,7 @@
           <p:nvPr>
             <p:extLst>
               <p:ext uri="{386F3935-93C4-4BCD-93E2-E3B085C9AB24}">
-                <p16:designElem xmlns:p16="http://schemas.microsoft.com/office/powerpoint/2015/main" xmlns="" val="1"/>
+                <p16:designElem xmlns:p16="http://schemas.microsoft.com/office/powerpoint/2015/main" val="1"/>
               </p:ext>
             </p:extLst>
           </p:nvPr>
@@ -8107,10 +8118,10 @@
             <p:cNvPr id="27" name="Freeform: Shape 26">
               <a:extLst>
                 <a:ext uri="{FF2B5EF4-FFF2-40B4-BE49-F238E27FC236}">
-                  <a16:creationId xmlns:a16="http://schemas.microsoft.com/office/drawing/2014/main" xmlns="" id="{EC858B04-B12F-1D0A-121A-346F95B99B63}"/>
+                  <a16:creationId xmlns:a16="http://schemas.microsoft.com/office/drawing/2014/main" id="{EC858B04-B12F-1D0A-121A-346F95B99B63}"/>
                 </a:ext>
                 <a:ext uri="{C183D7F6-B498-43B3-948B-1728B52AA6E4}">
-                  <adec:decorative xmlns:adec="http://schemas.microsoft.com/office/drawing/2017/decorative" xmlns="" val="1"/>
+                  <adec:decorative xmlns:adec="http://schemas.microsoft.com/office/drawing/2017/decorative" val="1"/>
                 </a:ext>
               </a:extLst>
             </p:cNvPr>
@@ -8118,7 +8129,7 @@
             <p:nvPr>
               <p:extLst>
                 <p:ext uri="{386F3935-93C4-4BCD-93E2-E3B085C9AB24}">
-                  <p16:designElem xmlns:p16="http://schemas.microsoft.com/office/powerpoint/2015/main" xmlns="" val="1"/>
+                  <p16:designElem xmlns:p16="http://schemas.microsoft.com/office/powerpoint/2015/main" val="1"/>
                 </p:ext>
               </p:extLst>
             </p:nvPr>
@@ -8505,10 +8516,10 @@
             <p:cNvPr id="28" name="Freeform: Shape 27">
               <a:extLst>
                 <a:ext uri="{FF2B5EF4-FFF2-40B4-BE49-F238E27FC236}">
-                  <a16:creationId xmlns:a16="http://schemas.microsoft.com/office/drawing/2014/main" xmlns="" id="{B504C547-3367-766C-837A-A78935C9AF07}"/>
+                  <a16:creationId xmlns:a16="http://schemas.microsoft.com/office/drawing/2014/main" id="{B504C547-3367-766C-837A-A78935C9AF07}"/>
                 </a:ext>
                 <a:ext uri="{C183D7F6-B498-43B3-948B-1728B52AA6E4}">
-                  <adec:decorative xmlns:adec="http://schemas.microsoft.com/office/drawing/2017/decorative" xmlns="" val="1"/>
+                  <adec:decorative xmlns:adec="http://schemas.microsoft.com/office/drawing/2017/decorative" val="1"/>
                 </a:ext>
               </a:extLst>
             </p:cNvPr>
@@ -8516,7 +8527,7 @@
             <p:nvPr>
               <p:extLst>
                 <p:ext uri="{386F3935-93C4-4BCD-93E2-E3B085C9AB24}">
-                  <p16:designElem xmlns:p16="http://schemas.microsoft.com/office/powerpoint/2015/main" xmlns="" val="1"/>
+                  <p16:designElem xmlns:p16="http://schemas.microsoft.com/office/powerpoint/2015/main" val="1"/>
                 </p:ext>
               </p:extLst>
             </p:nvPr>
@@ -8697,10 +8708,10 @@
             <p:cNvPr id="29" name="Freeform: Shape 28">
               <a:extLst>
                 <a:ext uri="{FF2B5EF4-FFF2-40B4-BE49-F238E27FC236}">
-                  <a16:creationId xmlns:a16="http://schemas.microsoft.com/office/drawing/2014/main" xmlns="" id="{F5FD4B83-38EE-F5C8-A96F-D32BF29FD0EC}"/>
+                  <a16:creationId xmlns:a16="http://schemas.microsoft.com/office/drawing/2014/main" id="{F5FD4B83-38EE-F5C8-A96F-D32BF29FD0EC}"/>
                 </a:ext>
                 <a:ext uri="{C183D7F6-B498-43B3-948B-1728B52AA6E4}">
-                  <adec:decorative xmlns:adec="http://schemas.microsoft.com/office/drawing/2017/decorative" xmlns="" val="1"/>
+                  <adec:decorative xmlns:adec="http://schemas.microsoft.com/office/drawing/2017/decorative" val="1"/>
                 </a:ext>
               </a:extLst>
             </p:cNvPr>
@@ -8708,7 +8719,7 @@
             <p:nvPr>
               <p:extLst>
                 <p:ext uri="{386F3935-93C4-4BCD-93E2-E3B085C9AB24}">
-                  <p16:designElem xmlns:p16="http://schemas.microsoft.com/office/powerpoint/2015/main" xmlns="" val="1"/>
+                  <p16:designElem xmlns:p16="http://schemas.microsoft.com/office/powerpoint/2015/main" val="1"/>
                 </p:ext>
               </p:extLst>
             </p:nvPr>
@@ -8951,10 +8962,10 @@
             <p:cNvPr id="30" name="Freeform: Shape 29">
               <a:extLst>
                 <a:ext uri="{FF2B5EF4-FFF2-40B4-BE49-F238E27FC236}">
-                  <a16:creationId xmlns:a16="http://schemas.microsoft.com/office/drawing/2014/main" xmlns="" id="{75009BB2-8F7B-D699-BD61-2727F0F203A4}"/>
+                  <a16:creationId xmlns:a16="http://schemas.microsoft.com/office/drawing/2014/main" id="{75009BB2-8F7B-D699-BD61-2727F0F203A4}"/>
                 </a:ext>
                 <a:ext uri="{C183D7F6-B498-43B3-948B-1728B52AA6E4}">
-                  <adec:decorative xmlns:adec="http://schemas.microsoft.com/office/drawing/2017/decorative" xmlns="" val="1"/>
+                  <adec:decorative xmlns:adec="http://schemas.microsoft.com/office/drawing/2017/decorative" val="1"/>
                 </a:ext>
               </a:extLst>
             </p:cNvPr>
@@ -8962,7 +8973,7 @@
             <p:nvPr>
               <p:extLst>
                 <p:ext uri="{386F3935-93C4-4BCD-93E2-E3B085C9AB24}">
-                  <p16:designElem xmlns:p16="http://schemas.microsoft.com/office/powerpoint/2015/main" xmlns="" val="1"/>
+                  <p16:designElem xmlns:p16="http://schemas.microsoft.com/office/powerpoint/2015/main" val="1"/>
                 </p:ext>
               </p:extLst>
             </p:nvPr>
@@ -9144,7 +9155,7 @@
           <p:cNvPr id="6" name="Picture 5" descr="A hands holding a light bulb&#10;&#10;AI-generated content may be incorrect.">
             <a:extLst>
               <a:ext uri="{FF2B5EF4-FFF2-40B4-BE49-F238E27FC236}">
-                <a16:creationId xmlns:a16="http://schemas.microsoft.com/office/drawing/2014/main" xmlns="" id="{3156E695-F4ED-A550-9B6B-36EEB08483CF}"/>
+                <a16:creationId xmlns:a16="http://schemas.microsoft.com/office/drawing/2014/main" id="{3156E695-F4ED-A550-9B6B-36EEB08483CF}"/>
               </a:ext>
             </a:extLst>
           </p:cNvPr>
@@ -9180,7 +9191,7 @@
           <p:cNvPr id="5" name="TextBox 4">
             <a:extLst>
               <a:ext uri="{FF2B5EF4-FFF2-40B4-BE49-F238E27FC236}">
-                <a16:creationId xmlns:a16="http://schemas.microsoft.com/office/drawing/2014/main" xmlns="" id="{FEB0F3D4-715A-9B70-76F8-0B1A410BD936}"/>
+                <a16:creationId xmlns:a16="http://schemas.microsoft.com/office/drawing/2014/main" id="{FEB0F3D4-715A-9B70-76F8-0B1A410BD936}"/>
               </a:ext>
             </a:extLst>
           </p:cNvPr>
@@ -9254,7 +9265,7 @@
           <p:cNvPr id="2" name="Title 1">
             <a:extLst>
               <a:ext uri="{FF2B5EF4-FFF2-40B4-BE49-F238E27FC236}">
-                <a16:creationId xmlns:a16="http://schemas.microsoft.com/office/drawing/2014/main" xmlns="" id="{BC97C1B8-6662-5502-4089-9DEA9AE8D62B}"/>
+                <a16:creationId xmlns:a16="http://schemas.microsoft.com/office/drawing/2014/main" id="{BC97C1B8-6662-5502-4089-9DEA9AE8D62B}"/>
               </a:ext>
             </a:extLst>
           </p:cNvPr>
@@ -9283,7 +9294,7 @@
           <p:cNvPr id="4" name="Slide Number Placeholder 3">
             <a:extLst>
               <a:ext uri="{FF2B5EF4-FFF2-40B4-BE49-F238E27FC236}">
-                <a16:creationId xmlns:a16="http://schemas.microsoft.com/office/drawing/2014/main" xmlns="" id="{1B606C71-BB9E-D39E-2E01-6947D28695EC}"/>
+                <a16:creationId xmlns:a16="http://schemas.microsoft.com/office/drawing/2014/main" id="{1B606C71-BB9E-D39E-2E01-6947D28695EC}"/>
               </a:ext>
             </a:extLst>
           </p:cNvPr>
@@ -9315,7 +9326,7 @@
           <p:cNvPr id="5" name="Picture 2" descr="Sharda University Logo &amp; Brand Assets (SVG, PNG and vector ...">
             <a:extLst>
               <a:ext uri="{FF2B5EF4-FFF2-40B4-BE49-F238E27FC236}">
-                <a16:creationId xmlns:a16="http://schemas.microsoft.com/office/drawing/2014/main" xmlns="" id="{5F4F79DF-9767-E5A8-8AF3-F6335318A36D}"/>
+                <a16:creationId xmlns:a16="http://schemas.microsoft.com/office/drawing/2014/main" id="{5F4F79DF-9767-E5A8-8AF3-F6335318A36D}"/>
               </a:ext>
             </a:extLst>
           </p:cNvPr>
@@ -9362,10 +9373,10 @@
           <p:cNvPr id="3" name="Rectangle 2">
             <a:extLst>
               <a:ext uri="{FF2B5EF4-FFF2-40B4-BE49-F238E27FC236}">
-                <a16:creationId xmlns:a16="http://schemas.microsoft.com/office/drawing/2014/main" xmlns="" id="{57521C2D-0A12-0BE0-D27F-A64EC882E132}"/>
+                <a16:creationId xmlns:a16="http://schemas.microsoft.com/office/drawing/2014/main" id="{57521C2D-0A12-0BE0-D27F-A64EC882E132}"/>
               </a:ext>
               <a:ext uri="{C183D7F6-B498-43B3-948B-1728B52AA6E4}">
-                <adec:decorative xmlns:adec="http://schemas.microsoft.com/office/drawing/2017/decorative" xmlns="" val="1"/>
+                <adec:decorative xmlns:adec="http://schemas.microsoft.com/office/drawing/2017/decorative" val="1"/>
               </a:ext>
             </a:extLst>
           </p:cNvPr>
@@ -9373,7 +9384,7 @@
           <p:nvPr>
             <p:extLst>
               <p:ext uri="{386F3935-93C4-4BCD-93E2-E3B085C9AB24}">
-                <p16:designElem xmlns:p16="http://schemas.microsoft.com/office/powerpoint/2015/main" xmlns="" val="1"/>
+                <p16:designElem xmlns:p16="http://schemas.microsoft.com/office/powerpoint/2015/main" val="1"/>
               </p:ext>
             </p:extLst>
           </p:nvPr>
@@ -9420,10 +9431,10 @@
           <p:cNvPr id="6" name="Rectangle 5">
             <a:extLst>
               <a:ext uri="{FF2B5EF4-FFF2-40B4-BE49-F238E27FC236}">
-                <a16:creationId xmlns:a16="http://schemas.microsoft.com/office/drawing/2014/main" xmlns="" id="{1C633C47-0227-5277-1FFA-57C12A05F839}"/>
+                <a16:creationId xmlns:a16="http://schemas.microsoft.com/office/drawing/2014/main" id="{1C633C47-0227-5277-1FFA-57C12A05F839}"/>
               </a:ext>
               <a:ext uri="{C183D7F6-B498-43B3-948B-1728B52AA6E4}">
-                <adec:decorative xmlns:adec="http://schemas.microsoft.com/office/drawing/2017/decorative" xmlns="" val="1"/>
+                <adec:decorative xmlns:adec="http://schemas.microsoft.com/office/drawing/2017/decorative" val="1"/>
               </a:ext>
             </a:extLst>
           </p:cNvPr>
@@ -9431,7 +9442,7 @@
           <p:nvPr>
             <p:extLst>
               <p:ext uri="{386F3935-93C4-4BCD-93E2-E3B085C9AB24}">
-                <p16:designElem xmlns:p16="http://schemas.microsoft.com/office/powerpoint/2015/main" xmlns="" val="1"/>
+                <p16:designElem xmlns:p16="http://schemas.microsoft.com/office/powerpoint/2015/main" val="1"/>
               </p:ext>
             </p:extLst>
           </p:nvPr>
@@ -9481,7 +9492,7 @@
           <p:cNvPr id="7" name="TextBox 6">
             <a:extLst>
               <a:ext uri="{FF2B5EF4-FFF2-40B4-BE49-F238E27FC236}">
-                <a16:creationId xmlns:a16="http://schemas.microsoft.com/office/drawing/2014/main" xmlns="" id="{A99EBEFD-2238-7C2F-DF28-B09B2A460C30}"/>
+                <a16:creationId xmlns:a16="http://schemas.microsoft.com/office/drawing/2014/main" id="{A99EBEFD-2238-7C2F-DF28-B09B2A460C30}"/>
               </a:ext>
             </a:extLst>
           </p:cNvPr>
@@ -9530,10 +9541,10 @@
           <p:cNvPr id="8" name="Group 7">
             <a:extLst>
               <a:ext uri="{FF2B5EF4-FFF2-40B4-BE49-F238E27FC236}">
-                <a16:creationId xmlns:a16="http://schemas.microsoft.com/office/drawing/2014/main" xmlns="" id="{C11F4149-52B1-AB05-4DBF-9B5E32861670}"/>
+                <a16:creationId xmlns:a16="http://schemas.microsoft.com/office/drawing/2014/main" id="{C11F4149-52B1-AB05-4DBF-9B5E32861670}"/>
               </a:ext>
               <a:ext uri="{C183D7F6-B498-43B3-948B-1728B52AA6E4}">
-                <adec:decorative xmlns:adec="http://schemas.microsoft.com/office/drawing/2017/decorative" xmlns="" val="1"/>
+                <adec:decorative xmlns:adec="http://schemas.microsoft.com/office/drawing/2017/decorative" val="1"/>
               </a:ext>
             </a:extLst>
           </p:cNvPr>
@@ -9541,7 +9552,7 @@
           <p:nvPr>
             <p:extLst>
               <p:ext uri="{386F3935-93C4-4BCD-93E2-E3B085C9AB24}">
-                <p16:designElem xmlns:p16="http://schemas.microsoft.com/office/powerpoint/2015/main" xmlns="" val="1"/>
+                <p16:designElem xmlns:p16="http://schemas.microsoft.com/office/powerpoint/2015/main" val="1"/>
               </p:ext>
             </p:extLst>
           </p:nvPr>
@@ -9559,10 +9570,10 @@
             <p:cNvPr id="9" name="Freeform: Shape 20">
               <a:extLst>
                 <a:ext uri="{FF2B5EF4-FFF2-40B4-BE49-F238E27FC236}">
-                  <a16:creationId xmlns:a16="http://schemas.microsoft.com/office/drawing/2014/main" xmlns="" id="{C4F8C0D9-4C65-56AE-4144-C9CD551DE99B}"/>
+                  <a16:creationId xmlns:a16="http://schemas.microsoft.com/office/drawing/2014/main" id="{C4F8C0D9-4C65-56AE-4144-C9CD551DE99B}"/>
                 </a:ext>
                 <a:ext uri="{C183D7F6-B498-43B3-948B-1728B52AA6E4}">
-                  <adec:decorative xmlns:adec="http://schemas.microsoft.com/office/drawing/2017/decorative" xmlns="" val="1"/>
+                  <adec:decorative xmlns:adec="http://schemas.microsoft.com/office/drawing/2017/decorative" val="1"/>
                 </a:ext>
               </a:extLst>
             </p:cNvPr>
@@ -9570,7 +9581,7 @@
             <p:nvPr>
               <p:extLst>
                 <p:ext uri="{386F3935-93C4-4BCD-93E2-E3B085C9AB24}">
-                  <p16:designElem xmlns:p16="http://schemas.microsoft.com/office/powerpoint/2015/main" xmlns="" val="1"/>
+                  <p16:designElem xmlns:p16="http://schemas.microsoft.com/office/powerpoint/2015/main" val="1"/>
                 </p:ext>
               </p:extLst>
             </p:nvPr>
@@ -9771,10 +9782,10 @@
             <p:cNvPr id="10" name="Freeform: Shape 21">
               <a:extLst>
                 <a:ext uri="{FF2B5EF4-FFF2-40B4-BE49-F238E27FC236}">
-                  <a16:creationId xmlns:a16="http://schemas.microsoft.com/office/drawing/2014/main" xmlns="" id="{05478CF4-30DD-6522-6898-A1FBC9668F55}"/>
+                  <a16:creationId xmlns:a16="http://schemas.microsoft.com/office/drawing/2014/main" id="{05478CF4-30DD-6522-6898-A1FBC9668F55}"/>
                 </a:ext>
                 <a:ext uri="{C183D7F6-B498-43B3-948B-1728B52AA6E4}">
-                  <adec:decorative xmlns:adec="http://schemas.microsoft.com/office/drawing/2017/decorative" xmlns="" val="1"/>
+                  <adec:decorative xmlns:adec="http://schemas.microsoft.com/office/drawing/2017/decorative" val="1"/>
                 </a:ext>
               </a:extLst>
             </p:cNvPr>
@@ -9782,7 +9793,7 @@
             <p:nvPr>
               <p:extLst>
                 <p:ext uri="{386F3935-93C4-4BCD-93E2-E3B085C9AB24}">
-                  <p16:designElem xmlns:p16="http://schemas.microsoft.com/office/powerpoint/2015/main" xmlns="" val="1"/>
+                  <p16:designElem xmlns:p16="http://schemas.microsoft.com/office/powerpoint/2015/main" val="1"/>
                 </p:ext>
               </p:extLst>
             </p:nvPr>
@@ -9983,10 +9994,10 @@
             <p:cNvPr id="11" name="Freeform: Shape 22">
               <a:extLst>
                 <a:ext uri="{FF2B5EF4-FFF2-40B4-BE49-F238E27FC236}">
-                  <a16:creationId xmlns:a16="http://schemas.microsoft.com/office/drawing/2014/main" xmlns="" id="{EC383C5F-8D6C-0C91-7F35-C78C36895FC6}"/>
+                  <a16:creationId xmlns:a16="http://schemas.microsoft.com/office/drawing/2014/main" id="{EC383C5F-8D6C-0C91-7F35-C78C36895FC6}"/>
                 </a:ext>
                 <a:ext uri="{C183D7F6-B498-43B3-948B-1728B52AA6E4}">
-                  <adec:decorative xmlns:adec="http://schemas.microsoft.com/office/drawing/2017/decorative" xmlns="" val="1"/>
+                  <adec:decorative xmlns:adec="http://schemas.microsoft.com/office/drawing/2017/decorative" val="1"/>
                 </a:ext>
               </a:extLst>
             </p:cNvPr>
@@ -9994,7 +10005,7 @@
             <p:nvPr>
               <p:extLst>
                 <p:ext uri="{386F3935-93C4-4BCD-93E2-E3B085C9AB24}">
-                  <p16:designElem xmlns:p16="http://schemas.microsoft.com/office/powerpoint/2015/main" xmlns="" val="1"/>
+                  <p16:designElem xmlns:p16="http://schemas.microsoft.com/office/powerpoint/2015/main" val="1"/>
                 </p:ext>
               </p:extLst>
             </p:nvPr>
@@ -10305,10 +10316,10 @@
             <p:cNvPr id="12" name="Freeform: Shape 23">
               <a:extLst>
                 <a:ext uri="{FF2B5EF4-FFF2-40B4-BE49-F238E27FC236}">
-                  <a16:creationId xmlns:a16="http://schemas.microsoft.com/office/drawing/2014/main" xmlns="" id="{2AE493C0-FED7-A378-B4F2-739979AB13CA}"/>
+                  <a16:creationId xmlns:a16="http://schemas.microsoft.com/office/drawing/2014/main" id="{2AE493C0-FED7-A378-B4F2-739979AB13CA}"/>
                 </a:ext>
                 <a:ext uri="{C183D7F6-B498-43B3-948B-1728B52AA6E4}">
-                  <adec:decorative xmlns:adec="http://schemas.microsoft.com/office/drawing/2017/decorative" xmlns="" val="1"/>
+                  <adec:decorative xmlns:adec="http://schemas.microsoft.com/office/drawing/2017/decorative" val="1"/>
                 </a:ext>
               </a:extLst>
             </p:cNvPr>
@@ -10316,7 +10327,7 @@
             <p:nvPr>
               <p:extLst>
                 <p:ext uri="{386F3935-93C4-4BCD-93E2-E3B085C9AB24}">
-                  <p16:designElem xmlns:p16="http://schemas.microsoft.com/office/powerpoint/2015/main" xmlns="" val="1"/>
+                  <p16:designElem xmlns:p16="http://schemas.microsoft.com/office/powerpoint/2015/main" val="1"/>
                 </p:ext>
               </p:extLst>
             </p:nvPr>
@@ -10784,7 +10795,7 @@
           <p:cNvPr id="13" name="Picture 12" descr="A close-up of a logo&#10;&#10;AI-generated content may be incorrect.">
             <a:extLst>
               <a:ext uri="{FF2B5EF4-FFF2-40B4-BE49-F238E27FC236}">
-                <a16:creationId xmlns:a16="http://schemas.microsoft.com/office/drawing/2014/main" xmlns="" id="{17FA03F5-F4BF-E184-6040-856156AE1C78}"/>
+                <a16:creationId xmlns:a16="http://schemas.microsoft.com/office/drawing/2014/main" id="{17FA03F5-F4BF-E184-6040-856156AE1C78}"/>
               </a:ext>
             </a:extLst>
           </p:cNvPr>
@@ -10820,7 +10831,7 @@
           <p:cNvPr id="15" name="Slide Number Placeholder 3">
             <a:extLst>
               <a:ext uri="{FF2B5EF4-FFF2-40B4-BE49-F238E27FC236}">
-                <a16:creationId xmlns:a16="http://schemas.microsoft.com/office/drawing/2014/main" xmlns="" id="{8CA6072C-462B-7E98-EF93-005F337ED60C}"/>
+                <a16:creationId xmlns:a16="http://schemas.microsoft.com/office/drawing/2014/main" id="{8CA6072C-462B-7E98-EF93-005F337ED60C}"/>
               </a:ext>
             </a:extLst>
           </p:cNvPr>
@@ -10963,10 +10974,10 @@
           <p:cNvPr id="16" name="Group 15">
             <a:extLst>
               <a:ext uri="{FF2B5EF4-FFF2-40B4-BE49-F238E27FC236}">
-                <a16:creationId xmlns:a16="http://schemas.microsoft.com/office/drawing/2014/main" xmlns="" id="{845E4D8B-36E6-F1FE-5E67-E097BFFEC747}"/>
+                <a16:creationId xmlns:a16="http://schemas.microsoft.com/office/drawing/2014/main" id="{845E4D8B-36E6-F1FE-5E67-E097BFFEC747}"/>
               </a:ext>
               <a:ext uri="{C183D7F6-B498-43B3-948B-1728B52AA6E4}">
-                <adec:decorative xmlns:adec="http://schemas.microsoft.com/office/drawing/2017/decorative" xmlns="" val="1"/>
+                <adec:decorative xmlns:adec="http://schemas.microsoft.com/office/drawing/2017/decorative" val="1"/>
               </a:ext>
             </a:extLst>
           </p:cNvPr>
@@ -10974,7 +10985,7 @@
           <p:nvPr>
             <p:extLst>
               <p:ext uri="{386F3935-93C4-4BCD-93E2-E3B085C9AB24}">
-                <p16:designElem xmlns:p16="http://schemas.microsoft.com/office/powerpoint/2015/main" xmlns="" val="1"/>
+                <p16:designElem xmlns:p16="http://schemas.microsoft.com/office/powerpoint/2015/main" val="1"/>
               </p:ext>
             </p:extLst>
           </p:nvPr>
@@ -10992,10 +11003,10 @@
             <p:cNvPr id="17" name="Freeform: Shape 26">
               <a:extLst>
                 <a:ext uri="{FF2B5EF4-FFF2-40B4-BE49-F238E27FC236}">
-                  <a16:creationId xmlns:a16="http://schemas.microsoft.com/office/drawing/2014/main" xmlns="" id="{194A745E-CF17-8242-AAC1-CFD911AD49FA}"/>
+                  <a16:creationId xmlns:a16="http://schemas.microsoft.com/office/drawing/2014/main" id="{194A745E-CF17-8242-AAC1-CFD911AD49FA}"/>
                 </a:ext>
                 <a:ext uri="{C183D7F6-B498-43B3-948B-1728B52AA6E4}">
-                  <adec:decorative xmlns:adec="http://schemas.microsoft.com/office/drawing/2017/decorative" xmlns="" val="1"/>
+                  <adec:decorative xmlns:adec="http://schemas.microsoft.com/office/drawing/2017/decorative" val="1"/>
                 </a:ext>
               </a:extLst>
             </p:cNvPr>
@@ -11003,7 +11014,7 @@
             <p:nvPr>
               <p:extLst>
                 <p:ext uri="{386F3935-93C4-4BCD-93E2-E3B085C9AB24}">
-                  <p16:designElem xmlns:p16="http://schemas.microsoft.com/office/powerpoint/2015/main" xmlns="" val="1"/>
+                  <p16:designElem xmlns:p16="http://schemas.microsoft.com/office/powerpoint/2015/main" val="1"/>
                 </p:ext>
               </p:extLst>
             </p:nvPr>
@@ -11390,10 +11401,10 @@
             <p:cNvPr id="18" name="Freeform: Shape 27">
               <a:extLst>
                 <a:ext uri="{FF2B5EF4-FFF2-40B4-BE49-F238E27FC236}">
-                  <a16:creationId xmlns:a16="http://schemas.microsoft.com/office/drawing/2014/main" xmlns="" id="{0B68D38B-937C-ADE3-3B5F-1BBD3AD714E8}"/>
+                  <a16:creationId xmlns:a16="http://schemas.microsoft.com/office/drawing/2014/main" id="{0B68D38B-937C-ADE3-3B5F-1BBD3AD714E8}"/>
                 </a:ext>
                 <a:ext uri="{C183D7F6-B498-43B3-948B-1728B52AA6E4}">
-                  <adec:decorative xmlns:adec="http://schemas.microsoft.com/office/drawing/2017/decorative" xmlns="" val="1"/>
+                  <adec:decorative xmlns:adec="http://schemas.microsoft.com/office/drawing/2017/decorative" val="1"/>
                 </a:ext>
               </a:extLst>
             </p:cNvPr>
@@ -11401,7 +11412,7 @@
             <p:nvPr>
               <p:extLst>
                 <p:ext uri="{386F3935-93C4-4BCD-93E2-E3B085C9AB24}">
-                  <p16:designElem xmlns:p16="http://schemas.microsoft.com/office/powerpoint/2015/main" xmlns="" val="1"/>
+                  <p16:designElem xmlns:p16="http://schemas.microsoft.com/office/powerpoint/2015/main" val="1"/>
                 </p:ext>
               </p:extLst>
             </p:nvPr>
@@ -11582,10 +11593,10 @@
             <p:cNvPr id="19" name="Freeform: Shape 28">
               <a:extLst>
                 <a:ext uri="{FF2B5EF4-FFF2-40B4-BE49-F238E27FC236}">
-                  <a16:creationId xmlns:a16="http://schemas.microsoft.com/office/drawing/2014/main" xmlns="" id="{036A3A8D-E06A-449C-6C90-F84B9E8A20C8}"/>
+                  <a16:creationId xmlns:a16="http://schemas.microsoft.com/office/drawing/2014/main" id="{036A3A8D-E06A-449C-6C90-F84B9E8A20C8}"/>
                 </a:ext>
                 <a:ext uri="{C183D7F6-B498-43B3-948B-1728B52AA6E4}">
-                  <adec:decorative xmlns:adec="http://schemas.microsoft.com/office/drawing/2017/decorative" xmlns="" val="1"/>
+                  <adec:decorative xmlns:adec="http://schemas.microsoft.com/office/drawing/2017/decorative" val="1"/>
                 </a:ext>
               </a:extLst>
             </p:cNvPr>
@@ -11593,7 +11604,7 @@
             <p:nvPr>
               <p:extLst>
                 <p:ext uri="{386F3935-93C4-4BCD-93E2-E3B085C9AB24}">
-                  <p16:designElem xmlns:p16="http://schemas.microsoft.com/office/powerpoint/2015/main" xmlns="" val="1"/>
+                  <p16:designElem xmlns:p16="http://schemas.microsoft.com/office/powerpoint/2015/main" val="1"/>
                 </p:ext>
               </p:extLst>
             </p:nvPr>
@@ -11836,10 +11847,10 @@
             <p:cNvPr id="20" name="Freeform: Shape 29">
               <a:extLst>
                 <a:ext uri="{FF2B5EF4-FFF2-40B4-BE49-F238E27FC236}">
-                  <a16:creationId xmlns:a16="http://schemas.microsoft.com/office/drawing/2014/main" xmlns="" id="{38AF1577-067B-B497-7804-C17FA4C22FFD}"/>
+                  <a16:creationId xmlns:a16="http://schemas.microsoft.com/office/drawing/2014/main" id="{38AF1577-067B-B497-7804-C17FA4C22FFD}"/>
                 </a:ext>
                 <a:ext uri="{C183D7F6-B498-43B3-948B-1728B52AA6E4}">
-                  <adec:decorative xmlns:adec="http://schemas.microsoft.com/office/drawing/2017/decorative" xmlns="" val="1"/>
+                  <adec:decorative xmlns:adec="http://schemas.microsoft.com/office/drawing/2017/decorative" val="1"/>
                 </a:ext>
               </a:extLst>
             </p:cNvPr>
@@ -11847,7 +11858,7 @@
             <p:nvPr>
               <p:extLst>
                 <p:ext uri="{386F3935-93C4-4BCD-93E2-E3B085C9AB24}">
-                  <p16:designElem xmlns:p16="http://schemas.microsoft.com/office/powerpoint/2015/main" xmlns="" val="1"/>
+                  <p16:designElem xmlns:p16="http://schemas.microsoft.com/office/powerpoint/2015/main" val="1"/>
                 </p:ext>
               </p:extLst>
             </p:nvPr>
@@ -12029,7 +12040,7 @@
           <p:cNvPr id="21" name="Picture 20" descr="A hands holding a light bulb&#10;&#10;AI-generated content may be incorrect.">
             <a:extLst>
               <a:ext uri="{FF2B5EF4-FFF2-40B4-BE49-F238E27FC236}">
-                <a16:creationId xmlns:a16="http://schemas.microsoft.com/office/drawing/2014/main" xmlns="" id="{5C19E2A6-1141-C824-F2BF-D2BFCF09C3C0}"/>
+                <a16:creationId xmlns:a16="http://schemas.microsoft.com/office/drawing/2014/main" id="{5C19E2A6-1141-C824-F2BF-D2BFCF09C3C0}"/>
               </a:ext>
             </a:extLst>
           </p:cNvPr>
@@ -12220,7 +12231,7 @@
           <p:cNvPr id="2" name="Title 1">
             <a:extLst>
               <a:ext uri="{FF2B5EF4-FFF2-40B4-BE49-F238E27FC236}">
-                <a16:creationId xmlns:a16="http://schemas.microsoft.com/office/drawing/2014/main" xmlns="" id="{1478E274-C627-E80A-CF40-A772916C0C2C}"/>
+                <a16:creationId xmlns:a16="http://schemas.microsoft.com/office/drawing/2014/main" id="{1478E274-C627-E80A-CF40-A772916C0C2C}"/>
               </a:ext>
             </a:extLst>
           </p:cNvPr>
@@ -12248,7 +12259,7 @@
           <p:cNvPr id="4" name="Slide Number Placeholder 3">
             <a:extLst>
               <a:ext uri="{FF2B5EF4-FFF2-40B4-BE49-F238E27FC236}">
-                <a16:creationId xmlns:a16="http://schemas.microsoft.com/office/drawing/2014/main" xmlns="" id="{1BFB5FD9-1F5F-5F84-88D9-A72F013CADA7}"/>
+                <a16:creationId xmlns:a16="http://schemas.microsoft.com/office/drawing/2014/main" id="{1BFB5FD9-1F5F-5F84-88D9-A72F013CADA7}"/>
               </a:ext>
             </a:extLst>
           </p:cNvPr>
@@ -12277,7 +12288,7 @@
           <p:cNvPr id="5" name="Picture 2" descr="Sharda University Logo &amp; Brand Assets (SVG, PNG and vector ...">
             <a:extLst>
               <a:ext uri="{FF2B5EF4-FFF2-40B4-BE49-F238E27FC236}">
-                <a16:creationId xmlns:a16="http://schemas.microsoft.com/office/drawing/2014/main" xmlns="" id="{1881C505-F0BD-25E8-FD3B-3295A5E318C2}"/>
+                <a16:creationId xmlns:a16="http://schemas.microsoft.com/office/drawing/2014/main" id="{1881C505-F0BD-25E8-FD3B-3295A5E318C2}"/>
               </a:ext>
             </a:extLst>
           </p:cNvPr>
@@ -12324,7 +12335,7 @@
           <p:cNvPr id="3" name="Title 1">
             <a:extLst>
               <a:ext uri="{FF2B5EF4-FFF2-40B4-BE49-F238E27FC236}">
-                <a16:creationId xmlns:a16="http://schemas.microsoft.com/office/drawing/2014/main" xmlns="" id="{2617EDC7-637D-2183-3E37-C6BECCCACC9E}"/>
+                <a16:creationId xmlns:a16="http://schemas.microsoft.com/office/drawing/2014/main" id="{2617EDC7-637D-2183-3E37-C6BECCCACC9E}"/>
               </a:ext>
             </a:extLst>
           </p:cNvPr>
@@ -12379,7 +12390,7 @@
           <p:cNvPr id="6" name="Slide Number Placeholder 3">
             <a:extLst>
               <a:ext uri="{FF2B5EF4-FFF2-40B4-BE49-F238E27FC236}">
-                <a16:creationId xmlns:a16="http://schemas.microsoft.com/office/drawing/2014/main" xmlns="" id="{7CE7E5F9-EB5C-2C3D-7B75-4D4DDE0494D3}"/>
+                <a16:creationId xmlns:a16="http://schemas.microsoft.com/office/drawing/2014/main" id="{7CE7E5F9-EB5C-2C3D-7B75-4D4DDE0494D3}"/>
               </a:ext>
             </a:extLst>
           </p:cNvPr>
@@ -12515,7 +12526,7 @@
           <p:cNvPr id="7" name="Picture 2" descr="Sharda University Logo &amp; Brand Assets (SVG, PNG and vector ...">
             <a:extLst>
               <a:ext uri="{FF2B5EF4-FFF2-40B4-BE49-F238E27FC236}">
-                <a16:creationId xmlns:a16="http://schemas.microsoft.com/office/drawing/2014/main" xmlns="" id="{B683A6EE-89A4-6714-8511-0ED76F47C4B6}"/>
+                <a16:creationId xmlns:a16="http://schemas.microsoft.com/office/drawing/2014/main" id="{B683A6EE-89A4-6714-8511-0ED76F47C4B6}"/>
               </a:ext>
             </a:extLst>
           </p:cNvPr>
@@ -12562,10 +12573,10 @@
           <p:cNvPr id="8" name="Rectangle 7">
             <a:extLst>
               <a:ext uri="{FF2B5EF4-FFF2-40B4-BE49-F238E27FC236}">
-                <a16:creationId xmlns:a16="http://schemas.microsoft.com/office/drawing/2014/main" xmlns="" id="{237A484D-D11F-0B17-F111-F76FB0BE0F1F}"/>
+                <a16:creationId xmlns:a16="http://schemas.microsoft.com/office/drawing/2014/main" id="{237A484D-D11F-0B17-F111-F76FB0BE0F1F}"/>
               </a:ext>
               <a:ext uri="{C183D7F6-B498-43B3-948B-1728B52AA6E4}">
-                <adec:decorative xmlns:adec="http://schemas.microsoft.com/office/drawing/2017/decorative" xmlns="" val="1"/>
+                <adec:decorative xmlns:adec="http://schemas.microsoft.com/office/drawing/2017/decorative" val="1"/>
               </a:ext>
             </a:extLst>
           </p:cNvPr>
@@ -12573,7 +12584,7 @@
           <p:nvPr>
             <p:extLst>
               <p:ext uri="{386F3935-93C4-4BCD-93E2-E3B085C9AB24}">
-                <p16:designElem xmlns:p16="http://schemas.microsoft.com/office/powerpoint/2015/main" xmlns="" val="1"/>
+                <p16:designElem xmlns:p16="http://schemas.microsoft.com/office/powerpoint/2015/main" val="1"/>
               </p:ext>
             </p:extLst>
           </p:nvPr>
@@ -12620,10 +12631,10 @@
           <p:cNvPr id="9" name="Rectangle 8">
             <a:extLst>
               <a:ext uri="{FF2B5EF4-FFF2-40B4-BE49-F238E27FC236}">
-                <a16:creationId xmlns:a16="http://schemas.microsoft.com/office/drawing/2014/main" xmlns="" id="{66A39220-2E5E-9225-03C7-7D31CE8FE275}"/>
+                <a16:creationId xmlns:a16="http://schemas.microsoft.com/office/drawing/2014/main" id="{66A39220-2E5E-9225-03C7-7D31CE8FE275}"/>
               </a:ext>
               <a:ext uri="{C183D7F6-B498-43B3-948B-1728B52AA6E4}">
-                <adec:decorative xmlns:adec="http://schemas.microsoft.com/office/drawing/2017/decorative" xmlns="" val="1"/>
+                <adec:decorative xmlns:adec="http://schemas.microsoft.com/office/drawing/2017/decorative" val="1"/>
               </a:ext>
             </a:extLst>
           </p:cNvPr>
@@ -12631,7 +12642,7 @@
           <p:nvPr>
             <p:extLst>
               <p:ext uri="{386F3935-93C4-4BCD-93E2-E3B085C9AB24}">
-                <p16:designElem xmlns:p16="http://schemas.microsoft.com/office/powerpoint/2015/main" xmlns="" val="1"/>
+                <p16:designElem xmlns:p16="http://schemas.microsoft.com/office/powerpoint/2015/main" val="1"/>
               </p:ext>
             </p:extLst>
           </p:nvPr>
@@ -12681,7 +12692,7 @@
           <p:cNvPr id="10" name="TextBox 9">
             <a:extLst>
               <a:ext uri="{FF2B5EF4-FFF2-40B4-BE49-F238E27FC236}">
-                <a16:creationId xmlns:a16="http://schemas.microsoft.com/office/drawing/2014/main" xmlns="" id="{F05091E1-2002-C3EF-AD14-30B2F7142842}"/>
+                <a16:creationId xmlns:a16="http://schemas.microsoft.com/office/drawing/2014/main" id="{F05091E1-2002-C3EF-AD14-30B2F7142842}"/>
               </a:ext>
             </a:extLst>
           </p:cNvPr>
@@ -12730,10 +12741,10 @@
           <p:cNvPr id="11" name="Group 10">
             <a:extLst>
               <a:ext uri="{FF2B5EF4-FFF2-40B4-BE49-F238E27FC236}">
-                <a16:creationId xmlns:a16="http://schemas.microsoft.com/office/drawing/2014/main" xmlns="" id="{A61F2F74-3A1F-1FC4-F4D1-EDAA57D68A27}"/>
+                <a16:creationId xmlns:a16="http://schemas.microsoft.com/office/drawing/2014/main" id="{A61F2F74-3A1F-1FC4-F4D1-EDAA57D68A27}"/>
               </a:ext>
               <a:ext uri="{C183D7F6-B498-43B3-948B-1728B52AA6E4}">
-                <adec:decorative xmlns:adec="http://schemas.microsoft.com/office/drawing/2017/decorative" xmlns="" val="1"/>
+                <adec:decorative xmlns:adec="http://schemas.microsoft.com/office/drawing/2017/decorative" val="1"/>
               </a:ext>
             </a:extLst>
           </p:cNvPr>
@@ -12741,7 +12752,7 @@
           <p:nvPr>
             <p:extLst>
               <p:ext uri="{386F3935-93C4-4BCD-93E2-E3B085C9AB24}">
-                <p16:designElem xmlns:p16="http://schemas.microsoft.com/office/powerpoint/2015/main" xmlns="" val="1"/>
+                <p16:designElem xmlns:p16="http://schemas.microsoft.com/office/powerpoint/2015/main" val="1"/>
               </p:ext>
             </p:extLst>
           </p:nvPr>
@@ -12759,10 +12770,10 @@
             <p:cNvPr id="12" name="Freeform: Shape 20">
               <a:extLst>
                 <a:ext uri="{FF2B5EF4-FFF2-40B4-BE49-F238E27FC236}">
-                  <a16:creationId xmlns:a16="http://schemas.microsoft.com/office/drawing/2014/main" xmlns="" id="{0F18D0D6-2A36-D31D-D9D1-5A6DF35D51D4}"/>
+                  <a16:creationId xmlns:a16="http://schemas.microsoft.com/office/drawing/2014/main" id="{0F18D0D6-2A36-D31D-D9D1-5A6DF35D51D4}"/>
                 </a:ext>
                 <a:ext uri="{C183D7F6-B498-43B3-948B-1728B52AA6E4}">
-                  <adec:decorative xmlns:adec="http://schemas.microsoft.com/office/drawing/2017/decorative" xmlns="" val="1"/>
+                  <adec:decorative xmlns:adec="http://schemas.microsoft.com/office/drawing/2017/decorative" val="1"/>
                 </a:ext>
               </a:extLst>
             </p:cNvPr>
@@ -12770,7 +12781,7 @@
             <p:nvPr>
               <p:extLst>
                 <p:ext uri="{386F3935-93C4-4BCD-93E2-E3B085C9AB24}">
-                  <p16:designElem xmlns:p16="http://schemas.microsoft.com/office/powerpoint/2015/main" xmlns="" val="1"/>
+                  <p16:designElem xmlns:p16="http://schemas.microsoft.com/office/powerpoint/2015/main" val="1"/>
                 </p:ext>
               </p:extLst>
             </p:nvPr>
@@ -12971,10 +12982,10 @@
             <p:cNvPr id="13" name="Freeform: Shape 21">
               <a:extLst>
                 <a:ext uri="{FF2B5EF4-FFF2-40B4-BE49-F238E27FC236}">
-                  <a16:creationId xmlns:a16="http://schemas.microsoft.com/office/drawing/2014/main" xmlns="" id="{DC2468D4-3664-2D33-9388-48C1EEA509C8}"/>
+                  <a16:creationId xmlns:a16="http://schemas.microsoft.com/office/drawing/2014/main" id="{DC2468D4-3664-2D33-9388-48C1EEA509C8}"/>
                 </a:ext>
                 <a:ext uri="{C183D7F6-B498-43B3-948B-1728B52AA6E4}">
-                  <adec:decorative xmlns:adec="http://schemas.microsoft.com/office/drawing/2017/decorative" xmlns="" val="1"/>
+                  <adec:decorative xmlns:adec="http://schemas.microsoft.com/office/drawing/2017/decorative" val="1"/>
                 </a:ext>
               </a:extLst>
             </p:cNvPr>
@@ -12982,7 +12993,7 @@
             <p:nvPr>
               <p:extLst>
                 <p:ext uri="{386F3935-93C4-4BCD-93E2-E3B085C9AB24}">
-                  <p16:designElem xmlns:p16="http://schemas.microsoft.com/office/powerpoint/2015/main" xmlns="" val="1"/>
+                  <p16:designElem xmlns:p16="http://schemas.microsoft.com/office/powerpoint/2015/main" val="1"/>
                 </p:ext>
               </p:extLst>
             </p:nvPr>
@@ -13183,10 +13194,10 @@
             <p:cNvPr id="14" name="Freeform: Shape 22">
               <a:extLst>
                 <a:ext uri="{FF2B5EF4-FFF2-40B4-BE49-F238E27FC236}">
-                  <a16:creationId xmlns:a16="http://schemas.microsoft.com/office/drawing/2014/main" xmlns="" id="{FD6F78CC-57EB-00F3-78A1-5BE0F030D69C}"/>
+                  <a16:creationId xmlns:a16="http://schemas.microsoft.com/office/drawing/2014/main" id="{FD6F78CC-57EB-00F3-78A1-5BE0F030D69C}"/>
                 </a:ext>
                 <a:ext uri="{C183D7F6-B498-43B3-948B-1728B52AA6E4}">
-                  <adec:decorative xmlns:adec="http://schemas.microsoft.com/office/drawing/2017/decorative" xmlns="" val="1"/>
+                  <adec:decorative xmlns:adec="http://schemas.microsoft.com/office/drawing/2017/decorative" val="1"/>
                 </a:ext>
               </a:extLst>
             </p:cNvPr>
@@ -13194,7 +13205,7 @@
             <p:nvPr>
               <p:extLst>
                 <p:ext uri="{386F3935-93C4-4BCD-93E2-E3B085C9AB24}">
-                  <p16:designElem xmlns:p16="http://schemas.microsoft.com/office/powerpoint/2015/main" xmlns="" val="1"/>
+                  <p16:designElem xmlns:p16="http://schemas.microsoft.com/office/powerpoint/2015/main" val="1"/>
                 </p:ext>
               </p:extLst>
             </p:nvPr>
@@ -13505,10 +13516,10 @@
             <p:cNvPr id="15" name="Freeform: Shape 23">
               <a:extLst>
                 <a:ext uri="{FF2B5EF4-FFF2-40B4-BE49-F238E27FC236}">
-                  <a16:creationId xmlns:a16="http://schemas.microsoft.com/office/drawing/2014/main" xmlns="" id="{24639984-D9DD-7D44-7846-ED71B4598025}"/>
+                  <a16:creationId xmlns:a16="http://schemas.microsoft.com/office/drawing/2014/main" id="{24639984-D9DD-7D44-7846-ED71B4598025}"/>
                 </a:ext>
                 <a:ext uri="{C183D7F6-B498-43B3-948B-1728B52AA6E4}">
-                  <adec:decorative xmlns:adec="http://schemas.microsoft.com/office/drawing/2017/decorative" xmlns="" val="1"/>
+                  <adec:decorative xmlns:adec="http://schemas.microsoft.com/office/drawing/2017/decorative" val="1"/>
                 </a:ext>
               </a:extLst>
             </p:cNvPr>
@@ -13516,7 +13527,7 @@
             <p:nvPr>
               <p:extLst>
                 <p:ext uri="{386F3935-93C4-4BCD-93E2-E3B085C9AB24}">
-                  <p16:designElem xmlns:p16="http://schemas.microsoft.com/office/powerpoint/2015/main" xmlns="" val="1"/>
+                  <p16:designElem xmlns:p16="http://schemas.microsoft.com/office/powerpoint/2015/main" val="1"/>
                 </p:ext>
               </p:extLst>
             </p:nvPr>
@@ -13984,7 +13995,7 @@
           <p:cNvPr id="16" name="Picture 15" descr="A close-up of a logo&#10;&#10;AI-generated content may be incorrect.">
             <a:extLst>
               <a:ext uri="{FF2B5EF4-FFF2-40B4-BE49-F238E27FC236}">
-                <a16:creationId xmlns:a16="http://schemas.microsoft.com/office/drawing/2014/main" xmlns="" id="{B6E4A9D6-5D70-4F8A-0423-C0154E804DC9}"/>
+                <a16:creationId xmlns:a16="http://schemas.microsoft.com/office/drawing/2014/main" id="{B6E4A9D6-5D70-4F8A-0423-C0154E804DC9}"/>
               </a:ext>
             </a:extLst>
           </p:cNvPr>
@@ -14020,7 +14031,7 @@
           <p:cNvPr id="17" name="Slide Number Placeholder 3">
             <a:extLst>
               <a:ext uri="{FF2B5EF4-FFF2-40B4-BE49-F238E27FC236}">
-                <a16:creationId xmlns:a16="http://schemas.microsoft.com/office/drawing/2014/main" xmlns="" id="{B48891F8-A067-286D-FFC5-F283B06FA60A}"/>
+                <a16:creationId xmlns:a16="http://schemas.microsoft.com/office/drawing/2014/main" id="{B48891F8-A067-286D-FFC5-F283B06FA60A}"/>
               </a:ext>
             </a:extLst>
           </p:cNvPr>
@@ -14163,10 +14174,10 @@
           <p:cNvPr id="18" name="Group 17">
             <a:extLst>
               <a:ext uri="{FF2B5EF4-FFF2-40B4-BE49-F238E27FC236}">
-                <a16:creationId xmlns:a16="http://schemas.microsoft.com/office/drawing/2014/main" xmlns="" id="{A87BD122-45D1-5D24-39BA-6BA0631D306F}"/>
+                <a16:creationId xmlns:a16="http://schemas.microsoft.com/office/drawing/2014/main" id="{A87BD122-45D1-5D24-39BA-6BA0631D306F}"/>
               </a:ext>
               <a:ext uri="{C183D7F6-B498-43B3-948B-1728B52AA6E4}">
-                <adec:decorative xmlns:adec="http://schemas.microsoft.com/office/drawing/2017/decorative" xmlns="" val="1"/>
+                <adec:decorative xmlns:adec="http://schemas.microsoft.com/office/drawing/2017/decorative" val="1"/>
               </a:ext>
             </a:extLst>
           </p:cNvPr>
@@ -14174,7 +14185,7 @@
           <p:nvPr>
             <p:extLst>
               <p:ext uri="{386F3935-93C4-4BCD-93E2-E3B085C9AB24}">
-                <p16:designElem xmlns:p16="http://schemas.microsoft.com/office/powerpoint/2015/main" xmlns="" val="1"/>
+                <p16:designElem xmlns:p16="http://schemas.microsoft.com/office/powerpoint/2015/main" val="1"/>
               </p:ext>
             </p:extLst>
           </p:nvPr>
@@ -14192,10 +14203,10 @@
             <p:cNvPr id="19" name="Freeform: Shape 26">
               <a:extLst>
                 <a:ext uri="{FF2B5EF4-FFF2-40B4-BE49-F238E27FC236}">
-                  <a16:creationId xmlns:a16="http://schemas.microsoft.com/office/drawing/2014/main" xmlns="" id="{A95D2445-22C7-5060-1017-16E390802BC2}"/>
+                  <a16:creationId xmlns:a16="http://schemas.microsoft.com/office/drawing/2014/main" id="{A95D2445-22C7-5060-1017-16E390802BC2}"/>
                 </a:ext>
                 <a:ext uri="{C183D7F6-B498-43B3-948B-1728B52AA6E4}">
-                  <adec:decorative xmlns:adec="http://schemas.microsoft.com/office/drawing/2017/decorative" xmlns="" val="1"/>
+                  <adec:decorative xmlns:adec="http://schemas.microsoft.com/office/drawing/2017/decorative" val="1"/>
                 </a:ext>
               </a:extLst>
             </p:cNvPr>
@@ -14203,7 +14214,7 @@
             <p:nvPr>
               <p:extLst>
                 <p:ext uri="{386F3935-93C4-4BCD-93E2-E3B085C9AB24}">
-                  <p16:designElem xmlns:p16="http://schemas.microsoft.com/office/powerpoint/2015/main" xmlns="" val="1"/>
+                  <p16:designElem xmlns:p16="http://schemas.microsoft.com/office/powerpoint/2015/main" val="1"/>
                 </p:ext>
               </p:extLst>
             </p:nvPr>
@@ -14590,10 +14601,10 @@
             <p:cNvPr id="20" name="Freeform: Shape 27">
               <a:extLst>
                 <a:ext uri="{FF2B5EF4-FFF2-40B4-BE49-F238E27FC236}">
-                  <a16:creationId xmlns:a16="http://schemas.microsoft.com/office/drawing/2014/main" xmlns="" id="{0492B89D-0873-485F-2316-F176A2096A11}"/>
+                  <a16:creationId xmlns:a16="http://schemas.microsoft.com/office/drawing/2014/main" id="{0492B89D-0873-485F-2316-F176A2096A11}"/>
                 </a:ext>
                 <a:ext uri="{C183D7F6-B498-43B3-948B-1728B52AA6E4}">
-                  <adec:decorative xmlns:adec="http://schemas.microsoft.com/office/drawing/2017/decorative" xmlns="" val="1"/>
+                  <adec:decorative xmlns:adec="http://schemas.microsoft.com/office/drawing/2017/decorative" val="1"/>
                 </a:ext>
               </a:extLst>
             </p:cNvPr>
@@ -14601,7 +14612,7 @@
             <p:nvPr>
               <p:extLst>
                 <p:ext uri="{386F3935-93C4-4BCD-93E2-E3B085C9AB24}">
-                  <p16:designElem xmlns:p16="http://schemas.microsoft.com/office/powerpoint/2015/main" xmlns="" val="1"/>
+                  <p16:designElem xmlns:p16="http://schemas.microsoft.com/office/powerpoint/2015/main" val="1"/>
                 </p:ext>
               </p:extLst>
             </p:nvPr>
@@ -14782,10 +14793,10 @@
             <p:cNvPr id="21" name="Freeform: Shape 28">
               <a:extLst>
                 <a:ext uri="{FF2B5EF4-FFF2-40B4-BE49-F238E27FC236}">
-                  <a16:creationId xmlns:a16="http://schemas.microsoft.com/office/drawing/2014/main" xmlns="" id="{229C523E-42B0-8B62-1C8A-756271BADC84}"/>
+                  <a16:creationId xmlns:a16="http://schemas.microsoft.com/office/drawing/2014/main" id="{229C523E-42B0-8B62-1C8A-756271BADC84}"/>
                 </a:ext>
                 <a:ext uri="{C183D7F6-B498-43B3-948B-1728B52AA6E4}">
-                  <adec:decorative xmlns:adec="http://schemas.microsoft.com/office/drawing/2017/decorative" xmlns="" val="1"/>
+                  <adec:decorative xmlns:adec="http://schemas.microsoft.com/office/drawing/2017/decorative" val="1"/>
                 </a:ext>
               </a:extLst>
             </p:cNvPr>
@@ -14793,7 +14804,7 @@
             <p:nvPr>
               <p:extLst>
                 <p:ext uri="{386F3935-93C4-4BCD-93E2-E3B085C9AB24}">
-                  <p16:designElem xmlns:p16="http://schemas.microsoft.com/office/powerpoint/2015/main" xmlns="" val="1"/>
+                  <p16:designElem xmlns:p16="http://schemas.microsoft.com/office/powerpoint/2015/main" val="1"/>
                 </p:ext>
               </p:extLst>
             </p:nvPr>
@@ -15036,10 +15047,10 @@
             <p:cNvPr id="22" name="Freeform: Shape 29">
               <a:extLst>
                 <a:ext uri="{FF2B5EF4-FFF2-40B4-BE49-F238E27FC236}">
-                  <a16:creationId xmlns:a16="http://schemas.microsoft.com/office/drawing/2014/main" xmlns="" id="{C36ADEC2-9229-4261-1704-0441B691B581}"/>
+                  <a16:creationId xmlns:a16="http://schemas.microsoft.com/office/drawing/2014/main" id="{C36ADEC2-9229-4261-1704-0441B691B581}"/>
                 </a:ext>
                 <a:ext uri="{C183D7F6-B498-43B3-948B-1728B52AA6E4}">
-                  <adec:decorative xmlns:adec="http://schemas.microsoft.com/office/drawing/2017/decorative" xmlns="" val="1"/>
+                  <adec:decorative xmlns:adec="http://schemas.microsoft.com/office/drawing/2017/decorative" val="1"/>
                 </a:ext>
               </a:extLst>
             </p:cNvPr>
@@ -15047,7 +15058,7 @@
             <p:nvPr>
               <p:extLst>
                 <p:ext uri="{386F3935-93C4-4BCD-93E2-E3B085C9AB24}">
-                  <p16:designElem xmlns:p16="http://schemas.microsoft.com/office/powerpoint/2015/main" xmlns="" val="1"/>
+                  <p16:designElem xmlns:p16="http://schemas.microsoft.com/office/powerpoint/2015/main" val="1"/>
                 </p:ext>
               </p:extLst>
             </p:nvPr>
@@ -15229,7 +15240,7 @@
           <p:cNvPr id="23" name="Picture 22" descr="A hands holding a light bulb&#10;&#10;AI-generated content may be incorrect.">
             <a:extLst>
               <a:ext uri="{FF2B5EF4-FFF2-40B4-BE49-F238E27FC236}">
-                <a16:creationId xmlns:a16="http://schemas.microsoft.com/office/drawing/2014/main" xmlns="" id="{2ADC4BFE-1AB8-DA1A-99B3-25B4C716E120}"/>
+                <a16:creationId xmlns:a16="http://schemas.microsoft.com/office/drawing/2014/main" id="{2ADC4BFE-1AB8-DA1A-99B3-25B4C716E120}"/>
               </a:ext>
             </a:extLst>
           </p:cNvPr>
@@ -15433,6 +15444,7 @@
               </a:defRPr>
             </a:pPr>
             <a:r>
+              <a:rPr dirty="0"/>
               <a:t>Create Session</a:t>
             </a:r>
           </a:p>
@@ -15624,7 +15636,7 @@
         </p:nvSpPr>
         <p:spPr>
           <a:xfrm>
-            <a:off x="7800000" y="2020000"/>
+            <a:off x="8072700" y="1726432"/>
             <a:ext cx="180000" cy="200000"/>
           </a:xfrm>
           <a:prstGeom prst="rect">
@@ -15646,6 +15658,7 @@
               </a:defRPr>
             </a:pPr>
             <a:r>
+              <a:rPr dirty="0"/>
               <a:t>-&gt;</a:t>
             </a:r>
           </a:p>
@@ -15659,7 +15672,7 @@
         </p:nvSpPr>
         <p:spPr>
           <a:xfrm>
-            <a:off x="7990000" y="1850000"/>
+            <a:off x="8585847" y="1810948"/>
             <a:ext cx="1500000" cy="700000"/>
           </a:xfrm>
           <a:prstGeom prst="roundRect">
@@ -15700,6 +15713,7 @@
               </a:defRPr>
             </a:pPr>
             <a:r>
+              <a:rPr dirty="0"/>
               <a:t>Score &amp; Rank</a:t>
             </a:r>
           </a:p>
@@ -15761,7 +15775,7 @@
         <p:cNvPr id="1" name="">
           <a:extLst>
             <a:ext uri="{FF2B5EF4-FFF2-40B4-BE49-F238E27FC236}">
-              <a16:creationId xmlns:a16="http://schemas.microsoft.com/office/drawing/2014/main" xmlns="" id="{8EB6D30F-10BD-514E-7C2C-CABF8E09118D}"/>
+              <a16:creationId xmlns:a16="http://schemas.microsoft.com/office/drawing/2014/main" id="{8EB6D30F-10BD-514E-7C2C-CABF8E09118D}"/>
             </a:ext>
           </a:extLst>
         </p:cNvPr>
@@ -15781,7 +15795,7 @@
           <p:cNvPr id="2" name="Title 1">
             <a:extLst>
               <a:ext uri="{FF2B5EF4-FFF2-40B4-BE49-F238E27FC236}">
-                <a16:creationId xmlns:a16="http://schemas.microsoft.com/office/drawing/2014/main" xmlns="" id="{1C30D5E0-65C4-2D79-C240-6F35388CF881}"/>
+                <a16:creationId xmlns:a16="http://schemas.microsoft.com/office/drawing/2014/main" id="{1C30D5E0-65C4-2D79-C240-6F35388CF881}"/>
               </a:ext>
             </a:extLst>
           </p:cNvPr>
@@ -15809,7 +15823,7 @@
           <p:cNvPr id="4" name="Slide Number Placeholder 3">
             <a:extLst>
               <a:ext uri="{FF2B5EF4-FFF2-40B4-BE49-F238E27FC236}">
-                <a16:creationId xmlns:a16="http://schemas.microsoft.com/office/drawing/2014/main" xmlns="" id="{7294B8DF-4E89-6DB0-A717-08CB3CADCDB6}"/>
+                <a16:creationId xmlns:a16="http://schemas.microsoft.com/office/drawing/2014/main" id="{7294B8DF-4E89-6DB0-A717-08CB3CADCDB6}"/>
               </a:ext>
             </a:extLst>
           </p:cNvPr>
@@ -15838,7 +15852,7 @@
           <p:cNvPr id="5" name="Picture 2" descr="Sharda University Logo &amp; Brand Assets (SVG, PNG and vector ...">
             <a:extLst>
               <a:ext uri="{FF2B5EF4-FFF2-40B4-BE49-F238E27FC236}">
-                <a16:creationId xmlns:a16="http://schemas.microsoft.com/office/drawing/2014/main" xmlns="" id="{8B5C77F5-55DB-01EC-2CEB-E7D2570000E5}"/>
+                <a16:creationId xmlns:a16="http://schemas.microsoft.com/office/drawing/2014/main" id="{8B5C77F5-55DB-01EC-2CEB-E7D2570000E5}"/>
               </a:ext>
             </a:extLst>
           </p:cNvPr>
@@ -15885,7 +15899,7 @@
           <p:cNvPr id="3" name="Title 1">
             <a:extLst>
               <a:ext uri="{FF2B5EF4-FFF2-40B4-BE49-F238E27FC236}">
-                <a16:creationId xmlns:a16="http://schemas.microsoft.com/office/drawing/2014/main" xmlns="" id="{156B15E6-66C7-8C8F-55E9-2270E947AB34}"/>
+                <a16:creationId xmlns:a16="http://schemas.microsoft.com/office/drawing/2014/main" id="{156B15E6-66C7-8C8F-55E9-2270E947AB34}"/>
               </a:ext>
             </a:extLst>
           </p:cNvPr>
@@ -15940,7 +15954,7 @@
           <p:cNvPr id="6" name="Slide Number Placeholder 3">
             <a:extLst>
               <a:ext uri="{FF2B5EF4-FFF2-40B4-BE49-F238E27FC236}">
-                <a16:creationId xmlns:a16="http://schemas.microsoft.com/office/drawing/2014/main" xmlns="" id="{446C2E2F-CC94-B1E1-450B-FEC3325BA650}"/>
+                <a16:creationId xmlns:a16="http://schemas.microsoft.com/office/drawing/2014/main" id="{446C2E2F-CC94-B1E1-450B-FEC3325BA650}"/>
               </a:ext>
             </a:extLst>
           </p:cNvPr>
@@ -16076,7 +16090,7 @@
           <p:cNvPr id="7" name="Picture 2" descr="Sharda University Logo &amp; Brand Assets (SVG, PNG and vector ...">
             <a:extLst>
               <a:ext uri="{FF2B5EF4-FFF2-40B4-BE49-F238E27FC236}">
-                <a16:creationId xmlns:a16="http://schemas.microsoft.com/office/drawing/2014/main" xmlns="" id="{54B53E9A-85E5-FD12-E25C-7D74D0CCB73C}"/>
+                <a16:creationId xmlns:a16="http://schemas.microsoft.com/office/drawing/2014/main" id="{54B53E9A-85E5-FD12-E25C-7D74D0CCB73C}"/>
               </a:ext>
             </a:extLst>
           </p:cNvPr>
@@ -16123,10 +16137,10 @@
           <p:cNvPr id="8" name="Rectangle 7">
             <a:extLst>
               <a:ext uri="{FF2B5EF4-FFF2-40B4-BE49-F238E27FC236}">
-                <a16:creationId xmlns:a16="http://schemas.microsoft.com/office/drawing/2014/main" xmlns="" id="{847E2899-E97A-85D0-444F-D069DC5C0791}"/>
+                <a16:creationId xmlns:a16="http://schemas.microsoft.com/office/drawing/2014/main" id="{847E2899-E97A-85D0-444F-D069DC5C0791}"/>
               </a:ext>
               <a:ext uri="{C183D7F6-B498-43B3-948B-1728B52AA6E4}">
-                <adec:decorative xmlns:adec="http://schemas.microsoft.com/office/drawing/2017/decorative" xmlns="" val="1"/>
+                <adec:decorative xmlns:adec="http://schemas.microsoft.com/office/drawing/2017/decorative" val="1"/>
               </a:ext>
             </a:extLst>
           </p:cNvPr>
@@ -16134,7 +16148,7 @@
           <p:nvPr>
             <p:extLst>
               <p:ext uri="{386F3935-93C4-4BCD-93E2-E3B085C9AB24}">
-                <p16:designElem xmlns:p16="http://schemas.microsoft.com/office/powerpoint/2015/main" xmlns="" val="1"/>
+                <p16:designElem xmlns:p16="http://schemas.microsoft.com/office/powerpoint/2015/main" val="1"/>
               </p:ext>
             </p:extLst>
           </p:nvPr>
@@ -16181,10 +16195,10 @@
           <p:cNvPr id="9" name="Rectangle 8">
             <a:extLst>
               <a:ext uri="{FF2B5EF4-FFF2-40B4-BE49-F238E27FC236}">
-                <a16:creationId xmlns:a16="http://schemas.microsoft.com/office/drawing/2014/main" xmlns="" id="{8D98DAE5-57C9-1062-38D4-F5D8E259205E}"/>
+                <a16:creationId xmlns:a16="http://schemas.microsoft.com/office/drawing/2014/main" id="{8D98DAE5-57C9-1062-38D4-F5D8E259205E}"/>
               </a:ext>
               <a:ext uri="{C183D7F6-B498-43B3-948B-1728B52AA6E4}">
-                <adec:decorative xmlns:adec="http://schemas.microsoft.com/office/drawing/2017/decorative" xmlns="" val="1"/>
+                <adec:decorative xmlns:adec="http://schemas.microsoft.com/office/drawing/2017/decorative" val="1"/>
               </a:ext>
             </a:extLst>
           </p:cNvPr>
@@ -16192,7 +16206,7 @@
           <p:nvPr>
             <p:extLst>
               <p:ext uri="{386F3935-93C4-4BCD-93E2-E3B085C9AB24}">
-                <p16:designElem xmlns:p16="http://schemas.microsoft.com/office/powerpoint/2015/main" xmlns="" val="1"/>
+                <p16:designElem xmlns:p16="http://schemas.microsoft.com/office/powerpoint/2015/main" val="1"/>
               </p:ext>
             </p:extLst>
           </p:nvPr>
@@ -16242,7 +16256,7 @@
           <p:cNvPr id="10" name="TextBox 9">
             <a:extLst>
               <a:ext uri="{FF2B5EF4-FFF2-40B4-BE49-F238E27FC236}">
-                <a16:creationId xmlns:a16="http://schemas.microsoft.com/office/drawing/2014/main" xmlns="" id="{92604CEB-AD09-ADB6-0862-0ADFFB82A844}"/>
+                <a16:creationId xmlns:a16="http://schemas.microsoft.com/office/drawing/2014/main" id="{92604CEB-AD09-ADB6-0862-0ADFFB82A844}"/>
               </a:ext>
             </a:extLst>
           </p:cNvPr>
@@ -16295,10 +16309,10 @@
           <p:cNvPr id="11" name="Group 10">
             <a:extLst>
               <a:ext uri="{FF2B5EF4-FFF2-40B4-BE49-F238E27FC236}">
-                <a16:creationId xmlns:a16="http://schemas.microsoft.com/office/drawing/2014/main" xmlns="" id="{B7ADCBCC-8F45-37BD-DEE5-29084AD9D4DC}"/>
+                <a16:creationId xmlns:a16="http://schemas.microsoft.com/office/drawing/2014/main" id="{B7ADCBCC-8F45-37BD-DEE5-29084AD9D4DC}"/>
               </a:ext>
               <a:ext uri="{C183D7F6-B498-43B3-948B-1728B52AA6E4}">
-                <adec:decorative xmlns:adec="http://schemas.microsoft.com/office/drawing/2017/decorative" xmlns="" val="1"/>
+                <adec:decorative xmlns:adec="http://schemas.microsoft.com/office/drawing/2017/decorative" val="1"/>
               </a:ext>
             </a:extLst>
           </p:cNvPr>
@@ -16306,7 +16320,7 @@
           <p:nvPr>
             <p:extLst>
               <p:ext uri="{386F3935-93C4-4BCD-93E2-E3B085C9AB24}">
-                <p16:designElem xmlns:p16="http://schemas.microsoft.com/office/powerpoint/2015/main" xmlns="" val="1"/>
+                <p16:designElem xmlns:p16="http://schemas.microsoft.com/office/powerpoint/2015/main" val="1"/>
               </p:ext>
             </p:extLst>
           </p:nvPr>
@@ -16324,10 +16338,10 @@
             <p:cNvPr id="12" name="Freeform: Shape 20">
               <a:extLst>
                 <a:ext uri="{FF2B5EF4-FFF2-40B4-BE49-F238E27FC236}">
-                  <a16:creationId xmlns:a16="http://schemas.microsoft.com/office/drawing/2014/main" xmlns="" id="{AABF1DC9-A94A-61AB-5C74-C79B5CA9084A}"/>
+                  <a16:creationId xmlns:a16="http://schemas.microsoft.com/office/drawing/2014/main" id="{AABF1DC9-A94A-61AB-5C74-C79B5CA9084A}"/>
                 </a:ext>
                 <a:ext uri="{C183D7F6-B498-43B3-948B-1728B52AA6E4}">
-                  <adec:decorative xmlns:adec="http://schemas.microsoft.com/office/drawing/2017/decorative" xmlns="" val="1"/>
+                  <adec:decorative xmlns:adec="http://schemas.microsoft.com/office/drawing/2017/decorative" val="1"/>
                 </a:ext>
               </a:extLst>
             </p:cNvPr>
@@ -16335,7 +16349,7 @@
             <p:nvPr>
               <p:extLst>
                 <p:ext uri="{386F3935-93C4-4BCD-93E2-E3B085C9AB24}">
-                  <p16:designElem xmlns:p16="http://schemas.microsoft.com/office/powerpoint/2015/main" xmlns="" val="1"/>
+                  <p16:designElem xmlns:p16="http://schemas.microsoft.com/office/powerpoint/2015/main" val="1"/>
                 </p:ext>
               </p:extLst>
             </p:nvPr>
@@ -16536,10 +16550,10 @@
             <p:cNvPr id="13" name="Freeform: Shape 21">
               <a:extLst>
                 <a:ext uri="{FF2B5EF4-FFF2-40B4-BE49-F238E27FC236}">
-                  <a16:creationId xmlns:a16="http://schemas.microsoft.com/office/drawing/2014/main" xmlns="" id="{A03C9544-ED11-2412-FD24-285C67687ED2}"/>
+                  <a16:creationId xmlns:a16="http://schemas.microsoft.com/office/drawing/2014/main" id="{A03C9544-ED11-2412-FD24-285C67687ED2}"/>
                 </a:ext>
                 <a:ext uri="{C183D7F6-B498-43B3-948B-1728B52AA6E4}">
-                  <adec:decorative xmlns:adec="http://schemas.microsoft.com/office/drawing/2017/decorative" xmlns="" val="1"/>
+                  <adec:decorative xmlns:adec="http://schemas.microsoft.com/office/drawing/2017/decorative" val="1"/>
                 </a:ext>
               </a:extLst>
             </p:cNvPr>
@@ -16547,7 +16561,7 @@
             <p:nvPr>
               <p:extLst>
                 <p:ext uri="{386F3935-93C4-4BCD-93E2-E3B085C9AB24}">
-                  <p16:designElem xmlns:p16="http://schemas.microsoft.com/office/powerpoint/2015/main" xmlns="" val="1"/>
+                  <p16:designElem xmlns:p16="http://schemas.microsoft.com/office/powerpoint/2015/main" val="1"/>
                 </p:ext>
               </p:extLst>
             </p:nvPr>
@@ -16748,10 +16762,10 @@
             <p:cNvPr id="14" name="Freeform: Shape 22">
               <a:extLst>
                 <a:ext uri="{FF2B5EF4-FFF2-40B4-BE49-F238E27FC236}">
-                  <a16:creationId xmlns:a16="http://schemas.microsoft.com/office/drawing/2014/main" xmlns="" id="{5EDEE767-488B-1174-0772-46A5D123F4A0}"/>
+                  <a16:creationId xmlns:a16="http://schemas.microsoft.com/office/drawing/2014/main" id="{5EDEE767-488B-1174-0772-46A5D123F4A0}"/>
                 </a:ext>
                 <a:ext uri="{C183D7F6-B498-43B3-948B-1728B52AA6E4}">
-                  <adec:decorative xmlns:adec="http://schemas.microsoft.com/office/drawing/2017/decorative" xmlns="" val="1"/>
+                  <adec:decorative xmlns:adec="http://schemas.microsoft.com/office/drawing/2017/decorative" val="1"/>
                 </a:ext>
               </a:extLst>
             </p:cNvPr>
@@ -16759,7 +16773,7 @@
             <p:nvPr>
               <p:extLst>
                 <p:ext uri="{386F3935-93C4-4BCD-93E2-E3B085C9AB24}">
-                  <p16:designElem xmlns:p16="http://schemas.microsoft.com/office/powerpoint/2015/main" xmlns="" val="1"/>
+                  <p16:designElem xmlns:p16="http://schemas.microsoft.com/office/powerpoint/2015/main" val="1"/>
                 </p:ext>
               </p:extLst>
             </p:nvPr>
@@ -17070,10 +17084,10 @@
             <p:cNvPr id="15" name="Freeform: Shape 23">
               <a:extLst>
                 <a:ext uri="{FF2B5EF4-FFF2-40B4-BE49-F238E27FC236}">
-                  <a16:creationId xmlns:a16="http://schemas.microsoft.com/office/drawing/2014/main" xmlns="" id="{C4ECB3AC-B40D-3ED9-C7E7-76A4D0B6FCBB}"/>
+                  <a16:creationId xmlns:a16="http://schemas.microsoft.com/office/drawing/2014/main" id="{C4ECB3AC-B40D-3ED9-C7E7-76A4D0B6FCBB}"/>
                 </a:ext>
                 <a:ext uri="{C183D7F6-B498-43B3-948B-1728B52AA6E4}">
-                  <adec:decorative xmlns:adec="http://schemas.microsoft.com/office/drawing/2017/decorative" xmlns="" val="1"/>
+                  <adec:decorative xmlns:adec="http://schemas.microsoft.com/office/drawing/2017/decorative" val="1"/>
                 </a:ext>
               </a:extLst>
             </p:cNvPr>
@@ -17081,7 +17095,7 @@
             <p:nvPr>
               <p:extLst>
                 <p:ext uri="{386F3935-93C4-4BCD-93E2-E3B085C9AB24}">
-                  <p16:designElem xmlns:p16="http://schemas.microsoft.com/office/powerpoint/2015/main" xmlns="" val="1"/>
+                  <p16:designElem xmlns:p16="http://schemas.microsoft.com/office/powerpoint/2015/main" val="1"/>
                 </p:ext>
               </p:extLst>
             </p:nvPr>
@@ -17549,7 +17563,7 @@
           <p:cNvPr id="16" name="Picture 15" descr="A close-up of a logo&#10;&#10;AI-generated content may be incorrect.">
             <a:extLst>
               <a:ext uri="{FF2B5EF4-FFF2-40B4-BE49-F238E27FC236}">
-                <a16:creationId xmlns:a16="http://schemas.microsoft.com/office/drawing/2014/main" xmlns="" id="{A0DA2E88-67C5-2FCA-3DE1-4F730134BDBE}"/>
+                <a16:creationId xmlns:a16="http://schemas.microsoft.com/office/drawing/2014/main" id="{A0DA2E88-67C5-2FCA-3DE1-4F730134BDBE}"/>
               </a:ext>
             </a:extLst>
           </p:cNvPr>
@@ -17585,7 +17599,7 @@
           <p:cNvPr id="17" name="Slide Number Placeholder 3">
             <a:extLst>
               <a:ext uri="{FF2B5EF4-FFF2-40B4-BE49-F238E27FC236}">
-                <a16:creationId xmlns:a16="http://schemas.microsoft.com/office/drawing/2014/main" xmlns="" id="{37511144-1C96-849F-67EF-9F96E909845E}"/>
+                <a16:creationId xmlns:a16="http://schemas.microsoft.com/office/drawing/2014/main" id="{37511144-1C96-849F-67EF-9F96E909845E}"/>
               </a:ext>
             </a:extLst>
           </p:cNvPr>
@@ -17728,10 +17742,10 @@
           <p:cNvPr id="18" name="Group 17">
             <a:extLst>
               <a:ext uri="{FF2B5EF4-FFF2-40B4-BE49-F238E27FC236}">
-                <a16:creationId xmlns:a16="http://schemas.microsoft.com/office/drawing/2014/main" xmlns="" id="{F3FD04D1-E8CD-C58A-C032-845D9E8DC2B2}"/>
+                <a16:creationId xmlns:a16="http://schemas.microsoft.com/office/drawing/2014/main" id="{F3FD04D1-E8CD-C58A-C032-845D9E8DC2B2}"/>
               </a:ext>
               <a:ext uri="{C183D7F6-B498-43B3-948B-1728B52AA6E4}">
-                <adec:decorative xmlns:adec="http://schemas.microsoft.com/office/drawing/2017/decorative" xmlns="" val="1"/>
+                <adec:decorative xmlns:adec="http://schemas.microsoft.com/office/drawing/2017/decorative" val="1"/>
               </a:ext>
             </a:extLst>
           </p:cNvPr>
@@ -17739,7 +17753,7 @@
           <p:nvPr>
             <p:extLst>
               <p:ext uri="{386F3935-93C4-4BCD-93E2-E3B085C9AB24}">
-                <p16:designElem xmlns:p16="http://schemas.microsoft.com/office/powerpoint/2015/main" xmlns="" val="1"/>
+                <p16:designElem xmlns:p16="http://schemas.microsoft.com/office/powerpoint/2015/main" val="1"/>
               </p:ext>
             </p:extLst>
           </p:nvPr>
@@ -17757,10 +17771,10 @@
             <p:cNvPr id="19" name="Freeform: Shape 26">
               <a:extLst>
                 <a:ext uri="{FF2B5EF4-FFF2-40B4-BE49-F238E27FC236}">
-                  <a16:creationId xmlns:a16="http://schemas.microsoft.com/office/drawing/2014/main" xmlns="" id="{8F56B301-92D9-0147-A14C-E6A5F95B5639}"/>
+                  <a16:creationId xmlns:a16="http://schemas.microsoft.com/office/drawing/2014/main" id="{8F56B301-92D9-0147-A14C-E6A5F95B5639}"/>
                 </a:ext>
                 <a:ext uri="{C183D7F6-B498-43B3-948B-1728B52AA6E4}">
-                  <adec:decorative xmlns:adec="http://schemas.microsoft.com/office/drawing/2017/decorative" xmlns="" val="1"/>
+                  <adec:decorative xmlns:adec="http://schemas.microsoft.com/office/drawing/2017/decorative" val="1"/>
                 </a:ext>
               </a:extLst>
             </p:cNvPr>
@@ -17768,7 +17782,7 @@
             <p:nvPr>
               <p:extLst>
                 <p:ext uri="{386F3935-93C4-4BCD-93E2-E3B085C9AB24}">
-                  <p16:designElem xmlns:p16="http://schemas.microsoft.com/office/powerpoint/2015/main" xmlns="" val="1"/>
+                  <p16:designElem xmlns:p16="http://schemas.microsoft.com/office/powerpoint/2015/main" val="1"/>
                 </p:ext>
               </p:extLst>
             </p:nvPr>
@@ -18155,10 +18169,10 @@
             <p:cNvPr id="20" name="Freeform: Shape 27">
               <a:extLst>
                 <a:ext uri="{FF2B5EF4-FFF2-40B4-BE49-F238E27FC236}">
-                  <a16:creationId xmlns:a16="http://schemas.microsoft.com/office/drawing/2014/main" xmlns="" id="{F63F0C9E-F01D-E8A5-E3D2-6E57765F185C}"/>
+                  <a16:creationId xmlns:a16="http://schemas.microsoft.com/office/drawing/2014/main" id="{F63F0C9E-F01D-E8A5-E3D2-6E57765F185C}"/>
                 </a:ext>
                 <a:ext uri="{C183D7F6-B498-43B3-948B-1728B52AA6E4}">
-                  <adec:decorative xmlns:adec="http://schemas.microsoft.com/office/drawing/2017/decorative" xmlns="" val="1"/>
+                  <adec:decorative xmlns:adec="http://schemas.microsoft.com/office/drawing/2017/decorative" val="1"/>
                 </a:ext>
               </a:extLst>
             </p:cNvPr>
@@ -18166,7 +18180,7 @@
             <p:nvPr>
               <p:extLst>
                 <p:ext uri="{386F3935-93C4-4BCD-93E2-E3B085C9AB24}">
-                  <p16:designElem xmlns:p16="http://schemas.microsoft.com/office/powerpoint/2015/main" xmlns="" val="1"/>
+                  <p16:designElem xmlns:p16="http://schemas.microsoft.com/office/powerpoint/2015/main" val="1"/>
                 </p:ext>
               </p:extLst>
             </p:nvPr>
@@ -18347,10 +18361,10 @@
             <p:cNvPr id="21" name="Freeform: Shape 28">
               <a:extLst>
                 <a:ext uri="{FF2B5EF4-FFF2-40B4-BE49-F238E27FC236}">
-                  <a16:creationId xmlns:a16="http://schemas.microsoft.com/office/drawing/2014/main" xmlns="" id="{4A8062F2-6D93-3D81-617D-BAD884637368}"/>
+                  <a16:creationId xmlns:a16="http://schemas.microsoft.com/office/drawing/2014/main" id="{4A8062F2-6D93-3D81-617D-BAD884637368}"/>
                 </a:ext>
                 <a:ext uri="{C183D7F6-B498-43B3-948B-1728B52AA6E4}">
-                  <adec:decorative xmlns:adec="http://schemas.microsoft.com/office/drawing/2017/decorative" xmlns="" val="1"/>
+                  <adec:decorative xmlns:adec="http://schemas.microsoft.com/office/drawing/2017/decorative" val="1"/>
                 </a:ext>
               </a:extLst>
             </p:cNvPr>
@@ -18358,7 +18372,7 @@
             <p:nvPr>
               <p:extLst>
                 <p:ext uri="{386F3935-93C4-4BCD-93E2-E3B085C9AB24}">
-                  <p16:designElem xmlns:p16="http://schemas.microsoft.com/office/powerpoint/2015/main" xmlns="" val="1"/>
+                  <p16:designElem xmlns:p16="http://schemas.microsoft.com/office/powerpoint/2015/main" val="1"/>
                 </p:ext>
               </p:extLst>
             </p:nvPr>
@@ -18601,10 +18615,10 @@
             <p:cNvPr id="22" name="Freeform: Shape 29">
               <a:extLst>
                 <a:ext uri="{FF2B5EF4-FFF2-40B4-BE49-F238E27FC236}">
-                  <a16:creationId xmlns:a16="http://schemas.microsoft.com/office/drawing/2014/main" xmlns="" id="{A7400B5D-5F6F-9D51-3A29-BE50D9A103F2}"/>
+                  <a16:creationId xmlns:a16="http://schemas.microsoft.com/office/drawing/2014/main" id="{A7400B5D-5F6F-9D51-3A29-BE50D9A103F2}"/>
                 </a:ext>
                 <a:ext uri="{C183D7F6-B498-43B3-948B-1728B52AA6E4}">
-                  <adec:decorative xmlns:adec="http://schemas.microsoft.com/office/drawing/2017/decorative" xmlns="" val="1"/>
+                  <adec:decorative xmlns:adec="http://schemas.microsoft.com/office/drawing/2017/decorative" val="1"/>
                 </a:ext>
               </a:extLst>
             </p:cNvPr>
@@ -18612,7 +18626,7 @@
             <p:nvPr>
               <p:extLst>
                 <p:ext uri="{386F3935-93C4-4BCD-93E2-E3B085C9AB24}">
-                  <p16:designElem xmlns:p16="http://schemas.microsoft.com/office/powerpoint/2015/main" xmlns="" val="1"/>
+                  <p16:designElem xmlns:p16="http://schemas.microsoft.com/office/powerpoint/2015/main" val="1"/>
                 </p:ext>
               </p:extLst>
             </p:nvPr>
@@ -18794,7 +18808,7 @@
           <p:cNvPr id="23" name="Picture 22" descr="A hands holding a light bulb&#10;&#10;AI-generated content may be incorrect.">
             <a:extLst>
               <a:ext uri="{FF2B5EF4-FFF2-40B4-BE49-F238E27FC236}">
-                <a16:creationId xmlns:a16="http://schemas.microsoft.com/office/drawing/2014/main" xmlns="" id="{2EE08080-4909-1A84-D501-9A12BB0A0C58}"/>
+                <a16:creationId xmlns:a16="http://schemas.microsoft.com/office/drawing/2014/main" id="{2EE08080-4909-1A84-D501-9A12BB0A0C58}"/>
               </a:ext>
             </a:extLst>
           </p:cNvPr>
@@ -18971,7 +18985,7 @@
         <p:cNvPr id="1" name="">
           <a:extLst>
             <a:ext uri="{FF2B5EF4-FFF2-40B4-BE49-F238E27FC236}">
-              <a16:creationId xmlns:a16="http://schemas.microsoft.com/office/drawing/2014/main" xmlns="" id="{BF338FB9-46E2-C60C-92BF-22CDB5C9F462}"/>
+              <a16:creationId xmlns:a16="http://schemas.microsoft.com/office/drawing/2014/main" id="{BF338FB9-46E2-C60C-92BF-22CDB5C9F462}"/>
             </a:ext>
           </a:extLst>
         </p:cNvPr>
@@ -18991,7 +19005,7 @@
           <p:cNvPr id="2" name="Title 1">
             <a:extLst>
               <a:ext uri="{FF2B5EF4-FFF2-40B4-BE49-F238E27FC236}">
-                <a16:creationId xmlns:a16="http://schemas.microsoft.com/office/drawing/2014/main" xmlns="" id="{2D314F5E-09E4-89B4-39EB-7556D28E2D5E}"/>
+                <a16:creationId xmlns:a16="http://schemas.microsoft.com/office/drawing/2014/main" id="{2D314F5E-09E4-89B4-39EB-7556D28E2D5E}"/>
               </a:ext>
             </a:extLst>
           </p:cNvPr>
@@ -19019,7 +19033,7 @@
           <p:cNvPr id="4" name="Slide Number Placeholder 3">
             <a:extLst>
               <a:ext uri="{FF2B5EF4-FFF2-40B4-BE49-F238E27FC236}">
-                <a16:creationId xmlns:a16="http://schemas.microsoft.com/office/drawing/2014/main" xmlns="" id="{0857143B-C875-A4A1-E58E-319DCF092982}"/>
+                <a16:creationId xmlns:a16="http://schemas.microsoft.com/office/drawing/2014/main" id="{0857143B-C875-A4A1-E58E-319DCF092982}"/>
               </a:ext>
             </a:extLst>
           </p:cNvPr>
@@ -19048,7 +19062,7 @@
           <p:cNvPr id="5" name="Picture 2" descr="Sharda University Logo &amp; Brand Assets (SVG, PNG and vector ...">
             <a:extLst>
               <a:ext uri="{FF2B5EF4-FFF2-40B4-BE49-F238E27FC236}">
-                <a16:creationId xmlns:a16="http://schemas.microsoft.com/office/drawing/2014/main" xmlns="" id="{BBB029A8-98E0-4E57-80DD-6D36B04F49A2}"/>
+                <a16:creationId xmlns:a16="http://schemas.microsoft.com/office/drawing/2014/main" id="{BBB029A8-98E0-4E57-80DD-6D36B04F49A2}"/>
               </a:ext>
             </a:extLst>
           </p:cNvPr>
@@ -19095,7 +19109,7 @@
           <p:cNvPr id="3" name="Title 1">
             <a:extLst>
               <a:ext uri="{FF2B5EF4-FFF2-40B4-BE49-F238E27FC236}">
-                <a16:creationId xmlns:a16="http://schemas.microsoft.com/office/drawing/2014/main" xmlns="" id="{2970DF77-BE14-CE10-0B50-6191FB44B6A2}"/>
+                <a16:creationId xmlns:a16="http://schemas.microsoft.com/office/drawing/2014/main" id="{2970DF77-BE14-CE10-0B50-6191FB44B6A2}"/>
               </a:ext>
             </a:extLst>
           </p:cNvPr>
@@ -19150,7 +19164,7 @@
           <p:cNvPr id="6" name="Slide Number Placeholder 3">
             <a:extLst>
               <a:ext uri="{FF2B5EF4-FFF2-40B4-BE49-F238E27FC236}">
-                <a16:creationId xmlns:a16="http://schemas.microsoft.com/office/drawing/2014/main" xmlns="" id="{0ED8712E-6DF1-09B5-902D-9AF580CECD5F}"/>
+                <a16:creationId xmlns:a16="http://schemas.microsoft.com/office/drawing/2014/main" id="{0ED8712E-6DF1-09B5-902D-9AF580CECD5F}"/>
               </a:ext>
             </a:extLst>
           </p:cNvPr>
@@ -19286,7 +19300,7 @@
           <p:cNvPr id="7" name="Picture 2" descr="Sharda University Logo &amp; Brand Assets (SVG, PNG and vector ...">
             <a:extLst>
               <a:ext uri="{FF2B5EF4-FFF2-40B4-BE49-F238E27FC236}">
-                <a16:creationId xmlns:a16="http://schemas.microsoft.com/office/drawing/2014/main" xmlns="" id="{D9DEF76F-CBFB-1ABB-0620-66518FD34AF6}"/>
+                <a16:creationId xmlns:a16="http://schemas.microsoft.com/office/drawing/2014/main" id="{D9DEF76F-CBFB-1ABB-0620-66518FD34AF6}"/>
               </a:ext>
             </a:extLst>
           </p:cNvPr>
@@ -19333,10 +19347,10 @@
           <p:cNvPr id="8" name="Rectangle 7">
             <a:extLst>
               <a:ext uri="{FF2B5EF4-FFF2-40B4-BE49-F238E27FC236}">
-                <a16:creationId xmlns:a16="http://schemas.microsoft.com/office/drawing/2014/main" xmlns="" id="{319EC2AC-5B66-5A6F-B955-120E873F4C16}"/>
+                <a16:creationId xmlns:a16="http://schemas.microsoft.com/office/drawing/2014/main" id="{319EC2AC-5B66-5A6F-B955-120E873F4C16}"/>
               </a:ext>
               <a:ext uri="{C183D7F6-B498-43B3-948B-1728B52AA6E4}">
-                <adec:decorative xmlns:adec="http://schemas.microsoft.com/office/drawing/2017/decorative" xmlns="" val="1"/>
+                <adec:decorative xmlns:adec="http://schemas.microsoft.com/office/drawing/2017/decorative" val="1"/>
               </a:ext>
             </a:extLst>
           </p:cNvPr>
@@ -19344,7 +19358,7 @@
           <p:nvPr>
             <p:extLst>
               <p:ext uri="{386F3935-93C4-4BCD-93E2-E3B085C9AB24}">
-                <p16:designElem xmlns:p16="http://schemas.microsoft.com/office/powerpoint/2015/main" xmlns="" val="1"/>
+                <p16:designElem xmlns:p16="http://schemas.microsoft.com/office/powerpoint/2015/main" val="1"/>
               </p:ext>
             </p:extLst>
           </p:nvPr>
@@ -19391,10 +19405,10 @@
           <p:cNvPr id="9" name="Rectangle 8">
             <a:extLst>
               <a:ext uri="{FF2B5EF4-FFF2-40B4-BE49-F238E27FC236}">
-                <a16:creationId xmlns:a16="http://schemas.microsoft.com/office/drawing/2014/main" xmlns="" id="{B68774A5-3983-068B-F32E-8D20AF02CA2F}"/>
+                <a16:creationId xmlns:a16="http://schemas.microsoft.com/office/drawing/2014/main" id="{B68774A5-3983-068B-F32E-8D20AF02CA2F}"/>
               </a:ext>
               <a:ext uri="{C183D7F6-B498-43B3-948B-1728B52AA6E4}">
-                <adec:decorative xmlns:adec="http://schemas.microsoft.com/office/drawing/2017/decorative" xmlns="" val="1"/>
+                <adec:decorative xmlns:adec="http://schemas.microsoft.com/office/drawing/2017/decorative" val="1"/>
               </a:ext>
             </a:extLst>
           </p:cNvPr>
@@ -19402,7 +19416,7 @@
           <p:nvPr>
             <p:extLst>
               <p:ext uri="{386F3935-93C4-4BCD-93E2-E3B085C9AB24}">
-                <p16:designElem xmlns:p16="http://schemas.microsoft.com/office/powerpoint/2015/main" xmlns="" val="1"/>
+                <p16:designElem xmlns:p16="http://schemas.microsoft.com/office/powerpoint/2015/main" val="1"/>
               </p:ext>
             </p:extLst>
           </p:nvPr>
@@ -19452,7 +19466,7 @@
           <p:cNvPr id="10" name="TextBox 9">
             <a:extLst>
               <a:ext uri="{FF2B5EF4-FFF2-40B4-BE49-F238E27FC236}">
-                <a16:creationId xmlns:a16="http://schemas.microsoft.com/office/drawing/2014/main" xmlns="" id="{DD63535A-4715-6023-8F45-4697755BE93E}"/>
+                <a16:creationId xmlns:a16="http://schemas.microsoft.com/office/drawing/2014/main" id="{DD63535A-4715-6023-8F45-4697755BE93E}"/>
               </a:ext>
             </a:extLst>
           </p:cNvPr>
@@ -19505,10 +19519,10 @@
           <p:cNvPr id="11" name="Group 10">
             <a:extLst>
               <a:ext uri="{FF2B5EF4-FFF2-40B4-BE49-F238E27FC236}">
-                <a16:creationId xmlns:a16="http://schemas.microsoft.com/office/drawing/2014/main" xmlns="" id="{BE005E67-F019-51A5-34EF-25901F9E159A}"/>
+                <a16:creationId xmlns:a16="http://schemas.microsoft.com/office/drawing/2014/main" id="{BE005E67-F019-51A5-34EF-25901F9E159A}"/>
               </a:ext>
               <a:ext uri="{C183D7F6-B498-43B3-948B-1728B52AA6E4}">
-                <adec:decorative xmlns:adec="http://schemas.microsoft.com/office/drawing/2017/decorative" xmlns="" val="1"/>
+                <adec:decorative xmlns:adec="http://schemas.microsoft.com/office/drawing/2017/decorative" val="1"/>
               </a:ext>
             </a:extLst>
           </p:cNvPr>
@@ -19516,7 +19530,7 @@
           <p:nvPr>
             <p:extLst>
               <p:ext uri="{386F3935-93C4-4BCD-93E2-E3B085C9AB24}">
-                <p16:designElem xmlns:p16="http://schemas.microsoft.com/office/powerpoint/2015/main" xmlns="" val="1"/>
+                <p16:designElem xmlns:p16="http://schemas.microsoft.com/office/powerpoint/2015/main" val="1"/>
               </p:ext>
             </p:extLst>
           </p:nvPr>
@@ -19534,10 +19548,10 @@
             <p:cNvPr id="12" name="Freeform: Shape 20">
               <a:extLst>
                 <a:ext uri="{FF2B5EF4-FFF2-40B4-BE49-F238E27FC236}">
-                  <a16:creationId xmlns:a16="http://schemas.microsoft.com/office/drawing/2014/main" xmlns="" id="{DEF9EA64-B8A6-6D34-CDF3-C252EA242A08}"/>
+                  <a16:creationId xmlns:a16="http://schemas.microsoft.com/office/drawing/2014/main" id="{DEF9EA64-B8A6-6D34-CDF3-C252EA242A08}"/>
                 </a:ext>
                 <a:ext uri="{C183D7F6-B498-43B3-948B-1728B52AA6E4}">
-                  <adec:decorative xmlns:adec="http://schemas.microsoft.com/office/drawing/2017/decorative" xmlns="" val="1"/>
+                  <adec:decorative xmlns:adec="http://schemas.microsoft.com/office/drawing/2017/decorative" val="1"/>
                 </a:ext>
               </a:extLst>
             </p:cNvPr>
@@ -19545,7 +19559,7 @@
             <p:nvPr>
               <p:extLst>
                 <p:ext uri="{386F3935-93C4-4BCD-93E2-E3B085C9AB24}">
-                  <p16:designElem xmlns:p16="http://schemas.microsoft.com/office/powerpoint/2015/main" xmlns="" val="1"/>
+                  <p16:designElem xmlns:p16="http://schemas.microsoft.com/office/powerpoint/2015/main" val="1"/>
                 </p:ext>
               </p:extLst>
             </p:nvPr>
@@ -19746,10 +19760,10 @@
             <p:cNvPr id="13" name="Freeform: Shape 21">
               <a:extLst>
                 <a:ext uri="{FF2B5EF4-FFF2-40B4-BE49-F238E27FC236}">
-                  <a16:creationId xmlns:a16="http://schemas.microsoft.com/office/drawing/2014/main" xmlns="" id="{F5E976EA-8480-23C8-DDB2-E4E959D99F3B}"/>
+                  <a16:creationId xmlns:a16="http://schemas.microsoft.com/office/drawing/2014/main" id="{F5E976EA-8480-23C8-DDB2-E4E959D99F3B}"/>
                 </a:ext>
                 <a:ext uri="{C183D7F6-B498-43B3-948B-1728B52AA6E4}">
-                  <adec:decorative xmlns:adec="http://schemas.microsoft.com/office/drawing/2017/decorative" xmlns="" val="1"/>
+                  <adec:decorative xmlns:adec="http://schemas.microsoft.com/office/drawing/2017/decorative" val="1"/>
                 </a:ext>
               </a:extLst>
             </p:cNvPr>
@@ -19757,7 +19771,7 @@
             <p:nvPr>
               <p:extLst>
                 <p:ext uri="{386F3935-93C4-4BCD-93E2-E3B085C9AB24}">
-                  <p16:designElem xmlns:p16="http://schemas.microsoft.com/office/powerpoint/2015/main" xmlns="" val="1"/>
+                  <p16:designElem xmlns:p16="http://schemas.microsoft.com/office/powerpoint/2015/main" val="1"/>
                 </p:ext>
               </p:extLst>
             </p:nvPr>
@@ -19958,10 +19972,10 @@
             <p:cNvPr id="14" name="Freeform: Shape 22">
               <a:extLst>
                 <a:ext uri="{FF2B5EF4-FFF2-40B4-BE49-F238E27FC236}">
-                  <a16:creationId xmlns:a16="http://schemas.microsoft.com/office/drawing/2014/main" xmlns="" id="{09BC0516-0B22-65CF-2A7B-5B7B325E44D6}"/>
+                  <a16:creationId xmlns:a16="http://schemas.microsoft.com/office/drawing/2014/main" id="{09BC0516-0B22-65CF-2A7B-5B7B325E44D6}"/>
                 </a:ext>
                 <a:ext uri="{C183D7F6-B498-43B3-948B-1728B52AA6E4}">
-                  <adec:decorative xmlns:adec="http://schemas.microsoft.com/office/drawing/2017/decorative" xmlns="" val="1"/>
+                  <adec:decorative xmlns:adec="http://schemas.microsoft.com/office/drawing/2017/decorative" val="1"/>
                 </a:ext>
               </a:extLst>
             </p:cNvPr>
@@ -19969,7 +19983,7 @@
             <p:nvPr>
               <p:extLst>
                 <p:ext uri="{386F3935-93C4-4BCD-93E2-E3B085C9AB24}">
-                  <p16:designElem xmlns:p16="http://schemas.microsoft.com/office/powerpoint/2015/main" xmlns="" val="1"/>
+                  <p16:designElem xmlns:p16="http://schemas.microsoft.com/office/powerpoint/2015/main" val="1"/>
                 </p:ext>
               </p:extLst>
             </p:nvPr>
@@ -20280,10 +20294,10 @@
             <p:cNvPr id="15" name="Freeform: Shape 23">
               <a:extLst>
                 <a:ext uri="{FF2B5EF4-FFF2-40B4-BE49-F238E27FC236}">
-                  <a16:creationId xmlns:a16="http://schemas.microsoft.com/office/drawing/2014/main" xmlns="" id="{982F7E74-CC9C-4776-1C91-75D14D576BC9}"/>
+                  <a16:creationId xmlns:a16="http://schemas.microsoft.com/office/drawing/2014/main" id="{982F7E74-CC9C-4776-1C91-75D14D576BC9}"/>
                 </a:ext>
                 <a:ext uri="{C183D7F6-B498-43B3-948B-1728B52AA6E4}">
-                  <adec:decorative xmlns:adec="http://schemas.microsoft.com/office/drawing/2017/decorative" xmlns="" val="1"/>
+                  <adec:decorative xmlns:adec="http://schemas.microsoft.com/office/drawing/2017/decorative" val="1"/>
                 </a:ext>
               </a:extLst>
             </p:cNvPr>
@@ -20291,7 +20305,7 @@
             <p:nvPr>
               <p:extLst>
                 <p:ext uri="{386F3935-93C4-4BCD-93E2-E3B085C9AB24}">
-                  <p16:designElem xmlns:p16="http://schemas.microsoft.com/office/powerpoint/2015/main" xmlns="" val="1"/>
+                  <p16:designElem xmlns:p16="http://schemas.microsoft.com/office/powerpoint/2015/main" val="1"/>
                 </p:ext>
               </p:extLst>
             </p:nvPr>
@@ -20759,7 +20773,7 @@
           <p:cNvPr id="16" name="Picture 15" descr="A close-up of a logo&#10;&#10;AI-generated content may be incorrect.">
             <a:extLst>
               <a:ext uri="{FF2B5EF4-FFF2-40B4-BE49-F238E27FC236}">
-                <a16:creationId xmlns:a16="http://schemas.microsoft.com/office/drawing/2014/main" xmlns="" id="{A1F267AE-7039-7AAA-610C-B932FCC04D3F}"/>
+                <a16:creationId xmlns:a16="http://schemas.microsoft.com/office/drawing/2014/main" id="{A1F267AE-7039-7AAA-610C-B932FCC04D3F}"/>
               </a:ext>
             </a:extLst>
           </p:cNvPr>
@@ -20795,7 +20809,7 @@
           <p:cNvPr id="17" name="Slide Number Placeholder 3">
             <a:extLst>
               <a:ext uri="{FF2B5EF4-FFF2-40B4-BE49-F238E27FC236}">
-                <a16:creationId xmlns:a16="http://schemas.microsoft.com/office/drawing/2014/main" xmlns="" id="{67304840-A971-834E-F7D8-973EE146378F}"/>
+                <a16:creationId xmlns:a16="http://schemas.microsoft.com/office/drawing/2014/main" id="{67304840-A971-834E-F7D8-973EE146378F}"/>
               </a:ext>
             </a:extLst>
           </p:cNvPr>
@@ -20938,10 +20952,10 @@
           <p:cNvPr id="18" name="Group 17">
             <a:extLst>
               <a:ext uri="{FF2B5EF4-FFF2-40B4-BE49-F238E27FC236}">
-                <a16:creationId xmlns:a16="http://schemas.microsoft.com/office/drawing/2014/main" xmlns="" id="{A3CD3C47-FB45-34FD-67BB-14947EAE6487}"/>
+                <a16:creationId xmlns:a16="http://schemas.microsoft.com/office/drawing/2014/main" id="{A3CD3C47-FB45-34FD-67BB-14947EAE6487}"/>
               </a:ext>
               <a:ext uri="{C183D7F6-B498-43B3-948B-1728B52AA6E4}">
-                <adec:decorative xmlns:adec="http://schemas.microsoft.com/office/drawing/2017/decorative" xmlns="" val="1"/>
+                <adec:decorative xmlns:adec="http://schemas.microsoft.com/office/drawing/2017/decorative" val="1"/>
               </a:ext>
             </a:extLst>
           </p:cNvPr>
@@ -20949,7 +20963,7 @@
           <p:nvPr>
             <p:extLst>
               <p:ext uri="{386F3935-93C4-4BCD-93E2-E3B085C9AB24}">
-                <p16:designElem xmlns:p16="http://schemas.microsoft.com/office/powerpoint/2015/main" xmlns="" val="1"/>
+                <p16:designElem xmlns:p16="http://schemas.microsoft.com/office/powerpoint/2015/main" val="1"/>
               </p:ext>
             </p:extLst>
           </p:nvPr>
@@ -20967,10 +20981,10 @@
             <p:cNvPr id="19" name="Freeform: Shape 26">
               <a:extLst>
                 <a:ext uri="{FF2B5EF4-FFF2-40B4-BE49-F238E27FC236}">
-                  <a16:creationId xmlns:a16="http://schemas.microsoft.com/office/drawing/2014/main" xmlns="" id="{623FF4FB-E123-1FBD-1E9C-66CFCE3663F3}"/>
+                  <a16:creationId xmlns:a16="http://schemas.microsoft.com/office/drawing/2014/main" id="{623FF4FB-E123-1FBD-1E9C-66CFCE3663F3}"/>
                 </a:ext>
                 <a:ext uri="{C183D7F6-B498-43B3-948B-1728B52AA6E4}">
-                  <adec:decorative xmlns:adec="http://schemas.microsoft.com/office/drawing/2017/decorative" xmlns="" val="1"/>
+                  <adec:decorative xmlns:adec="http://schemas.microsoft.com/office/drawing/2017/decorative" val="1"/>
                 </a:ext>
               </a:extLst>
             </p:cNvPr>
@@ -20978,7 +20992,7 @@
             <p:nvPr>
               <p:extLst>
                 <p:ext uri="{386F3935-93C4-4BCD-93E2-E3B085C9AB24}">
-                  <p16:designElem xmlns:p16="http://schemas.microsoft.com/office/powerpoint/2015/main" xmlns="" val="1"/>
+                  <p16:designElem xmlns:p16="http://schemas.microsoft.com/office/powerpoint/2015/main" val="1"/>
                 </p:ext>
               </p:extLst>
             </p:nvPr>
@@ -21365,10 +21379,10 @@
             <p:cNvPr id="20" name="Freeform: Shape 27">
               <a:extLst>
                 <a:ext uri="{FF2B5EF4-FFF2-40B4-BE49-F238E27FC236}">
-                  <a16:creationId xmlns:a16="http://schemas.microsoft.com/office/drawing/2014/main" xmlns="" id="{579BD904-6C3E-E11F-7070-EEC4F04084E9}"/>
+                  <a16:creationId xmlns:a16="http://schemas.microsoft.com/office/drawing/2014/main" id="{579BD904-6C3E-E11F-7070-EEC4F04084E9}"/>
                 </a:ext>
                 <a:ext uri="{C183D7F6-B498-43B3-948B-1728B52AA6E4}">
-                  <adec:decorative xmlns:adec="http://schemas.microsoft.com/office/drawing/2017/decorative" xmlns="" val="1"/>
+                  <adec:decorative xmlns:adec="http://schemas.microsoft.com/office/drawing/2017/decorative" val="1"/>
                 </a:ext>
               </a:extLst>
             </p:cNvPr>
@@ -21376,7 +21390,7 @@
             <p:nvPr>
               <p:extLst>
                 <p:ext uri="{386F3935-93C4-4BCD-93E2-E3B085C9AB24}">
-                  <p16:designElem xmlns:p16="http://schemas.microsoft.com/office/powerpoint/2015/main" xmlns="" val="1"/>
+                  <p16:designElem xmlns:p16="http://schemas.microsoft.com/office/powerpoint/2015/main" val="1"/>
                 </p:ext>
               </p:extLst>
             </p:nvPr>
@@ -21557,10 +21571,10 @@
             <p:cNvPr id="21" name="Freeform: Shape 28">
               <a:extLst>
                 <a:ext uri="{FF2B5EF4-FFF2-40B4-BE49-F238E27FC236}">
-                  <a16:creationId xmlns:a16="http://schemas.microsoft.com/office/drawing/2014/main" xmlns="" id="{48D44DE1-C7FC-D524-9BC8-37489EF045FD}"/>
+                  <a16:creationId xmlns:a16="http://schemas.microsoft.com/office/drawing/2014/main" id="{48D44DE1-C7FC-D524-9BC8-37489EF045FD}"/>
                 </a:ext>
                 <a:ext uri="{C183D7F6-B498-43B3-948B-1728B52AA6E4}">
-                  <adec:decorative xmlns:adec="http://schemas.microsoft.com/office/drawing/2017/decorative" xmlns="" val="1"/>
+                  <adec:decorative xmlns:adec="http://schemas.microsoft.com/office/drawing/2017/decorative" val="1"/>
                 </a:ext>
               </a:extLst>
             </p:cNvPr>
@@ -21568,7 +21582,7 @@
             <p:nvPr>
               <p:extLst>
                 <p:ext uri="{386F3935-93C4-4BCD-93E2-E3B085C9AB24}">
-                  <p16:designElem xmlns:p16="http://schemas.microsoft.com/office/powerpoint/2015/main" xmlns="" val="1"/>
+                  <p16:designElem xmlns:p16="http://schemas.microsoft.com/office/powerpoint/2015/main" val="1"/>
                 </p:ext>
               </p:extLst>
             </p:nvPr>
@@ -21811,10 +21825,10 @@
             <p:cNvPr id="22" name="Freeform: Shape 29">
               <a:extLst>
                 <a:ext uri="{FF2B5EF4-FFF2-40B4-BE49-F238E27FC236}">
-                  <a16:creationId xmlns:a16="http://schemas.microsoft.com/office/drawing/2014/main" xmlns="" id="{939ECBD1-5700-7DF0-71AC-4187AAAA204A}"/>
+                  <a16:creationId xmlns:a16="http://schemas.microsoft.com/office/drawing/2014/main" id="{939ECBD1-5700-7DF0-71AC-4187AAAA204A}"/>
                 </a:ext>
                 <a:ext uri="{C183D7F6-B498-43B3-948B-1728B52AA6E4}">
-                  <adec:decorative xmlns:adec="http://schemas.microsoft.com/office/drawing/2017/decorative" xmlns="" val="1"/>
+                  <adec:decorative xmlns:adec="http://schemas.microsoft.com/office/drawing/2017/decorative" val="1"/>
                 </a:ext>
               </a:extLst>
             </p:cNvPr>
@@ -21822,7 +21836,7 @@
             <p:nvPr>
               <p:extLst>
                 <p:ext uri="{386F3935-93C4-4BCD-93E2-E3B085C9AB24}">
-                  <p16:designElem xmlns:p16="http://schemas.microsoft.com/office/powerpoint/2015/main" xmlns="" val="1"/>
+                  <p16:designElem xmlns:p16="http://schemas.microsoft.com/office/powerpoint/2015/main" val="1"/>
                 </p:ext>
               </p:extLst>
             </p:nvPr>
@@ -22004,7 +22018,7 @@
           <p:cNvPr id="23" name="Picture 22" descr="A hands holding a light bulb&#10;&#10;AI-generated content may be incorrect.">
             <a:extLst>
               <a:ext uri="{FF2B5EF4-FFF2-40B4-BE49-F238E27FC236}">
-                <a16:creationId xmlns:a16="http://schemas.microsoft.com/office/drawing/2014/main" xmlns="" id="{6CCD3785-85D3-171F-7854-C97494395DEB}"/>
+                <a16:creationId xmlns:a16="http://schemas.microsoft.com/office/drawing/2014/main" id="{6CCD3785-85D3-171F-7854-C97494395DEB}"/>
               </a:ext>
             </a:extLst>
           </p:cNvPr>
@@ -22211,7 +22225,7 @@
         <p:cNvPr id="1" name="">
           <a:extLst>
             <a:ext uri="{FF2B5EF4-FFF2-40B4-BE49-F238E27FC236}">
-              <a16:creationId xmlns:a16="http://schemas.microsoft.com/office/drawing/2014/main" xmlns="" id="{5E8822F5-6D7D-4227-85D7-16B67B0556E2}"/>
+              <a16:creationId xmlns:a16="http://schemas.microsoft.com/office/drawing/2014/main" id="{5E8822F5-6D7D-4227-85D7-16B67B0556E2}"/>
             </a:ext>
           </a:extLst>
         </p:cNvPr>
@@ -22231,7 +22245,7 @@
           <p:cNvPr id="2" name="Title 1">
             <a:extLst>
               <a:ext uri="{FF2B5EF4-FFF2-40B4-BE49-F238E27FC236}">
-                <a16:creationId xmlns:a16="http://schemas.microsoft.com/office/drawing/2014/main" xmlns="" id="{224500E9-734C-CAA0-17FE-176893532FD5}"/>
+                <a16:creationId xmlns:a16="http://schemas.microsoft.com/office/drawing/2014/main" id="{224500E9-734C-CAA0-17FE-176893532FD5}"/>
               </a:ext>
             </a:extLst>
           </p:cNvPr>
@@ -22259,7 +22273,7 @@
           <p:cNvPr id="4" name="Slide Number Placeholder 3">
             <a:extLst>
               <a:ext uri="{FF2B5EF4-FFF2-40B4-BE49-F238E27FC236}">
-                <a16:creationId xmlns:a16="http://schemas.microsoft.com/office/drawing/2014/main" xmlns="" id="{77922EA4-B1F6-34D3-5626-416BFEC9A735}"/>
+                <a16:creationId xmlns:a16="http://schemas.microsoft.com/office/drawing/2014/main" id="{77922EA4-B1F6-34D3-5626-416BFEC9A735}"/>
               </a:ext>
             </a:extLst>
           </p:cNvPr>
@@ -22288,7 +22302,7 @@
           <p:cNvPr id="5" name="Picture 2" descr="Sharda University Logo &amp; Brand Assets (SVG, PNG and vector ...">
             <a:extLst>
               <a:ext uri="{FF2B5EF4-FFF2-40B4-BE49-F238E27FC236}">
-                <a16:creationId xmlns:a16="http://schemas.microsoft.com/office/drawing/2014/main" xmlns="" id="{3CC82AE6-9D2A-2D88-F491-8203880CCBDD}"/>
+                <a16:creationId xmlns:a16="http://schemas.microsoft.com/office/drawing/2014/main" id="{3CC82AE6-9D2A-2D88-F491-8203880CCBDD}"/>
               </a:ext>
             </a:extLst>
           </p:cNvPr>
@@ -22335,7 +22349,7 @@
           <p:cNvPr id="3" name="Title 1">
             <a:extLst>
               <a:ext uri="{FF2B5EF4-FFF2-40B4-BE49-F238E27FC236}">
-                <a16:creationId xmlns:a16="http://schemas.microsoft.com/office/drawing/2014/main" xmlns="" id="{A065C8CE-28F6-0C6B-338C-C3B5B298F969}"/>
+                <a16:creationId xmlns:a16="http://schemas.microsoft.com/office/drawing/2014/main" id="{A065C8CE-28F6-0C6B-338C-C3B5B298F969}"/>
               </a:ext>
             </a:extLst>
           </p:cNvPr>
@@ -22390,7 +22404,7 @@
           <p:cNvPr id="6" name="Slide Number Placeholder 3">
             <a:extLst>
               <a:ext uri="{FF2B5EF4-FFF2-40B4-BE49-F238E27FC236}">
-                <a16:creationId xmlns:a16="http://schemas.microsoft.com/office/drawing/2014/main" xmlns="" id="{649D56B7-D53C-011E-2F3F-D5AD326BEFEB}"/>
+                <a16:creationId xmlns:a16="http://schemas.microsoft.com/office/drawing/2014/main" id="{649D56B7-D53C-011E-2F3F-D5AD326BEFEB}"/>
               </a:ext>
             </a:extLst>
           </p:cNvPr>
@@ -22526,7 +22540,7 @@
           <p:cNvPr id="7" name="Picture 2" descr="Sharda University Logo &amp; Brand Assets (SVG, PNG and vector ...">
             <a:extLst>
               <a:ext uri="{FF2B5EF4-FFF2-40B4-BE49-F238E27FC236}">
-                <a16:creationId xmlns:a16="http://schemas.microsoft.com/office/drawing/2014/main" xmlns="" id="{E64D2BE9-CE4D-7481-3EE6-3ABA5F7F900D}"/>
+                <a16:creationId xmlns:a16="http://schemas.microsoft.com/office/drawing/2014/main" id="{E64D2BE9-CE4D-7481-3EE6-3ABA5F7F900D}"/>
               </a:ext>
             </a:extLst>
           </p:cNvPr>
@@ -22573,10 +22587,10 @@
           <p:cNvPr id="8" name="Rectangle 7">
             <a:extLst>
               <a:ext uri="{FF2B5EF4-FFF2-40B4-BE49-F238E27FC236}">
-                <a16:creationId xmlns:a16="http://schemas.microsoft.com/office/drawing/2014/main" xmlns="" id="{FED1D958-30C5-BFBB-4704-8AA5760A3849}"/>
+                <a16:creationId xmlns:a16="http://schemas.microsoft.com/office/drawing/2014/main" id="{FED1D958-30C5-BFBB-4704-8AA5760A3849}"/>
               </a:ext>
               <a:ext uri="{C183D7F6-B498-43B3-948B-1728B52AA6E4}">
-                <adec:decorative xmlns:adec="http://schemas.microsoft.com/office/drawing/2017/decorative" xmlns="" val="1"/>
+                <adec:decorative xmlns:adec="http://schemas.microsoft.com/office/drawing/2017/decorative" val="1"/>
               </a:ext>
             </a:extLst>
           </p:cNvPr>
@@ -22584,7 +22598,7 @@
           <p:nvPr>
             <p:extLst>
               <p:ext uri="{386F3935-93C4-4BCD-93E2-E3B085C9AB24}">
-                <p16:designElem xmlns:p16="http://schemas.microsoft.com/office/powerpoint/2015/main" xmlns="" val="1"/>
+                <p16:designElem xmlns:p16="http://schemas.microsoft.com/office/powerpoint/2015/main" val="1"/>
               </p:ext>
             </p:extLst>
           </p:nvPr>
@@ -22631,10 +22645,10 @@
           <p:cNvPr id="9" name="Rectangle 8">
             <a:extLst>
               <a:ext uri="{FF2B5EF4-FFF2-40B4-BE49-F238E27FC236}">
-                <a16:creationId xmlns:a16="http://schemas.microsoft.com/office/drawing/2014/main" xmlns="" id="{1F8B59F7-E15D-2790-BD01-92549C8BDE4A}"/>
+                <a16:creationId xmlns:a16="http://schemas.microsoft.com/office/drawing/2014/main" id="{1F8B59F7-E15D-2790-BD01-92549C8BDE4A}"/>
               </a:ext>
               <a:ext uri="{C183D7F6-B498-43B3-948B-1728B52AA6E4}">
-                <adec:decorative xmlns:adec="http://schemas.microsoft.com/office/drawing/2017/decorative" xmlns="" val="1"/>
+                <adec:decorative xmlns:adec="http://schemas.microsoft.com/office/drawing/2017/decorative" val="1"/>
               </a:ext>
             </a:extLst>
           </p:cNvPr>
@@ -22642,7 +22656,7 @@
           <p:nvPr>
             <p:extLst>
               <p:ext uri="{386F3935-93C4-4BCD-93E2-E3B085C9AB24}">
-                <p16:designElem xmlns:p16="http://schemas.microsoft.com/office/powerpoint/2015/main" xmlns="" val="1"/>
+                <p16:designElem xmlns:p16="http://schemas.microsoft.com/office/powerpoint/2015/main" val="1"/>
               </p:ext>
             </p:extLst>
           </p:nvPr>
@@ -22692,7 +22706,7 @@
           <p:cNvPr id="10" name="TextBox 9">
             <a:extLst>
               <a:ext uri="{FF2B5EF4-FFF2-40B4-BE49-F238E27FC236}">
-                <a16:creationId xmlns:a16="http://schemas.microsoft.com/office/drawing/2014/main" xmlns="" id="{F6DC28E2-5885-1FB9-C717-8250B26F451A}"/>
+                <a16:creationId xmlns:a16="http://schemas.microsoft.com/office/drawing/2014/main" id="{F6DC28E2-5885-1FB9-C717-8250B26F451A}"/>
               </a:ext>
             </a:extLst>
           </p:cNvPr>
@@ -22745,10 +22759,10 @@
           <p:cNvPr id="11" name="Group 10">
             <a:extLst>
               <a:ext uri="{FF2B5EF4-FFF2-40B4-BE49-F238E27FC236}">
-                <a16:creationId xmlns:a16="http://schemas.microsoft.com/office/drawing/2014/main" xmlns="" id="{CA18811A-4F8E-2836-EF90-7221277EF3A3}"/>
+                <a16:creationId xmlns:a16="http://schemas.microsoft.com/office/drawing/2014/main" id="{CA18811A-4F8E-2836-EF90-7221277EF3A3}"/>
               </a:ext>
               <a:ext uri="{C183D7F6-B498-43B3-948B-1728B52AA6E4}">
-                <adec:decorative xmlns:adec="http://schemas.microsoft.com/office/drawing/2017/decorative" xmlns="" val="1"/>
+                <adec:decorative xmlns:adec="http://schemas.microsoft.com/office/drawing/2017/decorative" val="1"/>
               </a:ext>
             </a:extLst>
           </p:cNvPr>
@@ -22756,7 +22770,7 @@
           <p:nvPr>
             <p:extLst>
               <p:ext uri="{386F3935-93C4-4BCD-93E2-E3B085C9AB24}">
-                <p16:designElem xmlns:p16="http://schemas.microsoft.com/office/powerpoint/2015/main" xmlns="" val="1"/>
+                <p16:designElem xmlns:p16="http://schemas.microsoft.com/office/powerpoint/2015/main" val="1"/>
               </p:ext>
             </p:extLst>
           </p:nvPr>
@@ -22774,10 +22788,10 @@
             <p:cNvPr id="12" name="Freeform: Shape 20">
               <a:extLst>
                 <a:ext uri="{FF2B5EF4-FFF2-40B4-BE49-F238E27FC236}">
-                  <a16:creationId xmlns:a16="http://schemas.microsoft.com/office/drawing/2014/main" xmlns="" id="{E2B4672F-F1C3-2CFE-B3D1-6509F2ED93F5}"/>
+                  <a16:creationId xmlns:a16="http://schemas.microsoft.com/office/drawing/2014/main" id="{E2B4672F-F1C3-2CFE-B3D1-6509F2ED93F5}"/>
                 </a:ext>
                 <a:ext uri="{C183D7F6-B498-43B3-948B-1728B52AA6E4}">
-                  <adec:decorative xmlns:adec="http://schemas.microsoft.com/office/drawing/2017/decorative" xmlns="" val="1"/>
+                  <adec:decorative xmlns:adec="http://schemas.microsoft.com/office/drawing/2017/decorative" val="1"/>
                 </a:ext>
               </a:extLst>
             </p:cNvPr>
@@ -22785,7 +22799,7 @@
             <p:nvPr>
               <p:extLst>
                 <p:ext uri="{386F3935-93C4-4BCD-93E2-E3B085C9AB24}">
-                  <p16:designElem xmlns:p16="http://schemas.microsoft.com/office/powerpoint/2015/main" xmlns="" val="1"/>
+                  <p16:designElem xmlns:p16="http://schemas.microsoft.com/office/powerpoint/2015/main" val="1"/>
                 </p:ext>
               </p:extLst>
             </p:nvPr>
@@ -22986,10 +23000,10 @@
             <p:cNvPr id="13" name="Freeform: Shape 21">
               <a:extLst>
                 <a:ext uri="{FF2B5EF4-FFF2-40B4-BE49-F238E27FC236}">
-                  <a16:creationId xmlns:a16="http://schemas.microsoft.com/office/drawing/2014/main" xmlns="" id="{CC37C06D-DFF9-BC83-B432-49605D4FF19F}"/>
+                  <a16:creationId xmlns:a16="http://schemas.microsoft.com/office/drawing/2014/main" id="{CC37C06D-DFF9-BC83-B432-49605D4FF19F}"/>
                 </a:ext>
                 <a:ext uri="{C183D7F6-B498-43B3-948B-1728B52AA6E4}">
-                  <adec:decorative xmlns:adec="http://schemas.microsoft.com/office/drawing/2017/decorative" xmlns="" val="1"/>
+                  <adec:decorative xmlns:adec="http://schemas.microsoft.com/office/drawing/2017/decorative" val="1"/>
                 </a:ext>
               </a:extLst>
             </p:cNvPr>
@@ -22997,7 +23011,7 @@
             <p:nvPr>
               <p:extLst>
                 <p:ext uri="{386F3935-93C4-4BCD-93E2-E3B085C9AB24}">
-                  <p16:designElem xmlns:p16="http://schemas.microsoft.com/office/powerpoint/2015/main" xmlns="" val="1"/>
+                  <p16:designElem xmlns:p16="http://schemas.microsoft.com/office/powerpoint/2015/main" val="1"/>
                 </p:ext>
               </p:extLst>
             </p:nvPr>
@@ -23198,10 +23212,10 @@
             <p:cNvPr id="14" name="Freeform: Shape 22">
               <a:extLst>
                 <a:ext uri="{FF2B5EF4-FFF2-40B4-BE49-F238E27FC236}">
-                  <a16:creationId xmlns:a16="http://schemas.microsoft.com/office/drawing/2014/main" xmlns="" id="{5CA88AC1-9155-569A-E5BF-6E8E1C824B43}"/>
+                  <a16:creationId xmlns:a16="http://schemas.microsoft.com/office/drawing/2014/main" id="{5CA88AC1-9155-569A-E5BF-6E8E1C824B43}"/>
                 </a:ext>
                 <a:ext uri="{C183D7F6-B498-43B3-948B-1728B52AA6E4}">
-                  <adec:decorative xmlns:adec="http://schemas.microsoft.com/office/drawing/2017/decorative" xmlns="" val="1"/>
+                  <adec:decorative xmlns:adec="http://schemas.microsoft.com/office/drawing/2017/decorative" val="1"/>
                 </a:ext>
               </a:extLst>
             </p:cNvPr>
@@ -23209,7 +23223,7 @@
             <p:nvPr>
               <p:extLst>
                 <p:ext uri="{386F3935-93C4-4BCD-93E2-E3B085C9AB24}">
-                  <p16:designElem xmlns:p16="http://schemas.microsoft.com/office/powerpoint/2015/main" xmlns="" val="1"/>
+                  <p16:designElem xmlns:p16="http://schemas.microsoft.com/office/powerpoint/2015/main" val="1"/>
                 </p:ext>
               </p:extLst>
             </p:nvPr>
@@ -23520,10 +23534,10 @@
             <p:cNvPr id="15" name="Freeform: Shape 23">
               <a:extLst>
                 <a:ext uri="{FF2B5EF4-FFF2-40B4-BE49-F238E27FC236}">
-                  <a16:creationId xmlns:a16="http://schemas.microsoft.com/office/drawing/2014/main" xmlns="" id="{7AA4055F-FF3F-644A-E624-DD0C525670F8}"/>
+                  <a16:creationId xmlns:a16="http://schemas.microsoft.com/office/drawing/2014/main" id="{7AA4055F-FF3F-644A-E624-DD0C525670F8}"/>
                 </a:ext>
                 <a:ext uri="{C183D7F6-B498-43B3-948B-1728B52AA6E4}">
-                  <adec:decorative xmlns:adec="http://schemas.microsoft.com/office/drawing/2017/decorative" xmlns="" val="1"/>
+                  <adec:decorative xmlns:adec="http://schemas.microsoft.com/office/drawing/2017/decorative" val="1"/>
                 </a:ext>
               </a:extLst>
             </p:cNvPr>
@@ -23531,7 +23545,7 @@
             <p:nvPr>
               <p:extLst>
                 <p:ext uri="{386F3935-93C4-4BCD-93E2-E3B085C9AB24}">
-                  <p16:designElem xmlns:p16="http://schemas.microsoft.com/office/powerpoint/2015/main" xmlns="" val="1"/>
+                  <p16:designElem xmlns:p16="http://schemas.microsoft.com/office/powerpoint/2015/main" val="1"/>
                 </p:ext>
               </p:extLst>
             </p:nvPr>
@@ -23999,7 +24013,7 @@
           <p:cNvPr id="16" name="Picture 15" descr="A close-up of a logo&#10;&#10;AI-generated content may be incorrect.">
             <a:extLst>
               <a:ext uri="{FF2B5EF4-FFF2-40B4-BE49-F238E27FC236}">
-                <a16:creationId xmlns:a16="http://schemas.microsoft.com/office/drawing/2014/main" xmlns="" id="{58A6E750-84CF-ABE6-EFC6-FB0465DF5B1C}"/>
+                <a16:creationId xmlns:a16="http://schemas.microsoft.com/office/drawing/2014/main" id="{58A6E750-84CF-ABE6-EFC6-FB0465DF5B1C}"/>
               </a:ext>
             </a:extLst>
           </p:cNvPr>
@@ -24035,7 +24049,7 @@
           <p:cNvPr id="17" name="Slide Number Placeholder 3">
             <a:extLst>
               <a:ext uri="{FF2B5EF4-FFF2-40B4-BE49-F238E27FC236}">
-                <a16:creationId xmlns:a16="http://schemas.microsoft.com/office/drawing/2014/main" xmlns="" id="{75C741BE-C4AB-E613-A2EB-9F3D7D425B81}"/>
+                <a16:creationId xmlns:a16="http://schemas.microsoft.com/office/drawing/2014/main" id="{75C741BE-C4AB-E613-A2EB-9F3D7D425B81}"/>
               </a:ext>
             </a:extLst>
           </p:cNvPr>
@@ -24178,10 +24192,10 @@
           <p:cNvPr id="18" name="Group 17">
             <a:extLst>
               <a:ext uri="{FF2B5EF4-FFF2-40B4-BE49-F238E27FC236}">
-                <a16:creationId xmlns:a16="http://schemas.microsoft.com/office/drawing/2014/main" xmlns="" id="{AEE57456-7DB2-D9E0-3DC1-538B620CB1E2}"/>
+                <a16:creationId xmlns:a16="http://schemas.microsoft.com/office/drawing/2014/main" id="{AEE57456-7DB2-D9E0-3DC1-538B620CB1E2}"/>
               </a:ext>
               <a:ext uri="{C183D7F6-B498-43B3-948B-1728B52AA6E4}">
-                <adec:decorative xmlns:adec="http://schemas.microsoft.com/office/drawing/2017/decorative" xmlns="" val="1"/>
+                <adec:decorative xmlns:adec="http://schemas.microsoft.com/office/drawing/2017/decorative" val="1"/>
               </a:ext>
             </a:extLst>
           </p:cNvPr>
@@ -24189,7 +24203,7 @@
           <p:nvPr>
             <p:extLst>
               <p:ext uri="{386F3935-93C4-4BCD-93E2-E3B085C9AB24}">
-                <p16:designElem xmlns:p16="http://schemas.microsoft.com/office/powerpoint/2015/main" xmlns="" val="1"/>
+                <p16:designElem xmlns:p16="http://schemas.microsoft.com/office/powerpoint/2015/main" val="1"/>
               </p:ext>
             </p:extLst>
           </p:nvPr>
@@ -24207,10 +24221,10 @@
             <p:cNvPr id="19" name="Freeform: Shape 26">
               <a:extLst>
                 <a:ext uri="{FF2B5EF4-FFF2-40B4-BE49-F238E27FC236}">
-                  <a16:creationId xmlns:a16="http://schemas.microsoft.com/office/drawing/2014/main" xmlns="" id="{6ADB1A64-E449-E424-9C0D-1AF876BDF396}"/>
+                  <a16:creationId xmlns:a16="http://schemas.microsoft.com/office/drawing/2014/main" id="{6ADB1A64-E449-E424-9C0D-1AF876BDF396}"/>
                 </a:ext>
                 <a:ext uri="{C183D7F6-B498-43B3-948B-1728B52AA6E4}">
-                  <adec:decorative xmlns:adec="http://schemas.microsoft.com/office/drawing/2017/decorative" xmlns="" val="1"/>
+                  <adec:decorative xmlns:adec="http://schemas.microsoft.com/office/drawing/2017/decorative" val="1"/>
                 </a:ext>
               </a:extLst>
             </p:cNvPr>
@@ -24218,7 +24232,7 @@
             <p:nvPr>
               <p:extLst>
                 <p:ext uri="{386F3935-93C4-4BCD-93E2-E3B085C9AB24}">
-                  <p16:designElem xmlns:p16="http://schemas.microsoft.com/office/powerpoint/2015/main" xmlns="" val="1"/>
+                  <p16:designElem xmlns:p16="http://schemas.microsoft.com/office/powerpoint/2015/main" val="1"/>
                 </p:ext>
               </p:extLst>
             </p:nvPr>
@@ -24605,10 +24619,10 @@
             <p:cNvPr id="20" name="Freeform: Shape 27">
               <a:extLst>
                 <a:ext uri="{FF2B5EF4-FFF2-40B4-BE49-F238E27FC236}">
-                  <a16:creationId xmlns:a16="http://schemas.microsoft.com/office/drawing/2014/main" xmlns="" id="{552BB634-DB1D-6842-4281-027496EA2BB3}"/>
+                  <a16:creationId xmlns:a16="http://schemas.microsoft.com/office/drawing/2014/main" id="{552BB634-DB1D-6842-4281-027496EA2BB3}"/>
                 </a:ext>
                 <a:ext uri="{C183D7F6-B498-43B3-948B-1728B52AA6E4}">
-                  <adec:decorative xmlns:adec="http://schemas.microsoft.com/office/drawing/2017/decorative" xmlns="" val="1"/>
+                  <adec:decorative xmlns:adec="http://schemas.microsoft.com/office/drawing/2017/decorative" val="1"/>
                 </a:ext>
               </a:extLst>
             </p:cNvPr>
@@ -24616,7 +24630,7 @@
             <p:nvPr>
               <p:extLst>
                 <p:ext uri="{386F3935-93C4-4BCD-93E2-E3B085C9AB24}">
-                  <p16:designElem xmlns:p16="http://schemas.microsoft.com/office/powerpoint/2015/main" xmlns="" val="1"/>
+                  <p16:designElem xmlns:p16="http://schemas.microsoft.com/office/powerpoint/2015/main" val="1"/>
                 </p:ext>
               </p:extLst>
             </p:nvPr>
@@ -24797,10 +24811,10 @@
             <p:cNvPr id="21" name="Freeform: Shape 28">
               <a:extLst>
                 <a:ext uri="{FF2B5EF4-FFF2-40B4-BE49-F238E27FC236}">
-                  <a16:creationId xmlns:a16="http://schemas.microsoft.com/office/drawing/2014/main" xmlns="" id="{BBD6908A-5E17-7977-6487-318FB3DA3C96}"/>
+                  <a16:creationId xmlns:a16="http://schemas.microsoft.com/office/drawing/2014/main" id="{BBD6908A-5E17-7977-6487-318FB3DA3C96}"/>
                 </a:ext>
                 <a:ext uri="{C183D7F6-B498-43B3-948B-1728B52AA6E4}">
-                  <adec:decorative xmlns:adec="http://schemas.microsoft.com/office/drawing/2017/decorative" xmlns="" val="1"/>
+                  <adec:decorative xmlns:adec="http://schemas.microsoft.com/office/drawing/2017/decorative" val="1"/>
                 </a:ext>
               </a:extLst>
             </p:cNvPr>
@@ -24808,7 +24822,7 @@
             <p:nvPr>
               <p:extLst>
                 <p:ext uri="{386F3935-93C4-4BCD-93E2-E3B085C9AB24}">
-                  <p16:designElem xmlns:p16="http://schemas.microsoft.com/office/powerpoint/2015/main" xmlns="" val="1"/>
+                  <p16:designElem xmlns:p16="http://schemas.microsoft.com/office/powerpoint/2015/main" val="1"/>
                 </p:ext>
               </p:extLst>
             </p:nvPr>
@@ -25051,10 +25065,10 @@
             <p:cNvPr id="22" name="Freeform: Shape 29">
               <a:extLst>
                 <a:ext uri="{FF2B5EF4-FFF2-40B4-BE49-F238E27FC236}">
-                  <a16:creationId xmlns:a16="http://schemas.microsoft.com/office/drawing/2014/main" xmlns="" id="{01A557D7-B7C4-85B2-1FB2-6EA251876B01}"/>
+                  <a16:creationId xmlns:a16="http://schemas.microsoft.com/office/drawing/2014/main" id="{01A557D7-B7C4-85B2-1FB2-6EA251876B01}"/>
                 </a:ext>
                 <a:ext uri="{C183D7F6-B498-43B3-948B-1728B52AA6E4}">
-                  <adec:decorative xmlns:adec="http://schemas.microsoft.com/office/drawing/2017/decorative" xmlns="" val="1"/>
+                  <adec:decorative xmlns:adec="http://schemas.microsoft.com/office/drawing/2017/decorative" val="1"/>
                 </a:ext>
               </a:extLst>
             </p:cNvPr>
@@ -25062,7 +25076,7 @@
             <p:nvPr>
               <p:extLst>
                 <p:ext uri="{386F3935-93C4-4BCD-93E2-E3B085C9AB24}">
-                  <p16:designElem xmlns:p16="http://schemas.microsoft.com/office/powerpoint/2015/main" xmlns="" val="1"/>
+                  <p16:designElem xmlns:p16="http://schemas.microsoft.com/office/powerpoint/2015/main" val="1"/>
                 </p:ext>
               </p:extLst>
             </p:nvPr>
@@ -25244,7 +25258,7 @@
           <p:cNvPr id="23" name="Picture 22" descr="A hands holding a light bulb&#10;&#10;AI-generated content may be incorrect.">
             <a:extLst>
               <a:ext uri="{FF2B5EF4-FFF2-40B4-BE49-F238E27FC236}">
-                <a16:creationId xmlns:a16="http://schemas.microsoft.com/office/drawing/2014/main" xmlns="" id="{6F93DC9F-B0C2-003C-927D-41C7D7DB01F3}"/>
+                <a16:creationId xmlns:a16="http://schemas.microsoft.com/office/drawing/2014/main" id="{6F93DC9F-B0C2-003C-927D-41C7D7DB01F3}"/>
               </a:ext>
             </a:extLst>
           </p:cNvPr>
@@ -25284,7 +25298,7 @@
         <p:spPr>
           <a:xfrm>
             <a:off x="1180000" y="1280000"/>
-            <a:ext cx="2600000" cy="300000"/>
+            <a:ext cx="2600000" cy="430887"/>
           </a:xfrm>
           <a:prstGeom prst="rect">
             <a:avLst/>
@@ -25305,6 +25319,7 @@
               </a:defRPr>
             </a:pPr>
             <a:r>
+              <a:rPr sz="2200" dirty="0"/>
               <a:t>Functional Modules</a:t>
             </a:r>
           </a:p>
@@ -25319,7 +25334,7 @@
         <p:spPr>
           <a:xfrm>
             <a:off x="1180000" y="1650000"/>
-            <a:ext cx="9300000" cy="2800000"/>
+            <a:ext cx="9300000" cy="2462213"/>
           </a:xfrm>
           <a:prstGeom prst="rect">
             <a:avLst/>
@@ -25340,36 +25355,48 @@
               </a:defRPr>
             </a:pPr>
             <a:r>
+              <a:rPr sz="2200" dirty="0"/>
               <a:t>- Authentication Module: user login and role handling</a:t>
             </a:r>
           </a:p>
           <a:p>
             <a:r>
+              <a:rPr sz="2200" dirty="0"/>
               <a:t>- Session Management Module: create, update, publish, and close interviews</a:t>
             </a:r>
           </a:p>
           <a:p>
             <a:r>
+              <a:rPr sz="2200" dirty="0"/>
               <a:t>- Candidate Module: registration, interview access, and completion tracking</a:t>
             </a:r>
           </a:p>
           <a:p>
             <a:r>
-              <a:t>- Recording Module: video and audio capture using MediaRecorder</a:t>
+              <a:rPr sz="2200" dirty="0"/>
+              <a:t>- Recording Module: video and audio capture using </a:t>
             </a:r>
+            <a:r>
+              <a:rPr sz="2200" dirty="0" err="1"/>
+              <a:t>MediaRecorder</a:t>
+            </a:r>
+            <a:endParaRPr sz="2200" dirty="0"/>
           </a:p>
           <a:p>
             <a:r>
+              <a:rPr sz="2200" dirty="0"/>
               <a:t>- Transcription Module: speech recognition for answer text</a:t>
             </a:r>
           </a:p>
           <a:p>
             <a:r>
+              <a:rPr sz="2200" dirty="0"/>
               <a:t>- AI Analysis Module: keyword, relevance, confidence, and ranking logic</a:t>
             </a:r>
           </a:p>
           <a:p>
             <a:r>
+              <a:rPr sz="2200" dirty="0"/>
               <a:t>- Dashboard Module: candidate list, scores, and recruiter insights</a:t>
             </a:r>
           </a:p>
@@ -25396,7 +25423,7 @@
         <p:cNvPr id="1" name="">
           <a:extLst>
             <a:ext uri="{FF2B5EF4-FFF2-40B4-BE49-F238E27FC236}">
-              <a16:creationId xmlns:a16="http://schemas.microsoft.com/office/drawing/2014/main" xmlns="" id="{128B8961-0E57-6CF4-6A2E-6E3844CE39AA}"/>
+              <a16:creationId xmlns:a16="http://schemas.microsoft.com/office/drawing/2014/main" id="{128B8961-0E57-6CF4-6A2E-6E3844CE39AA}"/>
             </a:ext>
           </a:extLst>
         </p:cNvPr>
@@ -25416,7 +25443,7 @@
           <p:cNvPr id="2" name="Title 1">
             <a:extLst>
               <a:ext uri="{FF2B5EF4-FFF2-40B4-BE49-F238E27FC236}">
-                <a16:creationId xmlns:a16="http://schemas.microsoft.com/office/drawing/2014/main" xmlns="" id="{593BF5FA-4F07-3415-25E3-C29F21EF6F96}"/>
+                <a16:creationId xmlns:a16="http://schemas.microsoft.com/office/drawing/2014/main" id="{593BF5FA-4F07-3415-25E3-C29F21EF6F96}"/>
               </a:ext>
             </a:extLst>
           </p:cNvPr>
@@ -25444,7 +25471,7 @@
           <p:cNvPr id="4" name="Slide Number Placeholder 3">
             <a:extLst>
               <a:ext uri="{FF2B5EF4-FFF2-40B4-BE49-F238E27FC236}">
-                <a16:creationId xmlns:a16="http://schemas.microsoft.com/office/drawing/2014/main" xmlns="" id="{C588901C-CFCA-5956-3989-DB48B37B9594}"/>
+                <a16:creationId xmlns:a16="http://schemas.microsoft.com/office/drawing/2014/main" id="{C588901C-CFCA-5956-3989-DB48B37B9594}"/>
               </a:ext>
             </a:extLst>
           </p:cNvPr>
@@ -25473,7 +25500,7 @@
           <p:cNvPr id="5" name="Picture 2" descr="Sharda University Logo &amp; Brand Assets (SVG, PNG and vector ...">
             <a:extLst>
               <a:ext uri="{FF2B5EF4-FFF2-40B4-BE49-F238E27FC236}">
-                <a16:creationId xmlns:a16="http://schemas.microsoft.com/office/drawing/2014/main" xmlns="" id="{808F960A-289C-591A-BEEA-F0564F0CC1C0}"/>
+                <a16:creationId xmlns:a16="http://schemas.microsoft.com/office/drawing/2014/main" id="{808F960A-289C-591A-BEEA-F0564F0CC1C0}"/>
               </a:ext>
             </a:extLst>
           </p:cNvPr>
@@ -25520,7 +25547,7 @@
           <p:cNvPr id="3" name="Title 1">
             <a:extLst>
               <a:ext uri="{FF2B5EF4-FFF2-40B4-BE49-F238E27FC236}">
-                <a16:creationId xmlns:a16="http://schemas.microsoft.com/office/drawing/2014/main" xmlns="" id="{CF7CB260-476E-D58E-6C85-22C5CE0DCD35}"/>
+                <a16:creationId xmlns:a16="http://schemas.microsoft.com/office/drawing/2014/main" id="{CF7CB260-476E-D58E-6C85-22C5CE0DCD35}"/>
               </a:ext>
             </a:extLst>
           </p:cNvPr>
@@ -25575,7 +25602,7 @@
           <p:cNvPr id="6" name="Slide Number Placeholder 3">
             <a:extLst>
               <a:ext uri="{FF2B5EF4-FFF2-40B4-BE49-F238E27FC236}">
-                <a16:creationId xmlns:a16="http://schemas.microsoft.com/office/drawing/2014/main" xmlns="" id="{6CA2909C-E433-498A-659E-70C518245CC7}"/>
+                <a16:creationId xmlns:a16="http://schemas.microsoft.com/office/drawing/2014/main" id="{6CA2909C-E433-498A-659E-70C518245CC7}"/>
               </a:ext>
             </a:extLst>
           </p:cNvPr>
@@ -25711,7 +25738,7 @@
           <p:cNvPr id="7" name="Picture 2" descr="Sharda University Logo &amp; Brand Assets (SVG, PNG and vector ...">
             <a:extLst>
               <a:ext uri="{FF2B5EF4-FFF2-40B4-BE49-F238E27FC236}">
-                <a16:creationId xmlns:a16="http://schemas.microsoft.com/office/drawing/2014/main" xmlns="" id="{42675280-1BA9-C78D-15BD-C603CC170392}"/>
+                <a16:creationId xmlns:a16="http://schemas.microsoft.com/office/drawing/2014/main" id="{42675280-1BA9-C78D-15BD-C603CC170392}"/>
               </a:ext>
             </a:extLst>
           </p:cNvPr>
@@ -25758,10 +25785,10 @@
           <p:cNvPr id="8" name="Rectangle 7">
             <a:extLst>
               <a:ext uri="{FF2B5EF4-FFF2-40B4-BE49-F238E27FC236}">
-                <a16:creationId xmlns:a16="http://schemas.microsoft.com/office/drawing/2014/main" xmlns="" id="{3E0B5CAE-859F-2E56-77C1-EEF4164DD087}"/>
+                <a16:creationId xmlns:a16="http://schemas.microsoft.com/office/drawing/2014/main" id="{3E0B5CAE-859F-2E56-77C1-EEF4164DD087}"/>
               </a:ext>
               <a:ext uri="{C183D7F6-B498-43B3-948B-1728B52AA6E4}">
-                <adec:decorative xmlns:adec="http://schemas.microsoft.com/office/drawing/2017/decorative" xmlns="" val="1"/>
+                <adec:decorative xmlns:adec="http://schemas.microsoft.com/office/drawing/2017/decorative" val="1"/>
               </a:ext>
             </a:extLst>
           </p:cNvPr>
@@ -25769,7 +25796,7 @@
           <p:nvPr>
             <p:extLst>
               <p:ext uri="{386F3935-93C4-4BCD-93E2-E3B085C9AB24}">
-                <p16:designElem xmlns:p16="http://schemas.microsoft.com/office/powerpoint/2015/main" xmlns="" val="1"/>
+                <p16:designElem xmlns:p16="http://schemas.microsoft.com/office/powerpoint/2015/main" val="1"/>
               </p:ext>
             </p:extLst>
           </p:nvPr>
@@ -25816,10 +25843,10 @@
           <p:cNvPr id="9" name="Rectangle 8">
             <a:extLst>
               <a:ext uri="{FF2B5EF4-FFF2-40B4-BE49-F238E27FC236}">
-                <a16:creationId xmlns:a16="http://schemas.microsoft.com/office/drawing/2014/main" xmlns="" id="{1C52D47E-A735-DAB0-DB53-2B7823EA2BFD}"/>
+                <a16:creationId xmlns:a16="http://schemas.microsoft.com/office/drawing/2014/main" id="{1C52D47E-A735-DAB0-DB53-2B7823EA2BFD}"/>
               </a:ext>
               <a:ext uri="{C183D7F6-B498-43B3-948B-1728B52AA6E4}">
-                <adec:decorative xmlns:adec="http://schemas.microsoft.com/office/drawing/2017/decorative" xmlns="" val="1"/>
+                <adec:decorative xmlns:adec="http://schemas.microsoft.com/office/drawing/2017/decorative" val="1"/>
               </a:ext>
             </a:extLst>
           </p:cNvPr>
@@ -25827,7 +25854,7 @@
           <p:nvPr>
             <p:extLst>
               <p:ext uri="{386F3935-93C4-4BCD-93E2-E3B085C9AB24}">
-                <p16:designElem xmlns:p16="http://schemas.microsoft.com/office/powerpoint/2015/main" xmlns="" val="1"/>
+                <p16:designElem xmlns:p16="http://schemas.microsoft.com/office/powerpoint/2015/main" val="1"/>
               </p:ext>
             </p:extLst>
           </p:nvPr>
@@ -25877,7 +25904,7 @@
           <p:cNvPr id="10" name="TextBox 9">
             <a:extLst>
               <a:ext uri="{FF2B5EF4-FFF2-40B4-BE49-F238E27FC236}">
-                <a16:creationId xmlns:a16="http://schemas.microsoft.com/office/drawing/2014/main" xmlns="" id="{A31126AD-F670-1E1A-0DD5-7E5F8DE779B0}"/>
+                <a16:creationId xmlns:a16="http://schemas.microsoft.com/office/drawing/2014/main" id="{A31126AD-F670-1E1A-0DD5-7E5F8DE779B0}"/>
               </a:ext>
             </a:extLst>
           </p:cNvPr>
@@ -25930,10 +25957,10 @@
           <p:cNvPr id="11" name="Group 10">
             <a:extLst>
               <a:ext uri="{FF2B5EF4-FFF2-40B4-BE49-F238E27FC236}">
-                <a16:creationId xmlns:a16="http://schemas.microsoft.com/office/drawing/2014/main" xmlns="" id="{4B08DE12-9223-0B45-7844-C8442188B03E}"/>
+                <a16:creationId xmlns:a16="http://schemas.microsoft.com/office/drawing/2014/main" id="{4B08DE12-9223-0B45-7844-C8442188B03E}"/>
               </a:ext>
               <a:ext uri="{C183D7F6-B498-43B3-948B-1728B52AA6E4}">
-                <adec:decorative xmlns:adec="http://schemas.microsoft.com/office/drawing/2017/decorative" xmlns="" val="1"/>
+                <adec:decorative xmlns:adec="http://schemas.microsoft.com/office/drawing/2017/decorative" val="1"/>
               </a:ext>
             </a:extLst>
           </p:cNvPr>
@@ -25941,7 +25968,7 @@
           <p:nvPr>
             <p:extLst>
               <p:ext uri="{386F3935-93C4-4BCD-93E2-E3B085C9AB24}">
-                <p16:designElem xmlns:p16="http://schemas.microsoft.com/office/powerpoint/2015/main" xmlns="" val="1"/>
+                <p16:designElem xmlns:p16="http://schemas.microsoft.com/office/powerpoint/2015/main" val="1"/>
               </p:ext>
             </p:extLst>
           </p:nvPr>
@@ -25959,10 +25986,10 @@
             <p:cNvPr id="12" name="Freeform: Shape 20">
               <a:extLst>
                 <a:ext uri="{FF2B5EF4-FFF2-40B4-BE49-F238E27FC236}">
-                  <a16:creationId xmlns:a16="http://schemas.microsoft.com/office/drawing/2014/main" xmlns="" id="{C6B389A5-57A1-5BDD-19D5-935489A75D70}"/>
+                  <a16:creationId xmlns:a16="http://schemas.microsoft.com/office/drawing/2014/main" id="{C6B389A5-57A1-5BDD-19D5-935489A75D70}"/>
                 </a:ext>
                 <a:ext uri="{C183D7F6-B498-43B3-948B-1728B52AA6E4}">
-                  <adec:decorative xmlns:adec="http://schemas.microsoft.com/office/drawing/2017/decorative" xmlns="" val="1"/>
+                  <adec:decorative xmlns:adec="http://schemas.microsoft.com/office/drawing/2017/decorative" val="1"/>
                 </a:ext>
               </a:extLst>
             </p:cNvPr>
@@ -25970,7 +25997,7 @@
             <p:nvPr>
               <p:extLst>
                 <p:ext uri="{386F3935-93C4-4BCD-93E2-E3B085C9AB24}">
-                  <p16:designElem xmlns:p16="http://schemas.microsoft.com/office/powerpoint/2015/main" xmlns="" val="1"/>
+                  <p16:designElem xmlns:p16="http://schemas.microsoft.com/office/powerpoint/2015/main" val="1"/>
                 </p:ext>
               </p:extLst>
             </p:nvPr>
@@ -26171,10 +26198,10 @@
             <p:cNvPr id="13" name="Freeform: Shape 21">
               <a:extLst>
                 <a:ext uri="{FF2B5EF4-FFF2-40B4-BE49-F238E27FC236}">
-                  <a16:creationId xmlns:a16="http://schemas.microsoft.com/office/drawing/2014/main" xmlns="" id="{D47C928B-E00F-1E52-C717-07A5AAF02563}"/>
+                  <a16:creationId xmlns:a16="http://schemas.microsoft.com/office/drawing/2014/main" id="{D47C928B-E00F-1E52-C717-07A5AAF02563}"/>
                 </a:ext>
                 <a:ext uri="{C183D7F6-B498-43B3-948B-1728B52AA6E4}">
-                  <adec:decorative xmlns:adec="http://schemas.microsoft.com/office/drawing/2017/decorative" xmlns="" val="1"/>
+                  <adec:decorative xmlns:adec="http://schemas.microsoft.com/office/drawing/2017/decorative" val="1"/>
                 </a:ext>
               </a:extLst>
             </p:cNvPr>
@@ -26182,7 +26209,7 @@
             <p:nvPr>
               <p:extLst>
                 <p:ext uri="{386F3935-93C4-4BCD-93E2-E3B085C9AB24}">
-                  <p16:designElem xmlns:p16="http://schemas.microsoft.com/office/powerpoint/2015/main" xmlns="" val="1"/>
+                  <p16:designElem xmlns:p16="http://schemas.microsoft.com/office/powerpoint/2015/main" val="1"/>
                 </p:ext>
               </p:extLst>
             </p:nvPr>
@@ -26383,10 +26410,10 @@
             <p:cNvPr id="14" name="Freeform: Shape 22">
               <a:extLst>
                 <a:ext uri="{FF2B5EF4-FFF2-40B4-BE49-F238E27FC236}">
-                  <a16:creationId xmlns:a16="http://schemas.microsoft.com/office/drawing/2014/main" xmlns="" id="{7CA94AD0-2C13-149F-27C4-C1BF48D92C66}"/>
+                  <a16:creationId xmlns:a16="http://schemas.microsoft.com/office/drawing/2014/main" id="{7CA94AD0-2C13-149F-27C4-C1BF48D92C66}"/>
                 </a:ext>
                 <a:ext uri="{C183D7F6-B498-43B3-948B-1728B52AA6E4}">
-                  <adec:decorative xmlns:adec="http://schemas.microsoft.com/office/drawing/2017/decorative" xmlns="" val="1"/>
+                  <adec:decorative xmlns:adec="http://schemas.microsoft.com/office/drawing/2017/decorative" val="1"/>
                 </a:ext>
               </a:extLst>
             </p:cNvPr>
@@ -26394,7 +26421,7 @@
             <p:nvPr>
               <p:extLst>
                 <p:ext uri="{386F3935-93C4-4BCD-93E2-E3B085C9AB24}">
-                  <p16:designElem xmlns:p16="http://schemas.microsoft.com/office/powerpoint/2015/main" xmlns="" val="1"/>
+                  <p16:designElem xmlns:p16="http://schemas.microsoft.com/office/powerpoint/2015/main" val="1"/>
                 </p:ext>
               </p:extLst>
             </p:nvPr>
@@ -26705,10 +26732,10 @@
             <p:cNvPr id="15" name="Freeform: Shape 23">
               <a:extLst>
                 <a:ext uri="{FF2B5EF4-FFF2-40B4-BE49-F238E27FC236}">
-                  <a16:creationId xmlns:a16="http://schemas.microsoft.com/office/drawing/2014/main" xmlns="" id="{81292ABA-6799-0521-BC93-F47A7A145697}"/>
+                  <a16:creationId xmlns:a16="http://schemas.microsoft.com/office/drawing/2014/main" id="{81292ABA-6799-0521-BC93-F47A7A145697}"/>
                 </a:ext>
                 <a:ext uri="{C183D7F6-B498-43B3-948B-1728B52AA6E4}">
-                  <adec:decorative xmlns:adec="http://schemas.microsoft.com/office/drawing/2017/decorative" xmlns="" val="1"/>
+                  <adec:decorative xmlns:adec="http://schemas.microsoft.com/office/drawing/2017/decorative" val="1"/>
                 </a:ext>
               </a:extLst>
             </p:cNvPr>
@@ -26716,7 +26743,7 @@
             <p:nvPr>
               <p:extLst>
                 <p:ext uri="{386F3935-93C4-4BCD-93E2-E3B085C9AB24}">
-                  <p16:designElem xmlns:p16="http://schemas.microsoft.com/office/powerpoint/2015/main" xmlns="" val="1"/>
+                  <p16:designElem xmlns:p16="http://schemas.microsoft.com/office/powerpoint/2015/main" val="1"/>
                 </p:ext>
               </p:extLst>
             </p:nvPr>
@@ -27184,7 +27211,7 @@
           <p:cNvPr id="16" name="Picture 15" descr="A close-up of a logo&#10;&#10;AI-generated content may be incorrect.">
             <a:extLst>
               <a:ext uri="{FF2B5EF4-FFF2-40B4-BE49-F238E27FC236}">
-                <a16:creationId xmlns:a16="http://schemas.microsoft.com/office/drawing/2014/main" xmlns="" id="{52C4D73F-1345-3CA9-C6C5-8928CA105ED5}"/>
+                <a16:creationId xmlns:a16="http://schemas.microsoft.com/office/drawing/2014/main" id="{52C4D73F-1345-3CA9-C6C5-8928CA105ED5}"/>
               </a:ext>
             </a:extLst>
           </p:cNvPr>
@@ -27220,7 +27247,7 @@
           <p:cNvPr id="17" name="Slide Number Placeholder 3">
             <a:extLst>
               <a:ext uri="{FF2B5EF4-FFF2-40B4-BE49-F238E27FC236}">
-                <a16:creationId xmlns:a16="http://schemas.microsoft.com/office/drawing/2014/main" xmlns="" id="{06788EA6-29B6-4A1B-6379-A0B958085489}"/>
+                <a16:creationId xmlns:a16="http://schemas.microsoft.com/office/drawing/2014/main" id="{06788EA6-29B6-4A1B-6379-A0B958085489}"/>
               </a:ext>
             </a:extLst>
           </p:cNvPr>
@@ -27363,10 +27390,10 @@
           <p:cNvPr id="18" name="Group 17">
             <a:extLst>
               <a:ext uri="{FF2B5EF4-FFF2-40B4-BE49-F238E27FC236}">
-                <a16:creationId xmlns:a16="http://schemas.microsoft.com/office/drawing/2014/main" xmlns="" id="{064AE98E-B324-7FD5-5724-C47113E82591}"/>
+                <a16:creationId xmlns:a16="http://schemas.microsoft.com/office/drawing/2014/main" id="{064AE98E-B324-7FD5-5724-C47113E82591}"/>
               </a:ext>
               <a:ext uri="{C183D7F6-B498-43B3-948B-1728B52AA6E4}">
-                <adec:decorative xmlns:adec="http://schemas.microsoft.com/office/drawing/2017/decorative" xmlns="" val="1"/>
+                <adec:decorative xmlns:adec="http://schemas.microsoft.com/office/drawing/2017/decorative" val="1"/>
               </a:ext>
             </a:extLst>
           </p:cNvPr>
@@ -27374,7 +27401,7 @@
           <p:nvPr>
             <p:extLst>
               <p:ext uri="{386F3935-93C4-4BCD-93E2-E3B085C9AB24}">
-                <p16:designElem xmlns:p16="http://schemas.microsoft.com/office/powerpoint/2015/main" xmlns="" val="1"/>
+                <p16:designElem xmlns:p16="http://schemas.microsoft.com/office/powerpoint/2015/main" val="1"/>
               </p:ext>
             </p:extLst>
           </p:nvPr>
@@ -27392,10 +27419,10 @@
             <p:cNvPr id="19" name="Freeform: Shape 26">
               <a:extLst>
                 <a:ext uri="{FF2B5EF4-FFF2-40B4-BE49-F238E27FC236}">
-                  <a16:creationId xmlns:a16="http://schemas.microsoft.com/office/drawing/2014/main" xmlns="" id="{93A260AE-0C5C-4CC3-70C4-9D528AE9D855}"/>
+                  <a16:creationId xmlns:a16="http://schemas.microsoft.com/office/drawing/2014/main" id="{93A260AE-0C5C-4CC3-70C4-9D528AE9D855}"/>
                 </a:ext>
                 <a:ext uri="{C183D7F6-B498-43B3-948B-1728B52AA6E4}">
-                  <adec:decorative xmlns:adec="http://schemas.microsoft.com/office/drawing/2017/decorative" xmlns="" val="1"/>
+                  <adec:decorative xmlns:adec="http://schemas.microsoft.com/office/drawing/2017/decorative" val="1"/>
                 </a:ext>
               </a:extLst>
             </p:cNvPr>
@@ -27403,7 +27430,7 @@
             <p:nvPr>
               <p:extLst>
                 <p:ext uri="{386F3935-93C4-4BCD-93E2-E3B085C9AB24}">
-                  <p16:designElem xmlns:p16="http://schemas.microsoft.com/office/powerpoint/2015/main" xmlns="" val="1"/>
+                  <p16:designElem xmlns:p16="http://schemas.microsoft.com/office/powerpoint/2015/main" val="1"/>
                 </p:ext>
               </p:extLst>
             </p:nvPr>
@@ -27790,10 +27817,10 @@
             <p:cNvPr id="20" name="Freeform: Shape 27">
               <a:extLst>
                 <a:ext uri="{FF2B5EF4-FFF2-40B4-BE49-F238E27FC236}">
-                  <a16:creationId xmlns:a16="http://schemas.microsoft.com/office/drawing/2014/main" xmlns="" id="{F824AC28-C4B1-F6B1-6402-A3E6B78AFF79}"/>
+                  <a16:creationId xmlns:a16="http://schemas.microsoft.com/office/drawing/2014/main" id="{F824AC28-C4B1-F6B1-6402-A3E6B78AFF79}"/>
                 </a:ext>
                 <a:ext uri="{C183D7F6-B498-43B3-948B-1728B52AA6E4}">
-                  <adec:decorative xmlns:adec="http://schemas.microsoft.com/office/drawing/2017/decorative" xmlns="" val="1"/>
+                  <adec:decorative xmlns:adec="http://schemas.microsoft.com/office/drawing/2017/decorative" val="1"/>
                 </a:ext>
               </a:extLst>
             </p:cNvPr>
@@ -27801,7 +27828,7 @@
             <p:nvPr>
               <p:extLst>
                 <p:ext uri="{386F3935-93C4-4BCD-93E2-E3B085C9AB24}">
-                  <p16:designElem xmlns:p16="http://schemas.microsoft.com/office/powerpoint/2015/main" xmlns="" val="1"/>
+                  <p16:designElem xmlns:p16="http://schemas.microsoft.com/office/powerpoint/2015/main" val="1"/>
                 </p:ext>
               </p:extLst>
             </p:nvPr>
@@ -27982,10 +28009,10 @@
             <p:cNvPr id="21" name="Freeform: Shape 28">
               <a:extLst>
                 <a:ext uri="{FF2B5EF4-FFF2-40B4-BE49-F238E27FC236}">
-                  <a16:creationId xmlns:a16="http://schemas.microsoft.com/office/drawing/2014/main" xmlns="" id="{1E9727E5-F04D-5242-381E-4D642EBCFF15}"/>
+                  <a16:creationId xmlns:a16="http://schemas.microsoft.com/office/drawing/2014/main" id="{1E9727E5-F04D-5242-381E-4D642EBCFF15}"/>
                 </a:ext>
                 <a:ext uri="{C183D7F6-B498-43B3-948B-1728B52AA6E4}">
-                  <adec:decorative xmlns:adec="http://schemas.microsoft.com/office/drawing/2017/decorative" xmlns="" val="1"/>
+                  <adec:decorative xmlns:adec="http://schemas.microsoft.com/office/drawing/2017/decorative" val="1"/>
                 </a:ext>
               </a:extLst>
             </p:cNvPr>
@@ -27993,7 +28020,7 @@
             <p:nvPr>
               <p:extLst>
                 <p:ext uri="{386F3935-93C4-4BCD-93E2-E3B085C9AB24}">
-                  <p16:designElem xmlns:p16="http://schemas.microsoft.com/office/powerpoint/2015/main" xmlns="" val="1"/>
+                  <p16:designElem xmlns:p16="http://schemas.microsoft.com/office/powerpoint/2015/main" val="1"/>
                 </p:ext>
               </p:extLst>
             </p:nvPr>
@@ -28236,10 +28263,10 @@
             <p:cNvPr id="22" name="Freeform: Shape 29">
               <a:extLst>
                 <a:ext uri="{FF2B5EF4-FFF2-40B4-BE49-F238E27FC236}">
-                  <a16:creationId xmlns:a16="http://schemas.microsoft.com/office/drawing/2014/main" xmlns="" id="{E7132A91-975B-8373-609C-1F7963E8D47D}"/>
+                  <a16:creationId xmlns:a16="http://schemas.microsoft.com/office/drawing/2014/main" id="{E7132A91-975B-8373-609C-1F7963E8D47D}"/>
                 </a:ext>
                 <a:ext uri="{C183D7F6-B498-43B3-948B-1728B52AA6E4}">
-                  <adec:decorative xmlns:adec="http://schemas.microsoft.com/office/drawing/2017/decorative" xmlns="" val="1"/>
+                  <adec:decorative xmlns:adec="http://schemas.microsoft.com/office/drawing/2017/decorative" val="1"/>
                 </a:ext>
               </a:extLst>
             </p:cNvPr>
@@ -28247,7 +28274,7 @@
             <p:nvPr>
               <p:extLst>
                 <p:ext uri="{386F3935-93C4-4BCD-93E2-E3B085C9AB24}">
-                  <p16:designElem xmlns:p16="http://schemas.microsoft.com/office/powerpoint/2015/main" xmlns="" val="1"/>
+                  <p16:designElem xmlns:p16="http://schemas.microsoft.com/office/powerpoint/2015/main" val="1"/>
                 </p:ext>
               </p:extLst>
             </p:nvPr>
@@ -28429,7 +28456,7 @@
           <p:cNvPr id="23" name="Picture 22" descr="A hands holding a light bulb&#10;&#10;AI-generated content may be incorrect.">
             <a:extLst>
               <a:ext uri="{FF2B5EF4-FFF2-40B4-BE49-F238E27FC236}">
-                <a16:creationId xmlns:a16="http://schemas.microsoft.com/office/drawing/2014/main" xmlns="" id="{62CCCF5C-DE08-D2D7-6A05-49C3680CB5AE}"/>
+                <a16:creationId xmlns:a16="http://schemas.microsoft.com/office/drawing/2014/main" id="{62CCCF5C-DE08-D2D7-6A05-49C3680CB5AE}"/>
               </a:ext>
             </a:extLst>
           </p:cNvPr>
@@ -28504,7 +28531,7 @@
         <p:spPr>
           <a:xfrm>
             <a:off x="1180000" y="1680000"/>
-            <a:ext cx="9300000" cy="2200000"/>
+            <a:ext cx="9300000" cy="1938992"/>
           </a:xfrm>
           <a:prstGeom prst="rect">
             <a:avLst/>
@@ -28525,31 +28552,37 @@
               </a:defRPr>
             </a:pPr>
             <a:r>
+              <a:rPr sz="2000" dirty="0"/>
               <a:t>Phase 1: Authentication and interview session module</a:t>
             </a:r>
           </a:p>
           <a:p>
             <a:r>
+              <a:rPr sz="2000" dirty="0"/>
               <a:t>Phase 2: Avatar training and media capture module</a:t>
             </a:r>
           </a:p>
           <a:p>
             <a:r>
+              <a:rPr sz="2000" dirty="0"/>
               <a:t>Phase 3: Speech-to-text and answer storage module</a:t>
             </a:r>
           </a:p>
           <a:p>
             <a:r>
+              <a:rPr sz="2000" dirty="0"/>
               <a:t>Phase 4: Analysis pipeline using Keyword Match, Relevance Score, Confidence Score,</a:t>
             </a:r>
           </a:p>
           <a:p>
             <a:r>
+              <a:rPr sz="2000" dirty="0"/>
               <a:t>         Weighted Overall Score, and Candidate Ranking algorithms</a:t>
             </a:r>
           </a:p>
           <a:p>
             <a:r>
+              <a:rPr sz="2000" dirty="0"/>
               <a:t>Phase 5: Dashboard analytics, optimization, and production deployment</a:t>
             </a:r>
           </a:p>
@@ -28564,7 +28597,7 @@
         <p:spPr>
           <a:xfrm>
             <a:off x="1180000" y="4200000"/>
-            <a:ext cx="9300000" cy="900000"/>
+            <a:ext cx="9300000" cy="830997"/>
           </a:xfrm>
           <a:prstGeom prst="rect">
             <a:avLst/>
@@ -28585,6 +28618,7 @@
               </a:defRPr>
             </a:pPr>
             <a:r>
+              <a:rPr sz="2400" dirty="0"/>
               <a:t>Pipeline: Input Answer -&gt; Transcription -&gt; Feature Extraction -&gt; Score Calculation -&gt; Ranking -&gt; Dashboard Output</a:t>
             </a:r>
           </a:p>
@@ -28625,7 +28659,7 @@
           <p:cNvPr id="2" name="Title 1">
             <a:extLst>
               <a:ext uri="{FF2B5EF4-FFF2-40B4-BE49-F238E27FC236}">
-                <a16:creationId xmlns:a16="http://schemas.microsoft.com/office/drawing/2014/main" xmlns="" id="{3E58B3AE-D78E-2DFA-3544-ACC07E1F4CA9}"/>
+                <a16:creationId xmlns:a16="http://schemas.microsoft.com/office/drawing/2014/main" id="{3E58B3AE-D78E-2DFA-3544-ACC07E1F4CA9}"/>
               </a:ext>
             </a:extLst>
           </p:cNvPr>
@@ -28654,7 +28688,7 @@
           <p:cNvPr id="4" name="Slide Number Placeholder 3">
             <a:extLst>
               <a:ext uri="{FF2B5EF4-FFF2-40B4-BE49-F238E27FC236}">
-                <a16:creationId xmlns:a16="http://schemas.microsoft.com/office/drawing/2014/main" xmlns="" id="{7DD390EE-1A10-9044-4D2A-E79878422CD2}"/>
+                <a16:creationId xmlns:a16="http://schemas.microsoft.com/office/drawing/2014/main" id="{7DD390EE-1A10-9044-4D2A-E79878422CD2}"/>
               </a:ext>
             </a:extLst>
           </p:cNvPr>
@@ -28683,7 +28717,7 @@
           <p:cNvPr id="6" name="Rectangle 2">
             <a:extLst>
               <a:ext uri="{FF2B5EF4-FFF2-40B4-BE49-F238E27FC236}">
-                <a16:creationId xmlns:a16="http://schemas.microsoft.com/office/drawing/2014/main" xmlns="" id="{192C1A7F-F8E0-0AFD-7993-6C1FDECBCAB1}"/>
+                <a16:creationId xmlns:a16="http://schemas.microsoft.com/office/drawing/2014/main" id="{192C1A7F-F8E0-0AFD-7993-6C1FDECBCAB1}"/>
               </a:ext>
             </a:extLst>
           </p:cNvPr>
@@ -29499,7 +29533,7 @@
   <a:extraClrSchemeLst/>
   <a:extLst>
     <a:ext uri="{05A4C25C-085E-4340-85A3-A5531E510DB2}">
-      <thm15:themeFamily xmlns:thm15="http://schemas.microsoft.com/office/thememl/2012/main" xmlns="" name="Office Theme" id="{62F939B6-93AF-4DB8-9C6B-D6C7DFDC589F}" vid="{4A3C46E8-61CC-4603-A589-7422A47A8E4A}"/>
+      <thm15:themeFamily xmlns:thm15="http://schemas.microsoft.com/office/thememl/2012/main" name="Office Theme" id="{62F939B6-93AF-4DB8-9C6B-D6C7DFDC589F}" vid="{4A3C46E8-61CC-4603-A589-7422A47A8E4A}"/>
     </a:ext>
   </a:extLst>
 </a:theme>
@@ -29794,7 +29828,7 @@
   <a:extraClrSchemeLst/>
   <a:extLst>
     <a:ext uri="{05A4C25C-085E-4340-85A3-A5531E510DB2}">
-      <thm15:themeFamily xmlns:thm15="http://schemas.microsoft.com/office/thememl/2012/main" xmlns="" name="Office Theme" id="{62F939B6-93AF-4DB8-9C6B-D6C7DFDC589F}" vid="{4A3C46E8-61CC-4603-A589-7422A47A8E4A}"/>
+      <thm15:themeFamily xmlns:thm15="http://schemas.microsoft.com/office/thememl/2012/main" name="Office Theme" id="{62F939B6-93AF-4DB8-9C6B-D6C7DFDC589F}" vid="{4A3C46E8-61CC-4603-A589-7422A47A8E4A}"/>
     </a:ext>
   </a:extLst>
 </a:theme>
